--- a/notebooks/미리랩_발표.pptx
+++ b/notebooks/미리랩_발표.pptx
@@ -25,6 +25,7 @@
     <p:sldId id="273" r:id="rId25"/>
     <p:sldId id="274" r:id="rId26"/>
     <p:sldId id="275" r:id="rId27"/>
+    <p:sldId id="276" r:id="rId28"/>
   </p:sldIdLst>
   <p:sldSz cx="12191695" cy="6858000" type="screen4x3"/>
   <p:notesSz cx="6858000" cy="9144000"/>
@@ -661,7 +662,7 @@
           <a:lstStyle/>
           <a:p>
             <a:r>
-              <a:t>두 번째 시행착오. 일부러 극단 정책 '전 국민 10억 지급'을 넣어봤더니 전원 찬성이 나왔습니다. 시민들이 실현 가능성이나 부작용은 안 보고 '내가 받느냐'만 따지는 계산기였던 거죠. 프롬프트 최상단에 '현실적으로 판단하라'는 원칙을 넣었더니 10억 지급은 전원 반대로 바뀌었습니다. 다만 정직하게 — 정상 정책의 혼란도까지 살짝 올라가는 과교정이 생겼고, 이 미세 튜닝은 남은 과제로 기록해 뒀습니다. 저희는 시행착오를 숨기지 않고 그대로 보여드립니다.</a:t>
+              <a:t>두 번째 시행착오 — 이건 두 막짜리입니다. 1막: 극단 정책 '전 국민 10억 지급'에 전원 찬성이 나왔습니다. 시민들이 '내가 받느냐'만 따지는 계산기였던 거죠. 프롬프트에 '현실적으로 판단하라'를 넣자 전원 반대로 바뀌어 해결된 듯 보였습니다. 2막: 그 처방이 정상 정책의 혼란도까지 끌어올리는 과교정을 만들었고, 결국 프롬프트를 전면 재설계하면서 판단 지시를 전부 철거했습니다 — 프롬프트는 무대만 제공하고, 판단은 페르소나 데이터에서 나오게. 진짜 답은 지시가 아니라 측정 방식(점수를 익명 설문로)과 모델 선택(Gemini 전환)이었습니다. '프롬프트로 조향하지 마라'가 이 시행착오의 최종 교훈이고, 이 원칙 위에서 다음 장의 검증이 돌아갑니다.</a:t>
             </a:r>
           </a:p>
         </p:txBody>
@@ -801,7 +802,7 @@
           <a:lstStyle/>
           <a:p>
             <a:r>
-              <a:t>이제 '이걸 믿을 수 있나'에 답합니다. 미리랩은 예측 정확도를 주장하지 않는 대신, Generative Agents 논문과 같은 방식의 컴포넌트 ablation으로 방어합니다. 페르소나 주입을 켠 것과 끈 것을 비교하면 — 인물 간 점수 표준편차가 21에서 9로 붕괴하고, 디지털 문해력과 이해도 점수의 상관이 0.6~0.8에서 0으로 떨어집니다. 오른쪽 사례가 직관적입니다: 같은 60세 무직 시민이 페르소나를 빼는 순간 청년 정책에 '수혜 90점'을 줍니다. 반응이 페르소나에서 나온다는 증거입니다.</a:t>
+              <a:t>이제 '이걸 믿을 수 있나'에 답합니다. 미리랩은 예측 정확도를 주장하지 않는 대신 세 가지를 검증합니다 — 재료(시민이 인구를 닮았나), 작동(차이를 만드는 게 페르소나인가), 한계(이상한 입력에 상식을 지키나). 방법론의 핵심은 사전등록: 판정 기준을 실행 전에 문서로 박고, 결과가 나빠도 점수를 고치지 않습니다. 아래 그림이 ① 재료 검증 — 전체 100만 명 분포(회색)와 우리 24명(파랑)을 변수별로 비교해, '무작위로 24명을 뽑아도 생기는 어긋남'의 정상 범위 안인지 부트스트랩 1만 번으로 판정했습니다. 7개 변수 전부 통과. 데이터셋 자체의 현실 정합은 NVIDIA가 카드에 검증·문서화한 것을 인용합니다. (참고: 구척도 시절 720회 반복 검증(집단화 eta² 0.8, 입장 안정성 82%)도 있었으나 설문 전환 이전 자료라 본 검증 세트에서는 역사 기록으로만 남김.)</a:t>
             </a:r>
           </a:p>
         </p:txBody>
@@ -871,7 +872,7 @@
           <a:lstStyle/>
           <a:p>
             <a:r>
-              <a:t>두 번째 검증은 '한 번의 우연이 아니냐'에 대한 답입니다. 24명을 30회씩, 총 720회 반응을 모았습니다. 연령이 수혜·의향 점수를 가르는 정도(eta 제곱)가 0.8 수준 — 반응이 무작위 잡음이 아니라 인구통계 집단으로 구조화된다는 뜻입니다. 입장은 완전 분리됐고(청년 반대 0, 노인 찬성 0), 같은 시민을 반복해도 입장이 82% 유지됩니다. 무작위면 33%죠. 그리고 정직하게: LLM이라 절대값은 매번 출렁이지만, 방향은 항상 일관됩니다. 절대값이 아니라 구조를 믿어 달라는 게 저희 주장입니다.</a:t>
+              <a:t>검증 ②의 이야기는 저희 발표에서 가장 정직한 대목입니다. 기준을 먼저 등록하고 돌렸더니 0대 4로 떨어졌습니다 — 그리고 점수는 그대로 둔 채 원자료를 부검했더니, 떨어진 이유가 반전이었습니다. 우리 채점 기준은 나이와 소득만 보고 젊은 10명을 '대상자'라 표시했는데, 시뮬 속 시민들은 정책 원문의 별도거주·무주택·소득 요건까지 읽고 전원이 '나는 해당 안 됨'을 정확히 판정한 겁니다. 실제 청년월세도 신청자 3명 중 2명이 요건에서 탈락했으니, 시뮬이 현실을 맞게 재현했고 채점표가 그걸 몰랐던 거죠. 아래 그림이 진짜 증거입니다 — 익명이면 '나도 도움되겠지'로 낙관하던 응답(회색)이, 인물 카드가 들어가는 순간 자기 처지(영향 없음 99%)로 수렴합니다. 페르소나가 차이를 만든다는 건 분산이 아니라 이 '평균 이동'으로 증명됐습니다. 사전등록 원칙대로 점수는 0/4 그대로 두고, 채점 도구 재설계는 다음 사이클로 남겼습니다 — 기준이 틀렸다고 기준을 몰래 고치면 검증이 아니니까요.</a:t>
             </a:r>
           </a:p>
         </p:txBody>
@@ -941,7 +942,7 @@
           <a:lstStyle/>
           <a:p>
             <a:r>
-              <a:t>확장 파트 첫 번째, 게시판 RAG입니다. 2일차에 'MVP에서 제외'로 좁혔던 RAG가 마지막에 팀의 손으로 돌아왔습니다. 시민이나 입안자가 정책 문서에 질문하면, 벡터 검색으로 찾은 근거 '안에서만' 답하고 근거와 품질지표를 함께 보여줍니다. 협업 방식이 포인트인데 — 본체에는 자리와 반환 계약만 설계해 두고 팀원이 독립 패키지로 구현해서 마지막에 끼워 넣었습니다. 키가 없으면 추출식 폴백으로 동작하니 데모도 안전합니다.</a:t>
+              <a:t>검증 ③은 행동 벤치마크 — 일부러 만든 가상 정책 5종(일부는 농담조)을 넣고 사회가 상식 방향으로 갈라지는지 보는 고정 시험지입니다. 기대 방향은 실행 전에 등록했고, 7개 체크 전부 통과했습니다. 무임승차 폐지엔 60세 이상이 반대 57%로 갈라지고(미만은 6%), 여성에게서 걷어 남성에게 주는 부조리 정책엔 여성 전원이 반대합니다. 백미 두 개 — 전 국민 반려묘 보급의 유일한 찬성자는 페르소나 서사에 펫푸드 창업 꿈이 있는 시민이었고, 남성에게 돈을 주는 정책에 남성의 23%가 '우리 집 전체로는 0원'이라며 반대했습니다. 입장이 인구통계를 넘어 서사·가구 단위 사고와 정렬된다는 증거입니다. 그리고 이 벤치마크는 일회용이 아니라 — 모델이나 프롬프트를 바꿀 때마다 다시 돌려 '여전히 사람답게 구는가'를 확인하는 회귀 테스트로 씁니다. 5종 전부 데모 녹화본이라 지금 이 자리에서 키 없이 재생 시연도 가능합니다.</a:t>
             </a:r>
           </a:p>
         </p:txBody>
@@ -1011,7 +1012,7 @@
           <a:lstStyle/>
           <a:p>
             <a:r>
-              <a:t>마지막 확장, 미리마을입니다. Generative Agents 논문의 원형 — 에이전트가 공간에서 스케줄대로 살아가는 마을을 포켓몬식 오버월드로 구현했습니다. LLM이 10명 각자의 하루를 생성하면 브라우저는 LLM 호출 없이 재생만 합니다. 발표 중에도 안전하죠. 재미있는 시행착오가 있었는데, LLM이 짠 스케줄은 순간이동을 가정해서 막상 걸어가면 만남의 절반이 증발했습니다. 실제 도보 시간을 시뮬해서 만남을 다시 뽑았고요. 그리고 시키지 않았는데 캐릭터들이 서로를 일정에 엮고, 같은 카페 사장이 손님마다 다른 대화를 하는 '창발'이 나타났습니다. [Q&amp;A 대비 — "손으로 안 만든다더니 모순 아니냐": 축 A·B의 통계 샘플은 '대표성'이 목적이라 무작위 추출이 맞고, 미리마을은 '전파'가 목적이라 서로 아는 관계가 필수입니다. 무작위 샘플엔 관계가 없으니 손제작 — 목적이 다르면 재료도 다릅니다.]</a:t>
+              <a:t>확장 파트 첫 번째, 게시판 RAG입니다. 2일차에 'MVP에서 제외'로 좁혔던 RAG가 마지막에 팀의 손으로 돌아왔습니다. 시민이나 입안자가 정책 문서에 질문하면, 벡터 검색으로 찾은 근거 '안에서만' 답하고 근거와 품질지표를 함께 보여줍니다. 협업 방식이 포인트인데 — 본체에는 자리와 반환 계약만 설계해 두고 팀원이 독립 패키지로 구현해서 마지막에 끼워 넣었습니다. 키가 없으면 추출식 폴백으로 동작하니 데모도 안전합니다.</a:t>
             </a:r>
           </a:p>
         </p:txBody>
@@ -1081,7 +1082,7 @@
           <a:lstStyle/>
           <a:p>
             <a:r>
-              <a:t>미리마을에 정책을 주입하면 질문이 바뀝니다. '효과가 어떤가'가 아니라 '소식이 누구에게, 어떤 경로로 닿는가'. 복지관 어르신 두 분만 아는 상태로 시작하면, 마을 사람들이 스케줄대로 살다가 마주친 대화에서 소식이 옮습니다. 밤에는 각자 일기로 하루를 압축해 다음날의 기억이 되고요. 실측 결과 하루 만에 10명 중 8명에게 퍼졌는데, 동선이 안 겹친 두 명이 사각지대로 남았습니다. 12장에서 보신 '전파 게이트'가 바로 이 무대의 코드 가드입니다. 그리고 중요한 것 — 처음에 버렸던 '전파'가 여기서 부활했습니다. 여긴 서로 아는 마을이라 전파가 연출이 아니라 관계와 동선의 결과이기 때문입니다. → 이 슬라이드 직후 미리마을 재생 데모(60~90초): 발표 첫 장에서 약속한 '이 친구들이 직접 움직이는 모습'을 여기서 회수합니다. 녹화 재생이라 LLM 0콜, 발표장 네트워크와 무관하게 안전.</a:t>
+              <a:t>마지막 확장, 미리마을입니다. Generative Agents 논문의 원형 — 에이전트가 공간에서 스케줄대로 살아가는 마을을 포켓몬식 오버월드로 구현했습니다. LLM이 10명 각자의 하루를 생성하면 브라우저는 LLM 호출 없이 재생만 합니다. 발표 중에도 안전하죠. 재미있는 시행착오가 있었는데, LLM이 짠 스케줄은 순간이동을 가정해서 막상 걸어가면 만남의 절반이 증발했습니다. 실제 도보 시간을 시뮬해서 만남을 다시 뽑았고요. 그리고 시키지 않았는데 캐릭터들이 서로를 일정에 엮고, 같은 카페 사장이 손님마다 다른 대화를 하는 '창발'이 나타났습니다. [Q&amp;A 대비 — "손으로 안 만든다더니 모순 아니냐": 축 A·B의 통계 샘플은 '대표성'이 목적이라 무작위 추출이 맞고, 미리마을은 '전파'가 목적이라 서로 아는 관계가 필수입니다. 무작위 샘플엔 관계가 없으니 손제작 — 목적이 다르면 재료도 다릅니다.]</a:t>
             </a:r>
           </a:p>
         </p:txBody>
@@ -1151,7 +1152,7 @@
           <a:lstStyle/>
           <a:p>
             <a:r>
-              <a:t>기능 얘기를 마치기 전에, 4일 동안 4명이 서로의 작업을 깨지 않게 한 규율을 짧게 소개합니다. 공유 스키마는 변경 금지·추가만 허용하는 팀 계약으로 묶었고, 키 없이 도는 mock 모드와 헤드리스 회귀 스크립트 덕분에 누가 무엇을 바꿔도 안전하게 검증했습니다. 게시판 RAG가 마지막 날 본체를 한 줄도 안 깨고 들어올 수 있었던 게 이 규율의 실증입니다. (시간이 빠듯하면 이 장은 한 문장으로 줄이고 넘어가도 됩니다. 역할 분담 줄은 실제 팀 구성으로 채워주세요.)</a:t>
+              <a:t>미리마을에 정책을 주입하면 질문이 바뀝니다. '효과가 어떤가'가 아니라 '소식이 누구에게, 어떤 경로로 닿는가'. 복지관 어르신 두 분만 아는 상태로 시작하면, 마을 사람들이 스케줄대로 살다가 마주친 대화에서 소식이 옮습니다. 밤에는 각자 일기로 하루를 압축해 다음날의 기억이 되고요. 실측 결과 하루 만에 10명 중 8명에게 퍼졌는데, 동선이 안 겹친 두 명이 사각지대로 남았습니다. 12장에서 보신 '전파 게이트'가 바로 이 무대의 코드 가드입니다. 그리고 중요한 것 — 처음에 버렸던 '전파'가 여기서 부활했습니다. 여긴 서로 아는 마을이라 전파가 연출이 아니라 관계와 동선의 결과이기 때문입니다. → 이 슬라이드 직후 미리마을 재생 데모(60~90초): 발표 첫 장에서 약속한 '이 친구들이 직접 움직이는 모습'을 여기서 회수합니다. 녹화 재생이라 LLM 0콜, 발표장 네트워크와 무관하게 안전.</a:t>
             </a:r>
           </a:p>
         </p:txBody>
@@ -1221,7 +1222,7 @@
           <a:lstStyle/>
           <a:p>
             <a:r>
-              <a:t>마무리 전에 한계를 저희 입으로 먼저 말씀드립니다. 미리랩은 미래를 맞히는 도구가 아니고, 그렇게 주장하지도 않습니다. 소득 판정은 휴리스틱 근사이고, 현실성 프롬프트엔 과교정이 남아 있고, 표본은 작습니다. LLM이 LLM을 채점하는 순환 한계도 있고요. 저희가 보여드린 건 '정확한 예측'이 아니라 — 페르소나에 근거하고, 반복해도 재현되고, 집단으로 구조화되는 '영향 시나리오'입니다. 이 정직한 선 긋기가 저희 설계의 일부입니다.</a:t>
+              <a:t>기능 얘기를 마치기 전에, 4일 동안 4명이 서로의 작업을 깨지 않게 한 규율을 짧게 소개합니다. 공유 스키마는 변경 금지·추가만 허용하는 팀 계약으로 묶었고, 키 없이 도는 mock 모드와 헤드리스 회귀 스크립트 덕분에 누가 무엇을 바꿔도 안전하게 검증했습니다. 게시판 RAG가 마지막 날 본체를 한 줄도 안 깨고 들어올 수 있었던 게 이 규율의 실증입니다. (시간이 빠듯하면 이 장은 한 문장으로 줄이고 넘어가도 됩니다. 역할 분담 줄은 실제 팀 구성으로 채워주세요.)</a:t>
             </a:r>
           </a:p>
         </p:txBody>
@@ -1361,7 +1362,77 @@
           <a:lstStyle/>
           <a:p>
             <a:r>
-              <a:t>정리하면 — 미리랩은 실제 인구통계 기반 가상 시민에게 정책을 먼저 물어봐서, '같은 정책, 다른 인생'의 갈림을 배포 전에 보여주는 실험실입니다. 다음 단계의 1순위는 실데이터 대조 — 실제 청년월세 신청률·인지율 통계와 시뮬 방향을 맞대보는 외적 타당도 확보입니다. 이어서 페르소나 RAG, 미리마을 누적 기억, 프롬프트 튜닝이 준비돼 있습니다. 들어주셔서 감사합니다. (Q&amp;A 예상 질문: ①'실제 사람 반응과 맞는지 확인했나' → 정직하게: 아직 내적 검증(ablation·집단화·견고성)까지이고, 실통계와의 방향 대조가 다음 1순위라고 답변. Park et al.도 human eval과 비교했음을 인지하고 있다고 덧붙이면 강함 ②비용은 → 시뮬 1회 약 1.3센트, 720회 검증도 약 $0.3 ③실제 입안자가 어떻게 쓰나 → 4장 컨셉의 사각지대 발견 + 7장 A/B 폐루프로 답변)</a:t>
+              <a:t>마무리 전에 한계를 저희 입으로 먼저 말씀드립니다. 미리랩은 미래를 맞히는 도구가 아니고, 그렇게 주장하지도 않습니다. 소득 판정은 휴리스틱 근사이고, '안 믿지만 받으면 좋지'를 분리할 실현 기대 측정축이 아직 없고, 표본은 작습니다. 그리고 가장 큰 공백을 정직하게 — 과거 정책 4건을 당시 여론조사와 직접 맞대본 갭 측정에서 찬성률 평균 오차가 27.4%p였고, 주범은 이념·가치 축 부재로 인한 '반대 진영 소실'이었습니다. 이건 프롬프트 수정이 아니라 페르소나 데이터 강화로 풀 문제로 진단해 뒀습니다. 저희가 보여드린 건 '정확한 예측'이 아니라 — 페르소나에 근거하고, 상식 방향으로 구조화되고, 기준을 먼저 등록하고 재는 '영향 시나리오'입니다. 이 정직한 선 긋기가 저희 설계의 일부입니다.</a:t>
+            </a:r>
+          </a:p>
+        </p:txBody>
+      </p:sp>
+      <p:sp>
+        <p:nvSpPr>
+          <p:cNvPr id="4" name="Slide Number Placeholder 3"/>
+          <p:cNvSpPr>
+            <a:spLocks noGrp="1"/>
+          </p:cNvSpPr>
+          <p:nvPr>
+            <p:ph type="sldNum" idx="5" sz="quarter"/>
+          </p:nvPr>
+        </p:nvSpPr>
+        <p:spPr/>
+      </p:sp>
+    </p:spTree>
+  </p:cSld>
+  <p:clrMapOvr>
+    <a:masterClrMapping/>
+  </p:clrMapOvr>
+</p:notes>
+</file>
+
+<file path=ppt/notesSlides/notesSlide21.xml><?xml version="1.0" encoding="utf-8"?>
+<p:notes xmlns:a="http://schemas.openxmlformats.org/drawingml/2006/main" xmlns:p="http://schemas.openxmlformats.org/presentationml/2006/main" xmlns:r="http://schemas.openxmlformats.org/officeDocument/2006/relationships">
+  <p:cSld>
+    <p:spTree>
+      <p:nvGrpSpPr>
+        <p:cNvPr id="1" name=""/>
+        <p:cNvGrpSpPr/>
+        <p:nvPr/>
+      </p:nvGrpSpPr>
+      <p:grpSpPr>
+        <a:xfrm>
+          <a:off x="0" y="0"/>
+          <a:ext cx="0" cy="0"/>
+          <a:chOff x="0" y="0"/>
+          <a:chExt cx="0" cy="0"/>
+        </a:xfrm>
+      </p:grpSpPr>
+      <p:sp>
+        <p:nvSpPr>
+          <p:cNvPr id="2" name="Slide Image Placeholder 1"/>
+          <p:cNvSpPr>
+            <a:spLocks noGrp="1"/>
+          </p:cNvSpPr>
+          <p:nvPr>
+            <p:ph type="sldImg" idx="2"/>
+          </p:nvPr>
+        </p:nvSpPr>
+        <p:spPr/>
+      </p:sp>
+      <p:sp>
+        <p:nvSpPr>
+          <p:cNvPr id="3" name="Notes Placeholder 2"/>
+          <p:cNvSpPr>
+            <a:spLocks noGrp="1"/>
+          </p:cNvSpPr>
+          <p:nvPr>
+            <p:ph type="body" idx="3" sz="quarter"/>
+          </p:nvPr>
+        </p:nvSpPr>
+        <p:spPr/>
+        <p:txBody>
+          <a:bodyPr/>
+          <a:lstStyle/>
+          <a:p>
+            <a:r>
+              <a:t>정리하면 — 미리랩은 실제 인구통계 기반 가상 시민에게 정책을 먼저 물어봐서, '같은 정책, 다른 인생'의 갈림을 배포 전에 보여주는 실험실입니다. 다음 단계의 1순위는 이념·가치 축 — 과거 정책 갭 측정에서 확인된 '반대 진영 소실'(찬성률 MAE 27.4%p)을 페르소나 데이터 강화로 푸는 일입니다. 이어서 실현 기대 문항, Gemini 기준 갭 리베이스라인, 미리마을 확장이 준비돼 있습니다. 들어주셔서 감사합니다. (Q&amp;A 예상 질문: ①'실제 사람 반응과 맞는지 확인했나' → 정직하게: 과거 정책 4건을 당시 여론조사와 직접 맞대봤고 평균 오차 27.4%p, 주범(이념축 부재)과 처방(데이터 강화)까지 진단해 둔 상태라고 답변. Park et al.도 human eval과 비교했음을 인지하고 있다고 덧붙이면 강함 ②비용은 → 시뮬 1회 1~2센트, 검증·벤치마크 전체 세트도 몇 달러 수준 ③실제 입안자가 어떻게 쓰나 → 4장 컨셉의 사각지대 발견 + 정책 개선 탭의 종합 리포트(.md)로 답변)</a:t>
             </a:r>
           </a:p>
         </p:txBody>
@@ -1571,7 +1642,7 @@
           <a:lstStyle/>
           <a:p>
             <a:r>
-              <a:t>전체 구조입니다. 바닥에는 실제 한국 인구통계 기반 페르소나 파이프라인이 있고, 그 위에 두 축이 섭니다. 축 A '시민 반응'은 집단의 온도 — 시민 전원이 정책에 점수와 입장으로 반응하고 게이지·히트맵으로 집계됩니다. 축 B '정책 인생극장'은 개인의 궤적 — 1·3·6개월 시간 경과 속에서 각자의 인생이 어떻게 갈리는지 봅니다. 이 모든 게 Streamlit 7탭 앱으로 통합돼 있고, API 키가 없어도 mock 모드로 전체 데모가 돌아갑니다. 발표 중 네트워크가 죽어도 데모는 안 죽습니다.</a:t>
+              <a:t>전체 구조입니다. 바닥에는 실제 한국 인구통계 기반 페르소나 파이프라인이 있고, 그 위에 두 축이 섭니다. 축 A '시민 반응'은 집단의 온도 — 시민 전원이 정책에 입장과 익명 설문으로 반응하고 게이지·히트맵으로 집계됩니다. 점수 숫자는 LLM이 아니라 코드가 변환합니다('판단은 LLM, 단위는 코드'). 축 B '정책 인생극장'은 개인의 궤적 — 1·3·6개월 시간 경과 속에서 각자의 인생이 어떻게 갈리는지 봅니다. 마지막엔 두 축을 종합한 고정 양식 리포트가 나옵니다. 이 모든 게 Streamlit 7탭 앱으로 통합돼 있고, 데모 모드는 실제 Gemini 시뮬을 미리 녹화해 재생하는 방식이라 — 발표 중 네트워크가 죽어도 '진짜 결과'로 시연이 돌아갑니다. 시민 모델은 사이드바에서 선택 가능(OpenAI/Gemini), 현재 기본은 gemini-3-flash.</a:t>
             </a:r>
           </a:p>
         </p:txBody>
@@ -1641,7 +1712,7 @@
           <a:lstStyle/>
           <a:p>
             <a:r>
-              <a:t>페르소나는 손으로 만들지 않았습니다. NVIDIA가 통계청 등 실제 통계로 합성한 100만 행 데이터셋에서 seed 고정으로 샘플링합니다. 손으로 만들면 보고 싶은 반응을 심게 되니까요. 실제 분포에서 뽑으면 사각지대 인물이 '이미 시드 안에' 들어 있습니다. 데이터셋에 없는 디지털 문해력·소득 같은 신호는 LLM이 아니라 순수 파이썬 규칙으로 유도해서, 같은 입력이면 항상 같은 값이 나옵니다 — 재현성이 발표 안정성이기도 합니다.</a:t>
+              <a:t>페르소나는 손으로 만들지 않았습니다. NVIDIA가 통계청·대법원·건보공단 등 실제 통계로 합성한 100만 행 데이터셋에서 seed 고정으로 샘플링합니다. 손으로 만들면 보고 싶은 반응을 심게 되니까요. 실제 분포에서 뽑으면 사각지대 인물이 '이미 시드 안에' 들어 있습니다. 데이터셋 자체의 현실 정합은 제작사(NVIDIA)가 카드에 검증·문서화했고(고령층 성비 1.52배, 최다 성씨 김 21.5% 등), 저희는 '거기서 쏠림 없이 뽑았는가'를 부트스트랩 1만회로 검증해 7개 변수 전부 통과했습니다(검증 ①, 뒤 04장). 데이터에 없는 신호는 순수 파이썬 규칙으로 유도하고, 정부 신뢰처럼 정보가 없는 값은 자리표시자임을 정직하게 표기합니다. 재현성이 발표 안정성이기도 합니다.</a:t>
             </a:r>
           </a:p>
         </p:txBody>
@@ -1711,7 +1782,7 @@
           <a:lstStyle/>
           <a:p>
             <a:r>
-              <a:t>축 A는 LangGraph 3노드 파이프라인입니다. 시민 각자가 정책에 1차 반응하고(react), 다른 시민의 반응을 본 뒤 입장을 바꾸기도 하고(interact), 마지막에 분석가 노드가 집계해서 수정안까지 제안합니다(aggregate). 화면에는 게이지 3종과 시민 전원의 히트맵이 뜨고, 행을 클릭하면 그 시민의 생생한 한마디가 보입니다. 그리고 여기서 끝나지 않고 — 진단된 병목으로 수정안을 만들어 '같은 시민'에게 다시 실험하는 A/B 폐루프까지 닫혀 있습니다. 진단→수정→재실험, 그래서 '실험실'입니다. (캡처는 데모 시뮬 돌린 직후 시민 반응 탭 화면을 권장) [Q&amp;A 대비 — 사회혼란도 정의: 3번의 재정의 끝에 '반발 강도 = 불만 점수 평균'으로 확정. v1 양극화는 '전쟁=전원 반대'에서 혼란도가 낮게 나와 폐기(이름≠측정), v2 사각지대(benefit−intent)는 데모에서 0이라 폐기. 찬반 갈림은 stance 분포 바가, '왜' 화났는지는 서사가 맡음 — 정량은 게이지, 정성은 서사로 분리.]</a:t>
+              <a:t>축 A는 LangGraph 3노드 파이프라인입니다. 시민 각자가 정책에 1차 반응하고(react), 다른 시민의 반응을 본 뒤 입장을 바꾸기도 하고(interact), 마지막에 분석가 노드가 집계합니다(aggregate). 점수는 LLM이 0~100을 직접 매기지 않습니다 — 익명 설문의 선택지만 고르고, 숫자 변환은 코드가 합니다. (구버전 '마음을 숫자로 옮기기'는 기분이 전 점수에 번지는 정서 후광을 만들어 폐기 — 비대상 노인이 청년 정책에 수혜 70을 주던 버그가 설문 전환으로 해소.) 화면에는 게이지 3종과 시민 전원의 히트맵이 뜨고, 행을 클릭하면 그 시민의 생생한 한마디가 보입니다. 마지막 산출은 고정 양식 6절 종합 리포트 — 숫자와 인용은 결정론 코드가 채우고 LLM은 산문 4칸만 씁니다. (초기엔 수정안을 같은 시민으로 재실험하는 A/B 폐루프였으나, LLM 비결정성 탓에 델타가 노이즈와 구분 안 돼 리포트로 교체 — 시행착오의 일부입니다.) [Q&amp;A 대비 — 사회혼란도 정의: 3번의 재정의 끝에 '반발 강도 = 불만 점수 평균'으로 확정. v1 양극화는 '전쟁=전원 반대'에서 혼란도가 낮게 나와 폐기(이름≠측정), v2 사각지대(benefit−intent)는 데모에서 0이라 폐기. 찬반 갈림은 stance 분포 바가, '왜' 화났는지는 서사가 맡음 — 정량은 게이지, 정성은 서사로 분리.]</a:t>
             </a:r>
           </a:p>
         </p:txBody>
@@ -5535,7 +5606,7 @@
                 <a:ea typeface="맑은 고딕"/>
                 <a:cs typeface="맑은 고딕"/>
               </a:rPr>
-              <a:t>시행착오 ① — ‘두 심판 문제’: 예측을 버리고 결과로</a:t>
+              <a:t>시행착오 ① — 두 심판 문제</a:t>
             </a:r>
           </a:p>
         </p:txBody>
@@ -5777,7 +5848,7 @@
                 <a:ea typeface="맑은 고딕"/>
                 <a:cs typeface="맑은 고딕"/>
               </a:rPr>
-              <a:t> LLM이 정한다. 두 심판은 당연히 어긋난다.</a:t>
+              <a:t> LLM이 정한다. 두 심판은 서로 어긋난다.</a:t>
             </a:r>
           </a:p>
           <a:p>
@@ -5801,7 +5872,7 @@
                 <a:ea typeface="맑은 고딕"/>
                 <a:cs typeface="맑은 고딕"/>
               </a:rPr>
-              <a:t>통찰  </a:t>
+              <a:t>결론  </a:t>
             </a:r>
             <a:r>
               <a:rPr sz="1400" b="0" i="0">
@@ -5964,7 +6035,7 @@
                 <a:ea typeface="맑은 고딕"/>
                 <a:cs typeface="맑은 고딕"/>
               </a:rPr>
-              <a:t>시뮬 전에 점수 매트릭스로 3명을 ‘점친다’</a:t>
+              <a:t>시뮬 전에 점수 매트릭스로 3명을 미리 고른다</a:t>
             </a:r>
           </a:p>
           <a:p>
@@ -6164,7 +6235,7 @@
                 <a:ea typeface="맑은 고딕"/>
                 <a:cs typeface="맑은 고딕"/>
               </a:rPr>
-              <a:t>전원을 먼저 ‘살게’ 한 뒤</a:t>
+              <a:t>전원을 먼저 살게 한 뒤</a:t>
             </a:r>
             <a:r>
               <a:rPr sz="1200" b="0" i="0">
@@ -6245,7 +6316,7 @@
                 <a:ea typeface="맑은 고딕"/>
                 <a:cs typeface="맑은 고딕"/>
               </a:rPr>
-              <a:t>심판은 하나. 전원 시뮬 비용도 확인 결과 OK</a:t>
+              <a:t>심판이 하나로 통일됨. 전원 시뮬 비용도 확인 결과 문제없음</a:t>
             </a:r>
           </a:p>
         </p:txBody>
@@ -7225,7 +7296,7 @@
                 <a:ea typeface="맑은 고딕"/>
                 <a:cs typeface="맑은 고딕"/>
               </a:rPr>
-              <a:t>정직한 노트 — 과교정</a:t>
+              <a:t>그 후 — 이 처방은 결국 철거됐다</a:t>
             </a:r>
           </a:p>
           <a:p>
@@ -7249,7 +7320,7 @@
                 <a:ea typeface="맑은 고딕"/>
                 <a:cs typeface="맑은 고딕"/>
               </a:rPr>
-              <a:t>현실성 원칙을 넣자 정상 정책(청년 월세)의 혼란도까지 다소 올랐다. 모든 정책에 기본 우려가 깔리는 ‘과교정’ 신호.</a:t>
+              <a:t>‘현실적으로 판단하라’를 넣자 정상 정책의 혼란도까지 오르는 과교정 발생 → 프롬프트 전면 재설계(판단 지시 0줄, 무대만 제공)로 지시 자체를 철거.</a:t>
             </a:r>
           </a:p>
           <a:p>
@@ -7273,7 +7344,7 @@
                 <a:ea typeface="맑은 고딕"/>
                 <a:cs typeface="맑은 고딕"/>
               </a:rPr>
-              <a:t>→ ‘우려를 정책이 무리한 정도에 비례시키는’ 미세 튜닝은 </a:t>
+              <a:t>답은 지시가 아니라 측정(설문 전환·자가판정)과 모델 선택(Gemini)이었다. </a:t>
             </a:r>
             <a:r>
               <a:rPr sz="1300" b="1" i="0">
@@ -7284,7 +7355,7 @@
                 <a:ea typeface="맑은 고딕"/>
                 <a:cs typeface="맑은 고딕"/>
               </a:rPr>
-              <a:t>남은 과제로 기록</a:t>
+              <a:t>교훈: 프롬프트로 조향하지 마라.</a:t>
             </a:r>
             <a:r>
               <a:rPr sz="1300" b="0" i="0">
@@ -7295,7 +7366,7 @@
                 <a:ea typeface="맑은 고딕"/>
                 <a:cs typeface="맑은 고딕"/>
               </a:rPr>
-              <a:t> — 시행착오를 숨기지 않는다.</a:t>
+              <a:t>  분포는 데이터와 측정으로 푼다.</a:t>
             </a:r>
           </a:p>
         </p:txBody>
@@ -7805,7 +7876,7 @@
                 <a:ea typeface="맑은 고딕"/>
                 <a:cs typeface="맑은 고딕"/>
               </a:rPr>
-              <a:t>결과: 조유정이 “자격은 되는데 서류에 막힘” 최고의 사각 사례가 됨</a:t>
+              <a:t>결과: 조유정이 ‘자격은 되는데 서류에 막힘’ 사각 사례로 바르게 남음</a:t>
             </a:r>
           </a:p>
         </p:txBody>
@@ -7972,7 +8043,7 @@
                 <a:ea typeface="맑은 고딕"/>
                 <a:cs typeface="맑은 고딕"/>
               </a:rPr>
-              <a:t>결과: 비대상자는 ‘무관’으로 정직하게 분류</a:t>
+              <a:t>결과: 비대상자는 ‘무관’으로 분류</a:t>
             </a:r>
           </a:p>
         </p:txBody>
@@ -8295,7 +8366,7 @@
                 <a:ea typeface="맑은 고딕"/>
                 <a:cs typeface="맑은 고딕"/>
               </a:rPr>
-              <a:t>신뢰성 ① — ablation: 반응은 페르소나에서 나오는가</a:t>
+              <a:t>검증 — 세 가지 질문: 재료 · 작동 · 한계</a:t>
             </a:r>
           </a:p>
         </p:txBody>
@@ -8407,256 +8478,14 @@
       </p:sp>
       <p:sp>
         <p:nvSpPr>
-          <p:cNvPr id="6" name="TextBox 5"/>
-          <p:cNvSpPr txBox="1"/>
+          <p:cNvPr id="6" name="Rounded Rectangle 5"/>
+          <p:cNvSpPr/>
           <p:nvPr/>
         </p:nvSpPr>
         <p:spPr>
           <a:xfrm>
             <a:off x="548640" y="1554480"/>
-            <a:ext cx="5760720" cy="2194560"/>
-          </a:xfrm>
-          <a:prstGeom prst="rect">
-            <a:avLst/>
-          </a:prstGeom>
-          <a:noFill/>
-        </p:spPr>
-        <p:txBody>
-          <a:bodyPr wrap="square" lIns="0" rIns="0" tIns="0" bIns="0">
-            <a:spAutoFit/>
-          </a:bodyPr>
-          <a:lstStyle/>
-          <a:p>
-            <a:pPr algn="l">
-              <a:lnSpc>
-                <a:spcPct val="112000"/>
-              </a:lnSpc>
-              <a:spcBef>
-                <a:spcPts val="0"/>
-              </a:spcBef>
-              <a:spcAft>
-                <a:spcPts val="500"/>
-              </a:spcAft>
-            </a:pPr>
-            <a:r>
-              <a:rPr sz="1400" b="1" i="0">
-                <a:solidFill>
-                  <a:srgbClr val="1F3A5F"/>
-                </a:solidFill>
-                <a:latin typeface="맑은 고딕"/>
-                <a:ea typeface="맑은 고딕"/>
-                <a:cs typeface="맑은 고딕"/>
-              </a:rPr>
-              <a:t>방법 (Park et al. 스타일 컴포넌트 ablation)</a:t>
-            </a:r>
-          </a:p>
-          <a:p>
-            <a:pPr algn="l">
-              <a:lnSpc>
-                <a:spcPct val="112000"/>
-              </a:lnSpc>
-              <a:spcBef>
-                <a:spcPts val="0"/>
-              </a:spcBef>
-              <a:spcAft>
-                <a:spcPts val="800"/>
-              </a:spcAft>
-            </a:pPr>
-            <a:r>
-              <a:rPr sz="1250" b="1" i="0">
-                <a:solidFill>
-                  <a:srgbClr val="2E9E6B"/>
-                </a:solidFill>
-                <a:latin typeface="맑은 고딕"/>
-                <a:ea typeface="맑은 고딕"/>
-                <a:cs typeface="맑은 고딕"/>
-              </a:rPr>
-              <a:t>grounding ON</a:t>
-            </a:r>
-            <a:r>
-              <a:rPr sz="1250" b="0" i="0">
-                <a:solidFill>
-                  <a:srgbClr val="1F2937"/>
-                </a:solidFill>
-                <a:latin typeface="맑은 고딕"/>
-                <a:ea typeface="맑은 고딕"/>
-                <a:cs typeface="맑은 고딕"/>
-              </a:rPr>
-              <a:t> = 페르소나(나이·소득·디지털·신뢰) 주입   vs   </a:t>
-            </a:r>
-            <a:r>
-              <a:rPr sz="1250" b="1" i="0">
-                <a:solidFill>
-                  <a:srgbClr val="D9534F"/>
-                </a:solidFill>
-                <a:latin typeface="맑은 고딕"/>
-                <a:ea typeface="맑은 고딕"/>
-                <a:cs typeface="맑은 고딕"/>
-              </a:rPr>
-              <a:t>OFF</a:t>
-            </a:r>
-            <a:r>
-              <a:rPr sz="1250" b="0" i="0">
-                <a:solidFill>
-                  <a:srgbClr val="1F2937"/>
-                </a:solidFill>
-                <a:latin typeface="맑은 고딕"/>
-                <a:ea typeface="맑은 고딕"/>
-                <a:cs typeface="맑은 고딕"/>
-              </a:rPr>
-              <a:t> = 익명 시민</a:t>
-            </a:r>
-          </a:p>
-          <a:p>
-            <a:pPr algn="l">
-              <a:lnSpc>
-                <a:spcPct val="118000"/>
-              </a:lnSpc>
-              <a:spcBef>
-                <a:spcPts val="0"/>
-              </a:spcBef>
-              <a:spcAft>
-                <a:spcPts val="600"/>
-              </a:spcAft>
-            </a:pPr>
-            <a:r>
-              <a:rPr sz="1250" b="1" i="0">
-                <a:solidFill>
-                  <a:srgbClr val="2D6CDF"/>
-                </a:solidFill>
-                <a:latin typeface="맑은 고딕"/>
-                <a:ea typeface="맑은 고딕"/>
-                <a:cs typeface="맑은 고딕"/>
-              </a:rPr>
-              <a:t>•  </a:t>
-            </a:r>
-            <a:r>
-              <a:rPr sz="1250" b="1" i="0">
-                <a:solidFill>
-                  <a:srgbClr val="1F2937"/>
-                </a:solidFill>
-                <a:latin typeface="맑은 고딕"/>
-                <a:ea typeface="맑은 고딕"/>
-                <a:cs typeface="맑은 고딕"/>
-              </a:rPr>
-              <a:t>인물 간 점수 표준편차 21 → 9로 붕괴</a:t>
-            </a:r>
-            <a:r>
-              <a:rPr sz="1250" b="0" i="0">
-                <a:solidFill>
-                  <a:srgbClr val="6B7280"/>
-                </a:solidFill>
-                <a:latin typeface="맑은 고딕"/>
-                <a:ea typeface="맑은 고딕"/>
-                <a:cs typeface="맑은 고딕"/>
-              </a:rPr>
-              <a:t>  (OFF면 시민들이 비슷하게 뭉개짐)</a:t>
-            </a:r>
-          </a:p>
-          <a:p>
-            <a:pPr algn="l">
-              <a:lnSpc>
-                <a:spcPct val="118000"/>
-              </a:lnSpc>
-              <a:spcBef>
-                <a:spcPts val="0"/>
-              </a:spcBef>
-              <a:spcAft>
-                <a:spcPts val="600"/>
-              </a:spcAft>
-            </a:pPr>
-            <a:r>
-              <a:rPr sz="1250" b="1" i="0">
-                <a:solidFill>
-                  <a:srgbClr val="2D6CDF"/>
-                </a:solidFill>
-                <a:latin typeface="맑은 고딕"/>
-                <a:ea typeface="맑은 고딕"/>
-                <a:cs typeface="맑은 고딕"/>
-              </a:rPr>
-              <a:t>•  </a:t>
-            </a:r>
-            <a:r>
-              <a:rPr sz="1250" b="1" i="0">
-                <a:solidFill>
-                  <a:srgbClr val="1F2937"/>
-                </a:solidFill>
-                <a:latin typeface="맑은 고딕"/>
-                <a:ea typeface="맑은 고딕"/>
-                <a:cs typeface="맑은 고딕"/>
-              </a:rPr>
-              <a:t>collapse score +0.25~0.29</a:t>
-            </a:r>
-            <a:r>
-              <a:rPr sz="1250" b="0" i="0">
-                <a:solidFill>
-                  <a:srgbClr val="6B7280"/>
-                </a:solidFill>
-                <a:latin typeface="맑은 고딕"/>
-                <a:ea typeface="맑은 고딕"/>
-                <a:cs typeface="맑은 고딕"/>
-              </a:rPr>
-              <a:t>  — 반복 실행마다 일관되게 양수</a:t>
-            </a:r>
-          </a:p>
-          <a:p>
-            <a:pPr algn="l">
-              <a:lnSpc>
-                <a:spcPct val="118000"/>
-              </a:lnSpc>
-              <a:spcBef>
-                <a:spcPts val="0"/>
-              </a:spcBef>
-              <a:spcAft>
-                <a:spcPts val="600"/>
-              </a:spcAft>
-            </a:pPr>
-            <a:r>
-              <a:rPr sz="1250" b="1" i="0">
-                <a:solidFill>
-                  <a:srgbClr val="2D6CDF"/>
-                </a:solidFill>
-                <a:latin typeface="맑은 고딕"/>
-                <a:ea typeface="맑은 고딕"/>
-                <a:cs typeface="맑은 고딕"/>
-              </a:rPr>
-              <a:t>•  </a:t>
-            </a:r>
-            <a:r>
-              <a:rPr sz="1250" b="1" i="0">
-                <a:solidFill>
-                  <a:srgbClr val="1F2937"/>
-                </a:solidFill>
-                <a:latin typeface="맑은 고딕"/>
-                <a:ea typeface="맑은 고딕"/>
-                <a:cs typeface="맑은 고딕"/>
-              </a:rPr>
-              <a:t>수렴 타당도: digital_literacy ↔ 이해도  r = 0.6~0.8</a:t>
-            </a:r>
-            <a:r>
-              <a:rPr sz="1250" b="0" i="0">
-                <a:solidFill>
-                  <a:srgbClr val="6B7280"/>
-                </a:solidFill>
-                <a:latin typeface="맑은 고딕"/>
-                <a:ea typeface="맑은 고딕"/>
-                <a:cs typeface="맑은 고딕"/>
-              </a:rPr>
-              <a:t>  (OFF면 r은 0 부근)</a:t>
-            </a:r>
-          </a:p>
-        </p:txBody>
-      </p:sp>
-      <p:sp>
-        <p:nvSpPr>
-          <p:cNvPr id="7" name="Rounded Rectangle 6"/>
-          <p:cNvSpPr/>
-          <p:nvPr/>
-        </p:nvSpPr>
-        <p:spPr>
-          <a:xfrm>
-            <a:off x="6492240" y="1554480"/>
-            <a:ext cx="5148072" cy="2194560"/>
+            <a:ext cx="11091672" cy="731520"/>
           </a:xfrm>
           <a:prstGeom prst="roundRect">
             <a:avLst>
@@ -8664,11 +8493,11 @@
             </a:avLst>
           </a:prstGeom>
           <a:solidFill>
-            <a:srgbClr val="F4F6FA"/>
+            <a:srgbClr val="EAF0F8"/>
           </a:solidFill>
-          <a:ln w="9525">
+          <a:ln w="12700">
             <a:solidFill>
-              <a:srgbClr val="DDE3EC"/>
+              <a:srgbClr val="1F3A5F"/>
             </a:solidFill>
           </a:ln>
           <a:effectLst/>
@@ -8697,14 +8526,120 @@
       </p:sp>
       <p:sp>
         <p:nvSpPr>
-          <p:cNvPr id="8" name="TextBox 7"/>
+          <p:cNvPr id="7" name="TextBox 6"/>
           <p:cNvSpPr txBox="1"/>
           <p:nvPr/>
         </p:nvSpPr>
         <p:spPr>
           <a:xfrm>
-            <a:off x="6720840" y="1719072"/>
-            <a:ext cx="4709160" cy="1920240"/>
+            <a:off x="868680" y="1682496"/>
+            <a:ext cx="10515600" cy="502920"/>
+          </a:xfrm>
+          <a:prstGeom prst="rect">
+            <a:avLst/>
+          </a:prstGeom>
+          <a:noFill/>
+        </p:spPr>
+        <p:txBody>
+          <a:bodyPr wrap="square" lIns="0" rIns="0" tIns="0" bIns="0" anchor="ctr">
+            <a:spAutoFit/>
+          </a:bodyPr>
+          <a:lstStyle/>
+          <a:p>
+            <a:pPr algn="ctr">
+              <a:lnSpc>
+                <a:spcPct val="112000"/>
+              </a:lnSpc>
+              <a:spcBef>
+                <a:spcPts val="0"/>
+              </a:spcBef>
+              <a:spcAft>
+                <a:spcPts val="0"/>
+              </a:spcAft>
+            </a:pPr>
+            <a:r>
+              <a:rPr sz="1400" b="0" i="0">
+                <a:solidFill>
+                  <a:srgbClr val="1F2937"/>
+                </a:solidFill>
+                <a:latin typeface="맑은 고딕"/>
+                <a:ea typeface="맑은 고딕"/>
+                <a:cs typeface="맑은 고딕"/>
+              </a:rPr>
+              <a:t>‘미래를 맞혔나’는 검증하지 않는다 — </a:t>
+            </a:r>
+            <a:r>
+              <a:rPr sz="1400" b="1" i="0">
+                <a:solidFill>
+                  <a:srgbClr val="1F3A5F"/>
+                </a:solidFill>
+                <a:latin typeface="맑은 고딕"/>
+                <a:ea typeface="맑은 고딕"/>
+                <a:cs typeface="맑은 고딕"/>
+              </a:rPr>
+              <a:t>기준을 실행 전에 등록하고(사전등록), 결과가 나빠도 점수를 고치지 않는다</a:t>
+            </a:r>
+          </a:p>
+        </p:txBody>
+      </p:sp>
+      <p:sp>
+        <p:nvSpPr>
+          <p:cNvPr id="8" name="Rounded Rectangle 7"/>
+          <p:cNvSpPr/>
+          <p:nvPr/>
+        </p:nvSpPr>
+        <p:spPr>
+          <a:xfrm>
+            <a:off x="548640" y="2468880"/>
+            <a:ext cx="3593592" cy="1371600"/>
+          </a:xfrm>
+          <a:prstGeom prst="roundRect">
+            <a:avLst>
+              <a:gd name="adj" fmla="val 8000"/>
+            </a:avLst>
+          </a:prstGeom>
+          <a:solidFill>
+            <a:srgbClr val="EAF6F0"/>
+          </a:solidFill>
+          <a:ln w="12700">
+            <a:solidFill>
+              <a:srgbClr val="2E9E6B"/>
+            </a:solidFill>
+          </a:ln>
+          <a:effectLst/>
+        </p:spPr>
+        <p:style>
+          <a:lnRef idx="1">
+            <a:schemeClr val="accent1"/>
+          </a:lnRef>
+          <a:fillRef idx="3">
+            <a:schemeClr val="accent1"/>
+          </a:fillRef>
+          <a:effectRef idx="2">
+            <a:schemeClr val="accent1"/>
+          </a:effectRef>
+          <a:fontRef idx="minor">
+            <a:schemeClr val="lt1"/>
+          </a:fontRef>
+        </p:style>
+        <p:txBody>
+          <a:bodyPr rtlCol="0" anchor="ctr" wrap="square" lIns="109728" rIns="109728" tIns="54864" bIns="54864"/>
+          <a:lstStyle/>
+          <a:p>
+            <a:pPr algn="ctr"/>
+          </a:p>
+        </p:txBody>
+      </p:sp>
+      <p:sp>
+        <p:nvSpPr>
+          <p:cNvPr id="9" name="TextBox 8"/>
+          <p:cNvSpPr txBox="1"/>
+          <p:nvPr/>
+        </p:nvSpPr>
+        <p:spPr>
+          <a:xfrm>
+            <a:off x="731520" y="2596896"/>
+            <a:ext cx="3246120" cy="1143000"/>
           </a:xfrm>
           <a:prstGeom prst="rect">
             <a:avLst/>
@@ -8719,31 +8654,7 @@
           <a:p>
             <a:pPr algn="l">
               <a:lnSpc>
-                <a:spcPct val="112000"/>
-              </a:lnSpc>
-              <a:spcBef>
-                <a:spcPts val="0"/>
-              </a:spcBef>
-              <a:spcAft>
-                <a:spcPts val="600"/>
-              </a:spcAft>
-            </a:pPr>
-            <a:r>
-              <a:rPr sz="1300" b="1" i="0">
-                <a:solidFill>
-                  <a:srgbClr val="1F3A5F"/>
-                </a:solidFill>
-                <a:latin typeface="맑은 고딕"/>
-                <a:ea typeface="맑은 고딕"/>
-                <a:cs typeface="맑은 고딕"/>
-              </a:rPr>
-              <a:t>숫자를 사람 말로 — 신선옥 (60세, 무직)</a:t>
-            </a:r>
-          </a:p>
-          <a:p>
-            <a:pPr algn="l">
-              <a:lnSpc>
-                <a:spcPct val="112000"/>
+                <a:spcPct val="120000"/>
               </a:lnSpc>
               <a:spcBef>
                 <a:spcPts val="0"/>
@@ -8753,7 +8664,7 @@
               </a:spcAft>
             </a:pPr>
             <a:r>
-              <a:rPr sz="1250" b="1" i="0">
+              <a:rPr sz="1350" b="1" i="0">
                 <a:solidFill>
                   <a:srgbClr val="2E9E6B"/>
                 </a:solidFill>
@@ -8761,10 +8672,10 @@
                 <a:ea typeface="맑은 고딕"/>
                 <a:cs typeface="맑은 고딕"/>
               </a:rPr>
-              <a:t>ON   </a:t>
-            </a:r>
-            <a:r>
-              <a:rPr sz="1250" b="0" i="0">
+              <a:t>① 재료  </a:t>
+            </a:r>
+            <a:r>
+              <a:rPr sz="1150" b="0" i="0">
                 <a:solidFill>
                   <a:srgbClr val="1F2937"/>
                 </a:solidFill>
@@ -8772,34 +8683,23 @@
                 <a:ea typeface="맑은 고딕"/>
                 <a:cs typeface="맑은 고딕"/>
               </a:rPr>
-              <a:t>“나에게는 해당이 없다” — 반대 · 수혜 0</a:t>
-            </a:r>
-          </a:p>
-          <a:p>
-            <a:pPr algn="l">
-              <a:lnSpc>
-                <a:spcPct val="112000"/>
-              </a:lnSpc>
-              <a:spcBef>
-                <a:spcPts val="0"/>
-              </a:spcBef>
-              <a:spcAft>
-                <a:spcPts val="800"/>
-              </a:spcAft>
-            </a:pPr>
-            <a:r>
-              <a:rPr sz="1250" b="1" i="0">
-                <a:solidFill>
-                  <a:srgbClr val="D9534F"/>
-                </a:solidFill>
-                <a:latin typeface="맑은 고딕"/>
-                <a:ea typeface="맑은 고딕"/>
-                <a:cs typeface="맑은 고딕"/>
-              </a:rPr>
-              <a:t>OFF  </a:t>
-            </a:r>
-            <a:r>
-              <a:rPr sz="1250" b="0" i="0">
+              <a:t>시민 24명이 한국 인구를 닮았나?</a:t>
+            </a:r>
+          </a:p>
+          <a:p>
+            <a:pPr algn="l">
+              <a:lnSpc>
+                <a:spcPct val="122000"/>
+              </a:lnSpc>
+              <a:spcBef>
+                <a:spcPts val="0"/>
+              </a:spcBef>
+              <a:spcAft>
+                <a:spcPts val="0"/>
+              </a:spcAft>
+            </a:pPr>
+            <a:r>
+              <a:rPr sz="1100" b="0" i="0">
                 <a:solidFill>
                   <a:srgbClr val="1F2937"/>
                 </a:solidFill>
@@ -8807,38 +8707,274 @@
                 <a:ea typeface="맑은 고딕"/>
                 <a:cs typeface="맑은 고딕"/>
               </a:rPr>
-              <a:t>“좋은 정책이다” — 찬성 · 수혜 90</a:t>
-            </a:r>
-          </a:p>
-          <a:p>
-            <a:pPr algn="l">
-              <a:lnSpc>
-                <a:spcPct val="125000"/>
-              </a:lnSpc>
-              <a:spcBef>
-                <a:spcPts val="0"/>
-              </a:spcBef>
-              <a:spcAft>
-                <a:spcPts val="0"/>
-              </a:spcAft>
-            </a:pPr>
+              <a:t>분포 7/7 통과 — 무작위 추출 기대범위 안 (부트스트랩 1만회, LLM 0콜)</a:t>
+            </a:r>
+          </a:p>
+        </p:txBody>
+      </p:sp>
+      <p:sp>
+        <p:nvSpPr>
+          <p:cNvPr id="10" name="Rounded Rectangle 9"/>
+          <p:cNvSpPr/>
+          <p:nvPr/>
+        </p:nvSpPr>
+        <p:spPr>
+          <a:xfrm>
+            <a:off x="4297679" y="2468880"/>
+            <a:ext cx="3593592" cy="1371600"/>
+          </a:xfrm>
+          <a:prstGeom prst="roundRect">
+            <a:avLst>
+              <a:gd name="adj" fmla="val 8000"/>
+            </a:avLst>
+          </a:prstGeom>
+          <a:solidFill>
+            <a:srgbClr val="FDF3E4"/>
+          </a:solidFill>
+          <a:ln w="12700">
+            <a:solidFill>
+              <a:srgbClr val="E8902A"/>
+            </a:solidFill>
+          </a:ln>
+          <a:effectLst/>
+        </p:spPr>
+        <p:style>
+          <a:lnRef idx="1">
+            <a:schemeClr val="accent1"/>
+          </a:lnRef>
+          <a:fillRef idx="3">
+            <a:schemeClr val="accent1"/>
+          </a:fillRef>
+          <a:effectRef idx="2">
+            <a:schemeClr val="accent1"/>
+          </a:effectRef>
+          <a:fontRef idx="minor">
+            <a:schemeClr val="lt1"/>
+          </a:fontRef>
+        </p:style>
+        <p:txBody>
+          <a:bodyPr rtlCol="0" anchor="ctr" wrap="square" lIns="109728" rIns="109728" tIns="54864" bIns="54864"/>
+          <a:lstStyle/>
+          <a:p>
+            <a:pPr algn="ctr"/>
+          </a:p>
+        </p:txBody>
+      </p:sp>
+      <p:sp>
+        <p:nvSpPr>
+          <p:cNvPr id="11" name="TextBox 10"/>
+          <p:cNvSpPr txBox="1"/>
+          <p:nvPr/>
+        </p:nvSpPr>
+        <p:spPr>
+          <a:xfrm>
+            <a:off x="4480559" y="2596896"/>
+            <a:ext cx="3246120" cy="1143000"/>
+          </a:xfrm>
+          <a:prstGeom prst="rect">
+            <a:avLst/>
+          </a:prstGeom>
+          <a:noFill/>
+        </p:spPr>
+        <p:txBody>
+          <a:bodyPr wrap="square" lIns="0" rIns="0" tIns="0" bIns="0">
+            <a:spAutoFit/>
+          </a:bodyPr>
+          <a:lstStyle/>
+          <a:p>
+            <a:pPr algn="l">
+              <a:lnSpc>
+                <a:spcPct val="120000"/>
+              </a:lnSpc>
+              <a:spcBef>
+                <a:spcPts val="0"/>
+              </a:spcBef>
+              <a:spcAft>
+                <a:spcPts val="400"/>
+              </a:spcAft>
+            </a:pPr>
+            <a:r>
+              <a:rPr sz="1350" b="1" i="0">
+                <a:solidFill>
+                  <a:srgbClr val="E8902A"/>
+                </a:solidFill>
+                <a:latin typeface="맑은 고딕"/>
+                <a:ea typeface="맑은 고딕"/>
+                <a:cs typeface="맑은 고딕"/>
+              </a:rPr>
+              <a:t>② 작동  </a:t>
+            </a:r>
             <a:r>
               <a:rPr sz="1150" b="0" i="0">
                 <a:solidFill>
-                  <a:srgbClr val="6B7280"/>
-                </a:solidFill>
-                <a:latin typeface="맑은 고딕"/>
-                <a:ea typeface="맑은 고딕"/>
-                <a:cs typeface="맑은 고딕"/>
-              </a:rPr>
-              <a:t>페르소나를 빼는 순간, 60세 무직 시민이 청년 정책의 수혜자가 ‘된다’. grounding이 차이를 만든다.</a:t>
+                  <a:srgbClr val="1F2937"/>
+                </a:solidFill>
+                <a:latin typeface="맑은 고딕"/>
+                <a:ea typeface="맑은 고딕"/>
+                <a:cs typeface="맑은 고딕"/>
+              </a:rPr>
+              <a:t>결과 차이를 만드는 게 페르소나인가?</a:t>
+            </a:r>
+          </a:p>
+          <a:p>
+            <a:pPr algn="l">
+              <a:lnSpc>
+                <a:spcPct val="122000"/>
+              </a:lnSpc>
+              <a:spcBef>
+                <a:spcPts val="0"/>
+              </a:spcBef>
+              <a:spcAft>
+                <a:spcPts val="0"/>
+              </a:spcAft>
+            </a:pPr>
+            <a:r>
+              <a:rPr sz="1100" b="0" i="0">
+                <a:solidFill>
+                  <a:srgbClr val="1F2937"/>
+                </a:solidFill>
+                <a:latin typeface="맑은 고딕"/>
+                <a:ea typeface="맑은 고딕"/>
+                <a:cs typeface="맑은 고딕"/>
+              </a:rPr>
+              <a:t>사전등록 점수 0/4 — 원자료 분석에서 원인 확인 (다음 장)</a:t>
+            </a:r>
+          </a:p>
+        </p:txBody>
+      </p:sp>
+      <p:sp>
+        <p:nvSpPr>
+          <p:cNvPr id="12" name="Rounded Rectangle 11"/>
+          <p:cNvSpPr/>
+          <p:nvPr/>
+        </p:nvSpPr>
+        <p:spPr>
+          <a:xfrm>
+            <a:off x="8046719" y="2468880"/>
+            <a:ext cx="3593592" cy="1371600"/>
+          </a:xfrm>
+          <a:prstGeom prst="roundRect">
+            <a:avLst>
+              <a:gd name="adj" fmla="val 8000"/>
+            </a:avLst>
+          </a:prstGeom>
+          <a:solidFill>
+            <a:srgbClr val="EAF6F0"/>
+          </a:solidFill>
+          <a:ln w="12700">
+            <a:solidFill>
+              <a:srgbClr val="2E9E6B"/>
+            </a:solidFill>
+          </a:ln>
+          <a:effectLst/>
+        </p:spPr>
+        <p:style>
+          <a:lnRef idx="1">
+            <a:schemeClr val="accent1"/>
+          </a:lnRef>
+          <a:fillRef idx="3">
+            <a:schemeClr val="accent1"/>
+          </a:fillRef>
+          <a:effectRef idx="2">
+            <a:schemeClr val="accent1"/>
+          </a:effectRef>
+          <a:fontRef idx="minor">
+            <a:schemeClr val="lt1"/>
+          </a:fontRef>
+        </p:style>
+        <p:txBody>
+          <a:bodyPr rtlCol="0" anchor="ctr" wrap="square" lIns="109728" rIns="109728" tIns="54864" bIns="54864"/>
+          <a:lstStyle/>
+          <a:p>
+            <a:pPr algn="ctr"/>
+          </a:p>
+        </p:txBody>
+      </p:sp>
+      <p:sp>
+        <p:nvSpPr>
+          <p:cNvPr id="13" name="TextBox 12"/>
+          <p:cNvSpPr txBox="1"/>
+          <p:nvPr/>
+        </p:nvSpPr>
+        <p:spPr>
+          <a:xfrm>
+            <a:off x="8229599" y="2596896"/>
+            <a:ext cx="3246120" cy="1143000"/>
+          </a:xfrm>
+          <a:prstGeom prst="rect">
+            <a:avLst/>
+          </a:prstGeom>
+          <a:noFill/>
+        </p:spPr>
+        <p:txBody>
+          <a:bodyPr wrap="square" lIns="0" rIns="0" tIns="0" bIns="0">
+            <a:spAutoFit/>
+          </a:bodyPr>
+          <a:lstStyle/>
+          <a:p>
+            <a:pPr algn="l">
+              <a:lnSpc>
+                <a:spcPct val="120000"/>
+              </a:lnSpc>
+              <a:spcBef>
+                <a:spcPts val="0"/>
+              </a:spcBef>
+              <a:spcAft>
+                <a:spcPts val="400"/>
+              </a:spcAft>
+            </a:pPr>
+            <a:r>
+              <a:rPr sz="1350" b="1" i="0">
+                <a:solidFill>
+                  <a:srgbClr val="2E9E6B"/>
+                </a:solidFill>
+                <a:latin typeface="맑은 고딕"/>
+                <a:ea typeface="맑은 고딕"/>
+                <a:cs typeface="맑은 고딕"/>
+              </a:rPr>
+              <a:t>③ 한계  </a:t>
+            </a:r>
+            <a:r>
+              <a:rPr sz="1150" b="0" i="0">
+                <a:solidFill>
+                  <a:srgbClr val="1F2937"/>
+                </a:solidFill>
+                <a:latin typeface="맑은 고딕"/>
+                <a:ea typeface="맑은 고딕"/>
+                <a:cs typeface="맑은 고딕"/>
+              </a:rPr>
+              <a:t>이상한 정책에도 상식을 지키나?</a:t>
+            </a:r>
+          </a:p>
+          <a:p>
+            <a:pPr algn="l">
+              <a:lnSpc>
+                <a:spcPct val="122000"/>
+              </a:lnSpc>
+              <a:spcBef>
+                <a:spcPts val="0"/>
+              </a:spcBef>
+              <a:spcAft>
+                <a:spcPts val="0"/>
+              </a:spcAft>
+            </a:pPr>
+            <a:r>
+              <a:rPr sz="1100" b="0" i="0">
+                <a:solidFill>
+                  <a:srgbClr val="1F2937"/>
+                </a:solidFill>
+                <a:latin typeface="맑은 고딕"/>
+                <a:ea typeface="맑은 고딕"/>
+                <a:cs typeface="맑은 고딕"/>
+              </a:rPr>
+              <a:t>행동 벤치마크 7/7 통과 — 가상 정책 5종에서 상식 방향으로 갈라짐 (다다음 장)</a:t>
             </a:r>
           </a:p>
         </p:txBody>
       </p:sp>
       <p:pic>
         <p:nvPicPr>
-          <p:cNvPr id="9" name="Picture 8" descr="ablation_viz.png"/>
+          <p:cNvPr id="14" name="Picture 13" descr="persona_eval_viz.png"/>
           <p:cNvPicPr>
             <a:picLocks noChangeAspect="1"/>
           </p:cNvPicPr>
@@ -8852,8 +8988,8 @@
         </p:blipFill>
         <p:spPr>
           <a:xfrm>
-            <a:off x="2154773" y="3886200"/>
-            <a:ext cx="7879404" cy="2468880"/>
+            <a:off x="4344416" y="3931920"/>
+            <a:ext cx="3500119" cy="2423160"/>
           </a:xfrm>
           <a:prstGeom prst="rect">
             <a:avLst/>
@@ -8987,7 +9123,7 @@
                 <a:ea typeface="맑은 고딕"/>
                 <a:cs typeface="맑은 고딕"/>
               </a:rPr>
-              <a:t>신뢰성 ② — 720회 반복: 집단화 · 견고성 · 설득력</a:t>
+              <a:t>검증 ② — 사전등록 0/4, 원인은 채점 기준이었다</a:t>
             </a:r>
           </a:p>
         </p:txBody>
@@ -9106,7 +9242,7 @@
         <p:spPr>
           <a:xfrm>
             <a:off x="548640" y="1554480"/>
-            <a:ext cx="5212080" cy="4572000"/>
+            <a:ext cx="5349240" cy="2331720"/>
           </a:xfrm>
           <a:prstGeom prst="rect">
             <a:avLst/>
@@ -9121,17 +9257,193 @@
           <a:p>
             <a:pPr algn="l">
               <a:lnSpc>
+                <a:spcPct val="125000"/>
+              </a:lnSpc>
+              <a:spcBef>
+                <a:spcPts val="0"/>
+              </a:spcBef>
+              <a:spcAft>
+                <a:spcPts val="600"/>
+              </a:spcAft>
+            </a:pPr>
+            <a:r>
+              <a:rPr sz="1300" b="1" i="0">
+                <a:solidFill>
+                  <a:srgbClr val="1F3A5F"/>
+                </a:solidFill>
+                <a:latin typeface="맑은 고딕"/>
+                <a:ea typeface="맑은 고딕"/>
+                <a:cs typeface="맑은 고딕"/>
+              </a:rPr>
+              <a:t>실험  </a:t>
+            </a:r>
+            <a:r>
+              <a:rPr sz="1250" b="0" i="0">
+                <a:solidFill>
+                  <a:srgbClr val="1F2937"/>
+                </a:solidFill>
+                <a:latin typeface="맑은 고딕"/>
+                <a:ea typeface="맑은 고딕"/>
+                <a:cs typeface="맑은 고딕"/>
+              </a:rPr>
+              <a:t>같은 청년월세 정책을 인물 카드 ON / OFF(익명)로 — 카드가 있을 때만 답이 자기 처지를 따라가야 함</a:t>
+            </a:r>
+          </a:p>
+          <a:p>
+            <a:pPr algn="l">
+              <a:lnSpc>
                 <a:spcPct val="112000"/>
               </a:lnSpc>
               <a:spcBef>
                 <a:spcPts val="0"/>
               </a:spcBef>
               <a:spcAft>
-                <a:spcPts val="200"/>
-              </a:spcAft>
-            </a:pPr>
-            <a:r>
-              <a:rPr sz="1350" b="1" i="0">
+                <a:spcPts val="600"/>
+              </a:spcAft>
+            </a:pPr>
+            <a:r>
+              <a:rPr sz="1300" b="1" i="0">
+                <a:solidFill>
+                  <a:srgbClr val="D9534F"/>
+                </a:solidFill>
+                <a:latin typeface="맑은 고딕"/>
+                <a:ea typeface="맑은 고딕"/>
+                <a:cs typeface="맑은 고딕"/>
+              </a:rPr>
+              <a:t>결과  </a:t>
+            </a:r>
+            <a:r>
+              <a:rPr sz="1250" b="1" i="0">
+                <a:solidFill>
+                  <a:srgbClr val="1F2937"/>
+                </a:solidFill>
+                <a:latin typeface="맑은 고딕"/>
+                <a:ea typeface="맑은 고딕"/>
+                <a:cs typeface="맑은 고딕"/>
+              </a:rPr>
+              <a:t>사전등록 점수 0/4 탈락 — 그대로 기록</a:t>
+            </a:r>
+          </a:p>
+          <a:p>
+            <a:pPr algn="l">
+              <a:lnSpc>
+                <a:spcPct val="128000"/>
+              </a:lnSpc>
+              <a:spcBef>
+                <a:spcPts val="0"/>
+              </a:spcBef>
+              <a:spcAft>
+                <a:spcPts val="0"/>
+              </a:spcAft>
+            </a:pPr>
+            <a:r>
+              <a:rPr sz="1300" b="1" i="0">
+                <a:solidFill>
+                  <a:srgbClr val="2D6CDF"/>
+                </a:solidFill>
+                <a:latin typeface="맑은 고딕"/>
+                <a:ea typeface="맑은 고딕"/>
+                <a:cs typeface="맑은 고딕"/>
+              </a:rPr>
+              <a:t>분석  </a:t>
+            </a:r>
+            <a:r>
+              <a:rPr sz="1250" b="0" i="0">
+                <a:solidFill>
+                  <a:srgbClr val="1F2937"/>
+                </a:solidFill>
+                <a:latin typeface="맑은 고딕"/>
+                <a:ea typeface="맑은 고딕"/>
+                <a:cs typeface="맑은 고딕"/>
+              </a:rPr>
+              <a:t>우리 채점 기준(나이·소득)이 ‘대상’이라 한 10명 전원이 자기를 비대상으로 정확 판정 — 원문의 숨은 요건(별도거주·무주택·소득기준)까지 읽었다. 실제 청년월세도 신청자 2/3가 요건 탈락.</a:t>
+            </a:r>
+          </a:p>
+        </p:txBody>
+      </p:sp>
+      <p:sp>
+        <p:nvSpPr>
+          <p:cNvPr id="7" name="Rounded Rectangle 6"/>
+          <p:cNvSpPr/>
+          <p:nvPr/>
+        </p:nvSpPr>
+        <p:spPr>
+          <a:xfrm>
+            <a:off x="6126480" y="1554480"/>
+            <a:ext cx="5513832" cy="2331720"/>
+          </a:xfrm>
+          <a:prstGeom prst="roundRect">
+            <a:avLst>
+              <a:gd name="adj" fmla="val 8000"/>
+            </a:avLst>
+          </a:prstGeom>
+          <a:solidFill>
+            <a:srgbClr val="F4F6FA"/>
+          </a:solidFill>
+          <a:ln w="9525">
+            <a:solidFill>
+              <a:srgbClr val="DDE3EC"/>
+            </a:solidFill>
+          </a:ln>
+          <a:effectLst/>
+        </p:spPr>
+        <p:style>
+          <a:lnRef idx="1">
+            <a:schemeClr val="accent1"/>
+          </a:lnRef>
+          <a:fillRef idx="3">
+            <a:schemeClr val="accent1"/>
+          </a:fillRef>
+          <a:effectRef idx="2">
+            <a:schemeClr val="accent1"/>
+          </a:effectRef>
+          <a:fontRef idx="minor">
+            <a:schemeClr val="lt1"/>
+          </a:fontRef>
+        </p:style>
+        <p:txBody>
+          <a:bodyPr rtlCol="0" anchor="ctr" wrap="square" lIns="109728" rIns="109728" tIns="54864" bIns="54864"/>
+          <a:lstStyle/>
+          <a:p>
+            <a:pPr algn="ctr"/>
+          </a:p>
+        </p:txBody>
+      </p:sp>
+      <p:sp>
+        <p:nvSpPr>
+          <p:cNvPr id="8" name="TextBox 7"/>
+          <p:cNvSpPr txBox="1"/>
+          <p:nvPr/>
+        </p:nvSpPr>
+        <p:spPr>
+          <a:xfrm>
+            <a:off x="6355080" y="1700784"/>
+            <a:ext cx="5074920" cy="2057400"/>
+          </a:xfrm>
+          <a:prstGeom prst="rect">
+            <a:avLst/>
+          </a:prstGeom>
+          <a:noFill/>
+        </p:spPr>
+        <p:txBody>
+          <a:bodyPr wrap="square" lIns="0" rIns="0" tIns="0" bIns="0">
+            <a:spAutoFit/>
+          </a:bodyPr>
+          <a:lstStyle/>
+          <a:p>
+            <a:pPr algn="l">
+              <a:lnSpc>
+                <a:spcPct val="112000"/>
+              </a:lnSpc>
+              <a:spcBef>
+                <a:spcPts val="0"/>
+              </a:spcBef>
+              <a:spcAft>
+                <a:spcPts val="600"/>
+              </a:spcAft>
+            </a:pPr>
+            <a:r>
+              <a:rPr sz="1300" b="1" i="0">
                 <a:solidFill>
                   <a:srgbClr val="1F3A5F"/>
                 </a:solidFill>
@@ -9139,10 +9451,34 @@
                 <a:ea typeface="맑은 고딕"/>
                 <a:cs typeface="맑은 고딕"/>
               </a:rPr>
-              <a:t>방법  </a:t>
-            </a:r>
-            <a:r>
-              <a:rPr sz="1300" b="0" i="0">
+              <a:t>시민들이 직접 말한 탈락 사유</a:t>
+            </a:r>
+          </a:p>
+          <a:p>
+            <a:pPr algn="l">
+              <a:lnSpc>
+                <a:spcPct val="120000"/>
+              </a:lnSpc>
+              <a:spcBef>
+                <a:spcPts val="0"/>
+              </a:spcBef>
+              <a:spcAft>
+                <a:spcPts val="500"/>
+              </a:spcAft>
+            </a:pPr>
+            <a:r>
+              <a:rPr sz="1150" b="1" i="0">
+                <a:solidFill>
+                  <a:srgbClr val="2D6CDF"/>
+                </a:solidFill>
+                <a:latin typeface="맑은 고딕"/>
+                <a:ea typeface="맑은 고딕"/>
+                <a:cs typeface="맑은 고딕"/>
+              </a:rPr>
+              <a:t>천명준(19)  </a:t>
+            </a:r>
+            <a:r>
+              <a:rPr sz="1150" b="0" i="0">
                 <a:solidFill>
                   <a:srgbClr val="1F2937"/>
                 </a:solidFill>
@@ -9150,47 +9486,23 @@
                 <a:ea typeface="맑은 고딕"/>
                 <a:cs typeface="맑은 고딕"/>
               </a:rPr>
-              <a:t>페르소나 24명 × 30회 반복 = 720회 반응 + LLM-judge 채점</a:t>
-            </a:r>
-          </a:p>
-          <a:p>
-            <a:pPr algn="l">
-              <a:lnSpc>
-                <a:spcPct val="112000"/>
-              </a:lnSpc>
-              <a:spcBef>
-                <a:spcPts val="0"/>
-              </a:spcBef>
-              <a:spcAft>
-                <a:spcPts val="900"/>
-              </a:spcAft>
-            </a:pPr>
-            <a:r>
-              <a:rPr sz="1100" b="0" i="0">
-                <a:solidFill>
-                  <a:srgbClr val="6B7280"/>
-                </a:solidFill>
-                <a:latin typeface="맑은 고딕"/>
-                <a:ea typeface="맑은 고딕"/>
-                <a:cs typeface="맑은 고딕"/>
-              </a:rPr>
-              <a:t>비용 약 $0.3 — 검증을 ‘반복 가능한 일상’으로 만드는 가격</a:t>
-            </a:r>
-          </a:p>
-          <a:p>
-            <a:pPr algn="l">
-              <a:lnSpc>
-                <a:spcPct val="125000"/>
-              </a:lnSpc>
-              <a:spcBef>
-                <a:spcPts val="0"/>
-              </a:spcBef>
-              <a:spcAft>
-                <a:spcPts val="900"/>
-              </a:spcAft>
-            </a:pPr>
-            <a:r>
-              <a:rPr sz="1300" b="1" i="0">
+              <a:t>“부모님이랑 따로 살아야 주는 거잖아요. 저는 해당이 안 될 텐데…”</a:t>
+            </a:r>
+          </a:p>
+          <a:p>
+            <a:pPr algn="l">
+              <a:lnSpc>
+                <a:spcPct val="120000"/>
+              </a:lnSpc>
+              <a:spcBef>
+                <a:spcPts val="0"/>
+              </a:spcBef>
+              <a:spcAft>
+                <a:spcPts val="500"/>
+              </a:spcAft>
+            </a:pPr>
+            <a:r>
+              <a:rPr sz="1150" b="1" i="0">
                 <a:solidFill>
                   <a:srgbClr val="2D6CDF"/>
                 </a:solidFill>
@@ -9198,10 +9510,10 @@
                 <a:ea typeface="맑은 고딕"/>
                 <a:cs typeface="맑은 고딕"/>
               </a:rPr>
-              <a:t>집단화</a:t>
-            </a:r>
-            <a:r>
-              <a:rPr sz="1180" b="0" i="0">
+              <a:t>심석현(26)  </a:t>
+            </a:r>
+            <a:r>
+              <a:rPr sz="1150" b="0" i="0">
                 <a:solidFill>
                   <a:srgbClr val="1F2937"/>
                 </a:solidFill>
@@ -9209,34 +9521,34 @@
                 <a:ea typeface="맑은 고딕"/>
                 <a:cs typeface="맑은 고딕"/>
               </a:rPr>
-              <a:t>   연령이 반응을 가른다 — eta² 수혜 0.81 · 의향 0.77 (이해도는 0.36 — 이해는 비슷해도 ‘내 혜택이냐’는 세대로 갈림)</a:t>
-            </a:r>
-          </a:p>
-          <a:p>
-            <a:pPr algn="l">
-              <a:lnSpc>
-                <a:spcPct val="125000"/>
-              </a:lnSpc>
-              <a:spcBef>
-                <a:spcPts val="0"/>
-              </a:spcBef>
-              <a:spcAft>
-                <a:spcPts val="900"/>
-              </a:spcAft>
-            </a:pPr>
-            <a:r>
-              <a:rPr sz="1300" b="1" i="0">
-                <a:solidFill>
-                  <a:srgbClr val="1F3A5F"/>
-                </a:solidFill>
-                <a:latin typeface="맑은 고딕"/>
-                <a:ea typeface="맑은 고딕"/>
-                <a:cs typeface="맑은 고딕"/>
-              </a:rPr>
-              <a:t>완전 분리</a:t>
-            </a:r>
-            <a:r>
-              <a:rPr sz="1180" b="0" i="0">
+              <a:t>“기사 끝에 보니까 주택 소유자는 제외라고 딱 적혀 있어요.”</a:t>
+            </a:r>
+          </a:p>
+          <a:p>
+            <a:pPr algn="l">
+              <a:lnSpc>
+                <a:spcPct val="120000"/>
+              </a:lnSpc>
+              <a:spcBef>
+                <a:spcPts val="0"/>
+              </a:spcBef>
+              <a:spcAft>
+                <a:spcPts val="0"/>
+              </a:spcAft>
+            </a:pPr>
+            <a:r>
+              <a:rPr sz="1150" b="1" i="0">
+                <a:solidFill>
+                  <a:srgbClr val="2D6CDF"/>
+                </a:solidFill>
+                <a:latin typeface="맑은 고딕"/>
+                <a:ea typeface="맑은 고딕"/>
+                <a:cs typeface="맑은 고딕"/>
+              </a:rPr>
+              <a:t>조유정(31)  </a:t>
+            </a:r>
+            <a:r>
+              <a:rPr sz="1150" b="0" i="0">
                 <a:solidFill>
                   <a:srgbClr val="1F2937"/>
                 </a:solidFill>
@@ -9244,119 +9556,14 @@
                 <a:ea typeface="맑은 고딕"/>
                 <a:cs typeface="맑은 고딕"/>
               </a:rPr>
-              <a:t>   청년(대상)은 찬성 207·반대 0 — 노인은 찬성 0·반대 214</a:t>
-            </a:r>
-          </a:p>
-          <a:p>
-            <a:pPr algn="l">
-              <a:lnSpc>
-                <a:spcPct val="125000"/>
-              </a:lnSpc>
-              <a:spcBef>
-                <a:spcPts val="0"/>
-              </a:spcBef>
-              <a:spcAft>
-                <a:spcPts val="900"/>
-              </a:spcAft>
-            </a:pPr>
-            <a:r>
-              <a:rPr sz="1300" b="1" i="0">
-                <a:solidFill>
-                  <a:srgbClr val="2E9E6B"/>
-                </a:solidFill>
-                <a:latin typeface="맑은 고딕"/>
-                <a:ea typeface="맑은 고딕"/>
-                <a:cs typeface="맑은 고딕"/>
-              </a:rPr>
-              <a:t>견고성</a:t>
-            </a:r>
-            <a:r>
-              <a:rPr sz="1180" b="0" i="0">
-                <a:solidFill>
-                  <a:srgbClr val="1F2937"/>
-                </a:solidFill>
-                <a:latin typeface="맑은 고딕"/>
-                <a:ea typeface="맑은 고딕"/>
-                <a:cs typeface="맑은 고딕"/>
-              </a:rPr>
-              <a:t>   같은 시민을 30회 돌려도 입장 안정성 82% (무작위면 약 33%) — 집단 구도는 우연이 아니다</a:t>
-            </a:r>
-          </a:p>
-          <a:p>
-            <a:pPr algn="l">
-              <a:lnSpc>
-                <a:spcPct val="125000"/>
-              </a:lnSpc>
-              <a:spcBef>
-                <a:spcPts val="0"/>
-              </a:spcBef>
-              <a:spcAft>
-                <a:spcPts val="900"/>
-              </a:spcAft>
-            </a:pPr>
-            <a:r>
-              <a:rPr sz="1300" b="1" i="0">
-                <a:solidFill>
-                  <a:srgbClr val="E8902A"/>
-                </a:solidFill>
-                <a:latin typeface="맑은 고딕"/>
-                <a:ea typeface="맑은 고딕"/>
-                <a:cs typeface="맑은 고딕"/>
-              </a:rPr>
-              <a:t>설득력</a:t>
-            </a:r>
-            <a:r>
-              <a:rPr sz="1180" b="0" i="0">
-                <a:solidFill>
-                  <a:srgbClr val="1F2937"/>
-                </a:solidFill>
-                <a:latin typeface="맑은 고딕"/>
-                <a:ea typeface="맑은 고딕"/>
-                <a:cs typeface="맑은 고딕"/>
-              </a:rPr>
-              <a:t>   LLM-judge 평균 68점 — 각 집단이 자기 처지에 맞는 논리를 편다 (“66세 간호사 입장에서 보자면…”)</a:t>
-            </a:r>
-          </a:p>
-          <a:p>
-            <a:pPr algn="l">
-              <a:lnSpc>
-                <a:spcPct val="125000"/>
-              </a:lnSpc>
-              <a:spcBef>
-                <a:spcPts val="0"/>
-              </a:spcBef>
-              <a:spcAft>
-                <a:spcPts val="0"/>
-              </a:spcAft>
-            </a:pPr>
-            <a:r>
-              <a:rPr sz="1200" b="1" i="0">
-                <a:solidFill>
-                  <a:srgbClr val="6B7280"/>
-                </a:solidFill>
-                <a:latin typeface="맑은 고딕"/>
-                <a:ea typeface="맑은 고딕"/>
-                <a:cs typeface="맑은 고딕"/>
-              </a:rPr>
-              <a:t>정직한 노트  </a:t>
-            </a:r>
-            <a:r>
-              <a:rPr sz="1150" b="0" i="0">
-                <a:solidFill>
-                  <a:srgbClr val="6B7280"/>
-                </a:solidFill>
-                <a:latin typeface="맑은 고딕"/>
-                <a:ea typeface="맑은 고딕"/>
-                <a:cs typeface="맑은 고딕"/>
-              </a:rPr>
-              <a:t>LLM은 비결정적이라 절대값은 출렁인다(eta² 0.94→0.81 등). 그러나 방향은 항상 일관 — eta²&gt;0.7, collapse&gt;0.</a:t>
+              <a:t>“중위소득 60%면 생각보다 낮거든요. 저는 기준에서 걸려요.”</a:t>
             </a:r>
           </a:p>
         </p:txBody>
       </p:sp>
       <p:pic>
         <p:nvPicPr>
-          <p:cNvPr id="7" name="Picture 6" descr="cluster_viz.png"/>
+          <p:cNvPr id="9" name="Picture 8" descr="ablation_shift_viz.png"/>
           <p:cNvPicPr>
             <a:picLocks noChangeAspect="1"/>
           </p:cNvPicPr>
@@ -9370,8 +9577,8 @@
         </p:blipFill>
         <p:spPr>
           <a:xfrm>
-            <a:off x="5989320" y="1878036"/>
-            <a:ext cx="5669280" cy="3924886"/>
+            <a:off x="2528316" y="3977639"/>
+            <a:ext cx="7132320" cy="2377440"/>
           </a:xfrm>
           <a:prstGeom prst="rect">
             <a:avLst/>
@@ -9413,7 +9620,7 @@
             </a:avLst>
           </a:prstGeom>
           <a:solidFill>
-            <a:srgbClr val="D9534F"/>
+            <a:srgbClr val="2E9E6B"/>
           </a:solidFill>
           <a:ln>
             <a:noFill/>
@@ -9458,7 +9665,7 @@
                 <a:ea typeface="맑은 고딕"/>
                 <a:cs typeface="맑은 고딕"/>
               </a:rPr>
-              <a:t>05 확장</a:t>
+              <a:t>04 검증</a:t>
             </a:r>
           </a:p>
         </p:txBody>
@@ -9505,7 +9712,7 @@
                 <a:ea typeface="맑은 고딕"/>
                 <a:cs typeface="맑은 고딕"/>
               </a:rPr>
-              <a:t>게시판 RAG — 좁힌 확장 경로가 팀의 손으로 돌아오다</a:t>
+              <a:t>검증 ③ — 행동 벤치마크: 가상 정책 5종, 7/7 통과</a:t>
             </a:r>
           </a:p>
         </p:txBody>
@@ -9623,8 +9830,8 @@
         </p:nvSpPr>
         <p:spPr>
           <a:xfrm>
-            <a:off x="548640" y="1645920"/>
-            <a:ext cx="5212080" cy="4480560"/>
+            <a:off x="548640" y="1517904"/>
+            <a:ext cx="5349240" cy="2377440"/>
           </a:xfrm>
           <a:prstGeom prst="rect">
             <a:avLst/>
@@ -9645,11 +9852,11 @@
                 <a:spcPts val="0"/>
               </a:spcBef>
               <a:spcAft>
-                <a:spcPts val="800"/>
-              </a:spcAft>
-            </a:pPr>
-            <a:r>
-              <a:rPr sz="1550" b="1" i="0">
+                <a:spcPts val="400"/>
+              </a:spcAft>
+            </a:pPr>
+            <a:r>
+              <a:rPr sz="1300" b="1" i="0">
                 <a:solidFill>
                   <a:srgbClr val="1F3A5F"/>
                 </a:solidFill>
@@ -9657,7 +9864,7 @@
                 <a:ea typeface="맑은 고딕"/>
                 <a:cs typeface="맑은 고딕"/>
               </a:rPr>
-              <a:t>정책 문의 게시판 + 문서 근거 답변</a:t>
+              <a:t>가상 정책 5종 (일부러 부조리하게)  </a:t>
             </a:r>
           </a:p>
           <a:p>
@@ -9669,184 +9876,243 @@
                 <a:spcPts val="0"/>
               </a:spcBef>
               <a:spcAft>
-                <a:spcPts val="700"/>
+                <a:spcPts val="400"/>
+              </a:spcAft>
+            </a:pPr>
+            <a:r>
+              <a:rPr sz="1180" b="1" i="0">
+                <a:solidFill>
+                  <a:srgbClr val="2D6CDF"/>
+                </a:solidFill>
+                <a:latin typeface="맑은 고딕"/>
+                <a:ea typeface="맑은 고딕"/>
+                <a:cs typeface="맑은 고딕"/>
+              </a:rPr>
+              <a:t>•  </a:t>
+            </a:r>
+            <a:r>
+              <a:rPr sz="1180" b="0" i="0">
+                <a:solidFill>
+                  <a:srgbClr val="1F2937"/>
+                </a:solidFill>
+                <a:latin typeface="맑은 고딕"/>
+                <a:ea typeface="맑은 고딕"/>
+                <a:cs typeface="맑은 고딕"/>
+              </a:rPr>
+              <a:t>주 3.5일 근무제 — 직업 축 / 반려묘 전 국민 보급 — 순효용 축</a:t>
+            </a:r>
+          </a:p>
+          <a:p>
+            <a:pPr algn="l">
+              <a:lnSpc>
+                <a:spcPct val="118000"/>
+              </a:lnSpc>
+              <a:spcBef>
+                <a:spcPts val="0"/>
+              </a:spcBef>
+              <a:spcAft>
+                <a:spcPts val="400"/>
+              </a:spcAft>
+            </a:pPr>
+            <a:r>
+              <a:rPr sz="1180" b="1" i="0">
+                <a:solidFill>
+                  <a:srgbClr val="2D6CDF"/>
+                </a:solidFill>
+                <a:latin typeface="맑은 고딕"/>
+                <a:ea typeface="맑은 고딕"/>
+                <a:cs typeface="맑은 고딕"/>
+              </a:rPr>
+              <a:t>•  </a:t>
+            </a:r>
+            <a:r>
+              <a:rPr sz="1180" b="0" i="0">
+                <a:solidFill>
+                  <a:srgbClr val="1F2937"/>
+                </a:solidFill>
+                <a:latin typeface="맑은 고딕"/>
+                <a:ea typeface="맑은 고딕"/>
+                <a:cs typeface="맑은 고딕"/>
+              </a:rPr>
+              <a:t>경로 무임승차 폐지 — 세대 축 / 남 +10만·여 −10만 — 성별 축</a:t>
+            </a:r>
+          </a:p>
+          <a:p>
+            <a:pPr algn="l">
+              <a:lnSpc>
+                <a:spcPct val="118000"/>
+              </a:lnSpc>
+              <a:spcBef>
+                <a:spcPts val="0"/>
+              </a:spcBef>
+              <a:spcAft>
+                <a:spcPts val="400"/>
+              </a:spcAft>
+            </a:pPr>
+            <a:r>
+              <a:rPr sz="1180" b="1" i="0">
+                <a:solidFill>
+                  <a:srgbClr val="2D6CDF"/>
+                </a:solidFill>
+                <a:latin typeface="맑은 고딕"/>
+                <a:ea typeface="맑은 고딕"/>
+                <a:cs typeface="맑은 고딕"/>
+              </a:rPr>
+              <a:t>•  </a:t>
+            </a:r>
+            <a:r>
+              <a:rPr sz="1180" b="0" i="0">
+                <a:solidFill>
+                  <a:srgbClr val="1F2937"/>
+                </a:solidFill>
+                <a:latin typeface="맑은 고딕"/>
+                <a:ea typeface="맑은 고딕"/>
+                <a:cs typeface="맑은 고딕"/>
+              </a:rPr>
+              <a:t>고소득자 의무 기부 — 소득 축 (시민이 자기 형편을 자가판정)</a:t>
+            </a:r>
+          </a:p>
+          <a:p>
+            <a:pPr algn="l">
+              <a:lnSpc>
+                <a:spcPct val="112000"/>
+              </a:lnSpc>
+              <a:spcBef>
+                <a:spcPts val="0"/>
+              </a:spcBef>
+              <a:spcAft>
+                <a:spcPts val="600"/>
+              </a:spcAft>
+            </a:pPr>
+            <a:r>
+              <a:rPr sz="1400" b="1" i="0">
+                <a:solidFill>
+                  <a:srgbClr val="2E9E6B"/>
+                </a:solidFill>
+                <a:latin typeface="맑은 고딕"/>
+                <a:ea typeface="맑은 고딕"/>
+                <a:cs typeface="맑은 고딕"/>
+              </a:rPr>
+              <a:t>사전등록 체크 7/7 통과</a:t>
+            </a:r>
+            <a:r>
+              <a:rPr sz="1200" b="0" i="0">
+                <a:solidFill>
+                  <a:srgbClr val="1F2937"/>
+                </a:solidFill>
+                <a:latin typeface="맑은 고딕"/>
+                <a:ea typeface="맑은 고딕"/>
+                <a:cs typeface="맑은 고딕"/>
+              </a:rPr>
+              <a:t>  — 갈등이 매번 상식적인 집단 축으로 갈라짐</a:t>
+            </a:r>
+          </a:p>
+          <a:p>
+            <a:pPr algn="l">
+              <a:lnSpc>
+                <a:spcPct val="125000"/>
+              </a:lnSpc>
+              <a:spcBef>
+                <a:spcPts val="0"/>
+              </a:spcBef>
+              <a:spcAft>
+                <a:spcPts val="400"/>
               </a:spcAft>
             </a:pPr>
             <a:r>
               <a:rPr sz="1250" b="1" i="0">
                 <a:solidFill>
-                  <a:srgbClr val="2D6CDF"/>
-                </a:solidFill>
-                <a:latin typeface="맑은 고딕"/>
-                <a:ea typeface="맑은 고딕"/>
-                <a:cs typeface="맑은 고딕"/>
-              </a:rPr>
-              <a:t>•  </a:t>
-            </a:r>
+                  <a:srgbClr val="E8902A"/>
+                </a:solidFill>
+                <a:latin typeface="맑은 고딕"/>
+                <a:ea typeface="맑은 고딕"/>
+                <a:cs typeface="맑은 고딕"/>
+              </a:rPr>
+              <a:t>사례 ①  </a:t>
+            </a:r>
+            <a:r>
+              <a:rPr sz="1200" b="0" i="0">
+                <a:solidFill>
+                  <a:srgbClr val="1F2937"/>
+                </a:solidFill>
+                <a:latin typeface="맑은 고딕"/>
+                <a:ea typeface="맑은 고딕"/>
+                <a:cs typeface="맑은 고딕"/>
+              </a:rPr>
+              <a:t>반려묘 유일 찬성자 = 페르소나에 ‘펫푸드 창업 꿈’이 있는 신민재 — 입장이 인구통계가 아니라 서사와 정렬</a:t>
+            </a:r>
+          </a:p>
+          <a:p>
+            <a:pPr algn="l">
+              <a:lnSpc>
+                <a:spcPct val="125000"/>
+              </a:lnSpc>
+              <a:spcBef>
+                <a:spcPts val="0"/>
+              </a:spcBef>
+              <a:spcAft>
+                <a:spcPts val="0"/>
+              </a:spcAft>
+            </a:pPr>
             <a:r>
               <a:rPr sz="1250" b="1" i="0">
                 <a:solidFill>
+                  <a:srgbClr val="E8902A"/>
+                </a:solidFill>
+                <a:latin typeface="맑은 고딕"/>
+                <a:ea typeface="맑은 고딕"/>
+                <a:cs typeface="맑은 고딕"/>
+              </a:rPr>
+              <a:t>사례 ②  </a:t>
+            </a:r>
+            <a:r>
+              <a:rPr sz="1200" b="0" i="0">
+                <a:solidFill>
                   <a:srgbClr val="1F2937"/>
                 </a:solidFill>
                 <a:latin typeface="맑은 고딕"/>
                 <a:ea typeface="맑은 고딕"/>
                 <a:cs typeface="맑은 고딕"/>
               </a:rPr>
-              <a:t>질문 → 검색된 근거 ‘안에서만’ 답변</a:t>
-            </a:r>
-            <a:r>
-              <a:rPr sz="1250" b="0" i="0">
-                <a:solidFill>
-                  <a:srgbClr val="6B7280"/>
-                </a:solidFill>
-                <a:latin typeface="맑은 고딕"/>
-                <a:ea typeface="맑은 고딕"/>
-                <a:cs typeface="맑은 고딕"/>
-              </a:rPr>
-              <a:t>  (환각 억제)</a:t>
-            </a:r>
-          </a:p>
-          <a:p>
-            <a:pPr algn="l">
-              <a:lnSpc>
-                <a:spcPct val="118000"/>
-              </a:lnSpc>
-              <a:spcBef>
-                <a:spcPts val="0"/>
-              </a:spcBef>
-              <a:spcAft>
-                <a:spcPts val="700"/>
-              </a:spcAft>
-            </a:pPr>
-            <a:r>
-              <a:rPr sz="1250" b="1" i="0">
-                <a:solidFill>
-                  <a:srgbClr val="2D6CDF"/>
-                </a:solidFill>
-                <a:latin typeface="맑은 고딕"/>
-                <a:ea typeface="맑은 고딕"/>
-                <a:cs typeface="맑은 고딕"/>
-              </a:rPr>
-              <a:t>•  </a:t>
-            </a:r>
-            <a:r>
-              <a:rPr sz="1250" b="0" i="0">
-                <a:solidFill>
-                  <a:srgbClr val="1F2937"/>
-                </a:solidFill>
-                <a:latin typeface="맑은 고딕"/>
-                <a:ea typeface="맑은 고딕"/>
-                <a:cs typeface="맑은 고딕"/>
-              </a:rPr>
-              <a:t>현재 정책은 항상 기본 근거 + PDF/TXT/MD 업로드로 문서 확장</a:t>
-            </a:r>
-          </a:p>
-          <a:p>
-            <a:pPr algn="l">
-              <a:lnSpc>
-                <a:spcPct val="118000"/>
-              </a:lnSpc>
-              <a:spcBef>
-                <a:spcPts val="0"/>
-              </a:spcBef>
-              <a:spcAft>
-                <a:spcPts val="700"/>
-              </a:spcAft>
-            </a:pPr>
-            <a:r>
-              <a:rPr sz="1250" b="1" i="0">
-                <a:solidFill>
-                  <a:srgbClr val="2D6CDF"/>
-                </a:solidFill>
-                <a:latin typeface="맑은 고딕"/>
-                <a:ea typeface="맑은 고딕"/>
-                <a:cs typeface="맑은 고딕"/>
-              </a:rPr>
-              <a:t>•  </a:t>
-            </a:r>
-            <a:r>
-              <a:rPr sz="1250" b="0" i="0">
-                <a:solidFill>
-                  <a:srgbClr val="1F2937"/>
-                </a:solidFill>
-                <a:latin typeface="맑은 고딕"/>
-                <a:ea typeface="맑은 고딕"/>
-                <a:cs typeface="맑은 고딕"/>
-              </a:rPr>
-              <a:t>Chroma 벡터 검색 + OpenAI 임베딩 → 근거·품질지표 함께 표시</a:t>
-            </a:r>
-          </a:p>
-          <a:p>
-            <a:pPr algn="l">
-              <a:lnSpc>
-                <a:spcPct val="118000"/>
-              </a:lnSpc>
-              <a:spcBef>
-                <a:spcPts val="0"/>
-              </a:spcBef>
-              <a:spcAft>
-                <a:spcPts val="700"/>
-              </a:spcAft>
-            </a:pPr>
-            <a:r>
-              <a:rPr sz="1250" b="1" i="0">
-                <a:solidFill>
-                  <a:srgbClr val="2D6CDF"/>
-                </a:solidFill>
-                <a:latin typeface="맑은 고딕"/>
-                <a:ea typeface="맑은 고딕"/>
-                <a:cs typeface="맑은 고딕"/>
-              </a:rPr>
-              <a:t>•  </a:t>
-            </a:r>
-            <a:r>
-              <a:rPr sz="1250" b="0" i="0">
-                <a:solidFill>
-                  <a:srgbClr val="1F2937"/>
-                </a:solidFill>
-                <a:latin typeface="맑은 고딕"/>
-                <a:ea typeface="맑은 고딕"/>
-                <a:cs typeface="맑은 고딕"/>
-              </a:rPr>
-              <a:t>API 키가 없으면 추출식 폴백 — 데모는 항상 동작</a:t>
-            </a:r>
-          </a:p>
-          <a:p>
-            <a:pPr algn="l">
-              <a:lnSpc>
-                <a:spcPct val="112000"/>
-              </a:lnSpc>
-              <a:spcBef>
-                <a:spcPts val="0"/>
-              </a:spcBef>
-              <a:spcAft>
-                <a:spcPts val="200"/>
-              </a:spcAft>
-            </a:pPr>
-            <a:r>
-              <a:rPr sz="400" b="0" i="0">
-                <a:solidFill>
-                  <a:srgbClr val="1F2937"/>
-                </a:solidFill>
-                <a:latin typeface="맑은 고딕"/>
-                <a:ea typeface="맑은 고딕"/>
-                <a:cs typeface="맑은 고딕"/>
-              </a:rPr>
-              <a:t/>
-            </a:r>
-          </a:p>
-        </p:txBody>
-      </p:sp>
-      <p:sp>
-        <p:nvSpPr>
-          <p:cNvPr id="7" name="Rounded Rectangle 6"/>
+              <a:t>남성에게 돈을 주는 정책에 남성 23%가 반대 — “내가 받고 아내가 내면 우리 집은 0원” (가구 단위 공정성)</a:t>
+            </a:r>
+          </a:p>
+        </p:txBody>
+      </p:sp>
+      <p:pic>
+        <p:nvPicPr>
+          <p:cNvPr id="7" name="Picture 6" descr="behavior_bench_viz.png"/>
+          <p:cNvPicPr>
+            <a:picLocks noChangeAspect="1"/>
+          </p:cNvPicPr>
+          <p:nvPr/>
+        </p:nvPicPr>
+        <p:blipFill>
+          <a:blip r:embed="rId2"/>
+          <a:stretch>
+            <a:fillRect/>
+          </a:stretch>
+        </p:blipFill>
+        <p:spPr>
+          <a:xfrm>
+            <a:off x="6035040" y="2539274"/>
+            <a:ext cx="5605272" cy="1779451"/>
+          </a:xfrm>
+          <a:prstGeom prst="rect">
+            <a:avLst/>
+          </a:prstGeom>
+        </p:spPr>
+      </p:pic>
+      <p:sp>
+        <p:nvSpPr>
+          <p:cNvPr id="8" name="Rounded Rectangle 7"/>
           <p:cNvSpPr/>
           <p:nvPr/>
         </p:nvSpPr>
         <p:spPr>
           <a:xfrm>
-            <a:off x="548640" y="4297680"/>
-            <a:ext cx="5212080" cy="1783080"/>
+            <a:off x="6035040" y="5394960"/>
+            <a:ext cx="5605272" cy="777240"/>
           </a:xfrm>
           <a:prstGeom prst="roundRect">
             <a:avLst>
@@ -9887,14 +10153,14 @@
       </p:sp>
       <p:sp>
         <p:nvSpPr>
-          <p:cNvPr id="8" name="TextBox 7"/>
+          <p:cNvPr id="9" name="TextBox 8"/>
           <p:cNvSpPr txBox="1"/>
           <p:nvPr/>
         </p:nvSpPr>
         <p:spPr>
           <a:xfrm>
-            <a:off x="777240" y="4462272"/>
-            <a:ext cx="4754880" cy="1463040"/>
+            <a:off x="6217920" y="5486400"/>
+            <a:ext cx="5257800" cy="594360"/>
           </a:xfrm>
           <a:prstGeom prst="rect">
             <a:avLst/>
@@ -9902,12 +10168,12 @@
           <a:noFill/>
         </p:spPr>
         <p:txBody>
-          <a:bodyPr wrap="square" lIns="0" rIns="0" tIns="0" bIns="0">
+          <a:bodyPr wrap="square" lIns="0" rIns="0" tIns="0" bIns="0" anchor="ctr">
             <a:spAutoFit/>
           </a:bodyPr>
           <a:lstStyle/>
           <a:p>
-            <a:pPr algn="l">
+            <a:pPr algn="ctr">
               <a:lnSpc>
                 <a:spcPct val="112000"/>
               </a:lnSpc>
@@ -9915,11 +10181,11 @@
                 <a:spcPts val="0"/>
               </a:spcBef>
               <a:spcAft>
-                <a:spcPts val="500"/>
-              </a:spcAft>
-            </a:pPr>
-            <a:r>
-              <a:rPr sz="1350" b="1" i="0">
+                <a:spcPts val="0"/>
+              </a:spcAft>
+            </a:pPr>
+            <a:r>
+              <a:rPr sz="1150" b="1" i="0">
                 <a:solidFill>
                   <a:srgbClr val="2E9E6B"/>
                 </a:solidFill>
@@ -9927,124 +10193,7 @@
                 <a:ea typeface="맑은 고딕"/>
                 <a:cs typeface="맑은 고딕"/>
               </a:rPr>
-              <a:t>협업 방식이 곧 설계였다</a:t>
-            </a:r>
-          </a:p>
-          <a:p>
-            <a:pPr algn="l">
-              <a:lnSpc>
-                <a:spcPct val="130000"/>
-              </a:lnSpc>
-              <a:spcBef>
-                <a:spcPts val="0"/>
-              </a:spcBef>
-              <a:spcAft>
-                <a:spcPts val="0"/>
-              </a:spcAft>
-            </a:pPr>
-            <a:r>
-              <a:rPr sz="1180" b="0" i="0">
-                <a:solidFill>
-                  <a:srgbClr val="1F2937"/>
-                </a:solidFill>
-                <a:latin typeface="맑은 고딕"/>
-                <a:ea typeface="맑은 고딕"/>
-                <a:cs typeface="맑은 고딕"/>
-              </a:rPr>
-              <a:t>본체에 ‘자리(시임)와 반환 계약’만 미리 설계해 두고, 팀원이 독립 패키지로 RAG 엔진을 구현 → 마지막에 끼워 넣음. 모듈 경계를 지킨 덕에 본체는 한 줄도 안 깨졌다.</a:t>
-            </a:r>
-          </a:p>
-        </p:txBody>
-      </p:sp>
-      <p:sp>
-        <p:nvSpPr>
-          <p:cNvPr id="9" name="Rounded Rectangle 8"/>
-          <p:cNvSpPr/>
-          <p:nvPr/>
-        </p:nvSpPr>
-        <p:spPr>
-          <a:xfrm>
-            <a:off x="6035040" y="1645920"/>
-            <a:ext cx="5605272" cy="4434840"/>
-          </a:xfrm>
-          <a:prstGeom prst="roundRect">
-            <a:avLst>
-              <a:gd name="adj" fmla="val 4000"/>
-            </a:avLst>
-          </a:prstGeom>
-          <a:solidFill>
-            <a:srgbClr val="F1F3F7"/>
-          </a:solidFill>
-          <a:ln w="15240">
-            <a:solidFill>
-              <a:srgbClr val="9AA5B1"/>
-            </a:solidFill>
-          </a:ln>
-          <a:effectLst/>
-        </p:spPr>
-        <p:style>
-          <a:lnRef idx="1">
-            <a:schemeClr val="accent1"/>
-          </a:lnRef>
-          <a:fillRef idx="3">
-            <a:schemeClr val="accent1"/>
-          </a:fillRef>
-          <a:effectRef idx="2">
-            <a:schemeClr val="accent1"/>
-          </a:effectRef>
-          <a:fontRef idx="minor">
-            <a:schemeClr val="lt1"/>
-          </a:fontRef>
-        </p:style>
-        <p:txBody>
-          <a:bodyPr rtlCol="0" anchor="ctr" wrap="square" lIns="109728" rIns="109728" tIns="54864" bIns="54864"/>
-          <a:lstStyle/>
-          <a:p>
-            <a:pPr algn="ctr">
-              <a:lnSpc>
-                <a:spcPct val="112000"/>
-              </a:lnSpc>
-              <a:spcBef>
-                <a:spcPts val="0"/>
-              </a:spcBef>
-              <a:spcAft>
-                <a:spcPts val="200"/>
-              </a:spcAft>
-            </a:pPr>
-            <a:r>
-              <a:rPr sz="1400" b="1" i="0">
-                <a:solidFill>
-                  <a:srgbClr val="6B7280"/>
-                </a:solidFill>
-                <a:latin typeface="맑은 고딕"/>
-                <a:ea typeface="맑은 고딕"/>
-                <a:cs typeface="맑은 고딕"/>
-              </a:rPr>
-              <a:t>📸 ‘게시판’ 탭 캡처</a:t>
-            </a:r>
-          </a:p>
-          <a:p>
-            <a:pPr algn="ctr">
-              <a:lnSpc>
-                <a:spcPct val="112000"/>
-              </a:lnSpc>
-              <a:spcBef>
-                <a:spcPts val="0"/>
-              </a:spcBef>
-              <a:spcAft>
-                <a:spcPts val="0"/>
-              </a:spcAft>
-            </a:pPr>
-            <a:r>
-              <a:rPr sz="1000" b="0" i="0">
-                <a:solidFill>
-                  <a:srgbClr val="9AA5B1"/>
-                </a:solidFill>
-                <a:latin typeface="맑은 고딕"/>
-                <a:ea typeface="맑은 고딕"/>
-                <a:cs typeface="맑은 고딕"/>
-              </a:rPr>
-              <a:t>질문 → 답변 + 📎근거 + 품질지표 표가 보이는 화면 추천</a:t>
+              <a:t>이 5종은 데모 녹화본 — 발표 자리에서 키·네트워크 없이 그대로 재생 시연 가능</a:t>
             </a:r>
           </a:p>
         </p:txBody>
@@ -10176,7 +10325,7 @@
                 <a:ea typeface="맑은 고딕"/>
                 <a:cs typeface="맑은 고딕"/>
               </a:rPr>
-              <a:t>미리마을 — 시민이 ‘살아가는’ 마을 (Generative Agents)</a:t>
+              <a:t>게시판 RAG — 문서 근거로 답하는 정책 문의 게시판</a:t>
             </a:r>
           </a:p>
         </p:txBody>
@@ -10294,8 +10443,8 @@
         </p:nvSpPr>
         <p:spPr>
           <a:xfrm>
-            <a:off x="548640" y="1600200"/>
-            <a:ext cx="5577840" cy="2834640"/>
+            <a:off x="548640" y="1645920"/>
+            <a:ext cx="5212080" cy="4480560"/>
           </a:xfrm>
           <a:prstGeom prst="rect">
             <a:avLst/>
@@ -10310,7 +10459,7 @@
           <a:p>
             <a:pPr algn="l">
               <a:lnSpc>
-                <a:spcPct val="125000"/>
+                <a:spcPct val="112000"/>
               </a:lnSpc>
               <a:spcBef>
                 <a:spcPts val="0"/>
@@ -10320,7 +10469,31 @@
               </a:spcAft>
             </a:pPr>
             <a:r>
-              <a:rPr sz="1350" b="1" i="0">
+              <a:rPr sz="1550" b="1" i="0">
+                <a:solidFill>
+                  <a:srgbClr val="1F3A5F"/>
+                </a:solidFill>
+                <a:latin typeface="맑은 고딕"/>
+                <a:ea typeface="맑은 고딕"/>
+                <a:cs typeface="맑은 고딕"/>
+              </a:rPr>
+              <a:t>정책 문의 게시판 + 문서 근거 답변</a:t>
+            </a:r>
+          </a:p>
+          <a:p>
+            <a:pPr algn="l">
+              <a:lnSpc>
+                <a:spcPct val="118000"/>
+              </a:lnSpc>
+              <a:spcBef>
+                <a:spcPts val="0"/>
+              </a:spcBef>
+              <a:spcAft>
+                <a:spcPts val="700"/>
+              </a:spcAft>
+            </a:pPr>
+            <a:r>
+              <a:rPr sz="1250" b="1" i="0">
                 <a:solidFill>
                   <a:srgbClr val="2D6CDF"/>
                 </a:solidFill>
@@ -10328,10 +10501,10 @@
                 <a:ea typeface="맑은 고딕"/>
                 <a:cs typeface="맑은 고딕"/>
               </a:rPr>
-              <a:t>Park et al. (2023) </a:t>
-            </a:r>
-            <a:r>
-              <a:rPr sz="1350" b="0" i="0">
+              <a:t>•  </a:t>
+            </a:r>
+            <a:r>
+              <a:rPr sz="1250" b="1" i="0">
                 <a:solidFill>
                   <a:srgbClr val="1F2937"/>
                 </a:solidFill>
@@ -10339,7 +10512,18 @@
                 <a:ea typeface="맑은 고딕"/>
                 <a:cs typeface="맑은 고딕"/>
               </a:rPr>
-              <a:t>의 원형 — 에이전트가 공간에서 자기 스케줄대로 살아가는 마을</a:t>
+              <a:t>질문 → 검색된 근거 ‘안에서만’ 답변</a:t>
+            </a:r>
+            <a:r>
+              <a:rPr sz="1250" b="0" i="0">
+                <a:solidFill>
+                  <a:srgbClr val="6B7280"/>
+                </a:solidFill>
+                <a:latin typeface="맑은 고딕"/>
+                <a:ea typeface="맑은 고딕"/>
+                <a:cs typeface="맑은 고딕"/>
+              </a:rPr>
+              <a:t>  (환각 억제)</a:t>
             </a:r>
           </a:p>
           <a:p>
@@ -10351,11 +10535,11 @@
                 <a:spcPts val="0"/>
               </a:spcBef>
               <a:spcAft>
-                <a:spcPts val="550"/>
-              </a:spcAft>
-            </a:pPr>
-            <a:r>
-              <a:rPr sz="1200" b="1" i="0">
+                <a:spcPts val="700"/>
+              </a:spcAft>
+            </a:pPr>
+            <a:r>
+              <a:rPr sz="1250" b="1" i="0">
                 <a:solidFill>
                   <a:srgbClr val="2D6CDF"/>
                 </a:solidFill>
@@ -10366,7 +10550,7 @@
               <a:t>•  </a:t>
             </a:r>
             <a:r>
-              <a:rPr sz="1200" b="1" i="0">
+              <a:rPr sz="1250" b="0" i="0">
                 <a:solidFill>
                   <a:srgbClr val="1F2937"/>
                 </a:solidFill>
@@ -10374,10 +10558,34 @@
                 <a:ea typeface="맑은 고딕"/>
                 <a:cs typeface="맑은 고딕"/>
               </a:rPr>
-              <a:t>10명 손제작 고정 캐스트</a:t>
-            </a:r>
-            <a:r>
-              <a:rPr sz="1200" b="0" i="0">
+              <a:t>현재 정책은 항상 기본 근거 + PDF/TXT/MD 업로드로 문서 확장</a:t>
+            </a:r>
+          </a:p>
+          <a:p>
+            <a:pPr algn="l">
+              <a:lnSpc>
+                <a:spcPct val="118000"/>
+              </a:lnSpc>
+              <a:spcBef>
+                <a:spcPts val="0"/>
+              </a:spcBef>
+              <a:spcAft>
+                <a:spcPts val="700"/>
+              </a:spcAft>
+            </a:pPr>
+            <a:r>
+              <a:rPr sz="1250" b="1" i="0">
+                <a:solidFill>
+                  <a:srgbClr val="2D6CDF"/>
+                </a:solidFill>
+                <a:latin typeface="맑은 고딕"/>
+                <a:ea typeface="맑은 고딕"/>
+                <a:cs typeface="맑은 고딕"/>
+              </a:rPr>
+              <a:t>•  </a:t>
+            </a:r>
+            <a:r>
+              <a:rPr sz="1250" b="0" i="0">
                 <a:solidFill>
                   <a:srgbClr val="1F2937"/>
                 </a:solidFill>
@@ -10385,7 +10593,7 @@
                 <a:ea typeface="맑은 고딕"/>
                 <a:cs typeface="맑은 고딕"/>
               </a:rPr>
-              <a:t> — 무작위 통계 샘플엔 ‘관계’가 없다. 전파 무대엔 서로 아는 마을이 필요 (축 A·B와 목적이 다른 의도된 선택)</a:t>
+              <a:t>Chroma 벡터 검색 + OpenAI 임베딩 → 근거·품질지표 함께 표시</a:t>
             </a:r>
           </a:p>
           <a:p>
@@ -10397,11 +10605,11 @@
                 <a:spcPts val="0"/>
               </a:spcBef>
               <a:spcAft>
-                <a:spcPts val="550"/>
-              </a:spcAft>
-            </a:pPr>
-            <a:r>
-              <a:rPr sz="1200" b="1" i="0">
+                <a:spcPts val="700"/>
+              </a:spcAft>
+            </a:pPr>
+            <a:r>
+              <a:rPr sz="1250" b="1" i="0">
                 <a:solidFill>
                   <a:srgbClr val="2D6CDF"/>
                 </a:solidFill>
@@ -10412,7 +10620,7 @@
               <a:t>•  </a:t>
             </a:r>
             <a:r>
-              <a:rPr sz="1200" b="0" i="0">
+              <a:rPr sz="1250" b="0" i="0">
                 <a:solidFill>
                   <a:srgbClr val="1F2937"/>
                 </a:solidFill>
@@ -10420,34 +10628,23 @@
                 <a:ea typeface="맑은 고딕"/>
                 <a:cs typeface="맑은 고딕"/>
               </a:rPr>
-              <a:t>LLM이 각자의 하루 일과(시간 → 장소 → 행동)를 생성</a:t>
-            </a:r>
-          </a:p>
-          <a:p>
-            <a:pPr algn="l">
-              <a:lnSpc>
-                <a:spcPct val="118000"/>
-              </a:lnSpc>
-              <a:spcBef>
-                <a:spcPts val="0"/>
-              </a:spcBef>
-              <a:spcAft>
-                <a:spcPts val="550"/>
-              </a:spcAft>
-            </a:pPr>
-            <a:r>
-              <a:rPr sz="1200" b="1" i="0">
-                <a:solidFill>
-                  <a:srgbClr val="2D6CDF"/>
-                </a:solidFill>
-                <a:latin typeface="맑은 고딕"/>
-                <a:ea typeface="맑은 고딕"/>
-                <a:cs typeface="맑은 고딕"/>
-              </a:rPr>
-              <a:t>•  </a:t>
-            </a:r>
-            <a:r>
-              <a:rPr sz="1200" b="1" i="0">
+              <a:t>API 키가 없으면 추출식 폴백 — 데모는 항상 동작</a:t>
+            </a:r>
+          </a:p>
+          <a:p>
+            <a:pPr algn="l">
+              <a:lnSpc>
+                <a:spcPct val="112000"/>
+              </a:lnSpc>
+              <a:spcBef>
+                <a:spcPts val="0"/>
+              </a:spcBef>
+              <a:spcAft>
+                <a:spcPts val="200"/>
+              </a:spcAft>
+            </a:pPr>
+            <a:r>
+              <a:rPr sz="400" b="0" i="0">
                 <a:solidFill>
                   <a:srgbClr val="1F2937"/>
                 </a:solidFill>
@@ -10455,88 +10652,7 @@
                 <a:ea typeface="맑은 고딕"/>
                 <a:cs typeface="맑은 고딕"/>
               </a:rPr>
-              <a:t>“녹화 후 재생” — 하루를 미리 생성, 브라우저는 LLM 0콜로 재생</a:t>
-            </a:r>
-            <a:r>
-              <a:rPr sz="1200" b="0" i="0">
-                <a:solidFill>
-                  <a:srgbClr val="6B7280"/>
-                </a:solidFill>
-                <a:latin typeface="맑은 고딕"/>
-                <a:ea typeface="맑은 고딕"/>
-                <a:cs typeface="맑은 고딕"/>
-              </a:rPr>
-              <a:t>  (즉시·반복·오프라인 = 발표 안전망)</a:t>
-            </a:r>
-          </a:p>
-          <a:p>
-            <a:pPr algn="l">
-              <a:lnSpc>
-                <a:spcPct val="118000"/>
-              </a:lnSpc>
-              <a:spcBef>
-                <a:spcPts val="0"/>
-              </a:spcBef>
-              <a:spcAft>
-                <a:spcPts val="550"/>
-              </a:spcAft>
-            </a:pPr>
-            <a:r>
-              <a:rPr sz="1200" b="1" i="0">
-                <a:solidFill>
-                  <a:srgbClr val="2D6CDF"/>
-                </a:solidFill>
-                <a:latin typeface="맑은 고딕"/>
-                <a:ea typeface="맑은 고딕"/>
-                <a:cs typeface="맑은 고딕"/>
-              </a:rPr>
-              <a:t>•  </a:t>
-            </a:r>
-            <a:r>
-              <a:rPr sz="1200" b="0" i="0">
-                <a:solidFill>
-                  <a:srgbClr val="1F2937"/>
-                </a:solidFill>
-                <a:latin typeface="맑은 고딕"/>
-                <a:ea typeface="맑은 고딕"/>
-                <a:cs typeface="맑은 고딕"/>
-              </a:rPr>
-              <a:t>도로 waypoint 652개 → 그래프 + BFS 길찾기로 실제 ‘도보’ 이동</a:t>
-            </a:r>
-          </a:p>
-          <a:p>
-            <a:pPr algn="l">
-              <a:lnSpc>
-                <a:spcPct val="118000"/>
-              </a:lnSpc>
-              <a:spcBef>
-                <a:spcPts val="0"/>
-              </a:spcBef>
-              <a:spcAft>
-                <a:spcPts val="550"/>
-              </a:spcAft>
-            </a:pPr>
-            <a:r>
-              <a:rPr sz="1200" b="1" i="0">
-                <a:solidFill>
-                  <a:srgbClr val="2D6CDF"/>
-                </a:solidFill>
-                <a:latin typeface="맑은 고딕"/>
-                <a:ea typeface="맑은 고딕"/>
-                <a:cs typeface="맑은 고딕"/>
-              </a:rPr>
-              <a:t>•  </a:t>
-            </a:r>
-            <a:r>
-              <a:rPr sz="1200" b="0" i="0">
-                <a:solidFill>
-                  <a:srgbClr val="1F2937"/>
-                </a:solidFill>
-                <a:latin typeface="맑은 고딕"/>
-                <a:ea typeface="맑은 고딕"/>
-                <a:cs typeface="맑은 고딕"/>
-              </a:rPr>
-              <a:t>마주치면 — 그날 동선·관계가 묻어나는 맥락 대화</a:t>
+              <a:t/>
             </a:r>
           </a:p>
         </p:txBody>
@@ -10549,151 +10665,8 @@
         </p:nvSpPr>
         <p:spPr>
           <a:xfrm>
-            <a:off x="548640" y="4526280"/>
-            <a:ext cx="5577840" cy="1554480"/>
-          </a:xfrm>
-          <a:prstGeom prst="roundRect">
-            <a:avLst>
-              <a:gd name="adj" fmla="val 8000"/>
-            </a:avLst>
-          </a:prstGeom>
-          <a:solidFill>
-            <a:srgbClr val="FDF3E4"/>
-          </a:solidFill>
-          <a:ln w="12700">
-            <a:solidFill>
-              <a:srgbClr val="E8902A"/>
-            </a:solidFill>
-          </a:ln>
-          <a:effectLst/>
-        </p:spPr>
-        <p:style>
-          <a:lnRef idx="1">
-            <a:schemeClr val="accent1"/>
-          </a:lnRef>
-          <a:fillRef idx="3">
-            <a:schemeClr val="accent1"/>
-          </a:fillRef>
-          <a:effectRef idx="2">
-            <a:schemeClr val="accent1"/>
-          </a:effectRef>
-          <a:fontRef idx="minor">
-            <a:schemeClr val="lt1"/>
-          </a:fontRef>
-        </p:style>
-        <p:txBody>
-          <a:bodyPr rtlCol="0" anchor="ctr" wrap="square" lIns="109728" rIns="109728" tIns="54864" bIns="54864"/>
-          <a:lstStyle/>
-          <a:p>
-            <a:pPr algn="ctr"/>
-          </a:p>
-        </p:txBody>
-      </p:sp>
-      <p:sp>
-        <p:nvSpPr>
-          <p:cNvPr id="8" name="TextBox 7"/>
-          <p:cNvSpPr txBox="1"/>
-          <p:nvPr/>
-        </p:nvSpPr>
-        <p:spPr>
-          <a:xfrm>
-            <a:off x="777240" y="4663440"/>
-            <a:ext cx="5120640" cy="1325880"/>
-          </a:xfrm>
-          <a:prstGeom prst="rect">
-            <a:avLst/>
-          </a:prstGeom>
-          <a:noFill/>
-        </p:spPr>
-        <p:txBody>
-          <a:bodyPr wrap="square" lIns="0" rIns="0" tIns="0" bIns="0">
-            <a:spAutoFit/>
-          </a:bodyPr>
-          <a:lstStyle/>
-          <a:p>
-            <a:pPr algn="l">
-              <a:lnSpc>
-                <a:spcPct val="112000"/>
-              </a:lnSpc>
-              <a:spcBef>
-                <a:spcPts val="0"/>
-              </a:spcBef>
-              <a:spcAft>
-                <a:spcPts val="400"/>
-              </a:spcAft>
-            </a:pPr>
-            <a:r>
-              <a:rPr sz="1300" b="1" i="0">
-                <a:solidFill>
-                  <a:srgbClr val="E8902A"/>
-                </a:solidFill>
-                <a:latin typeface="맑은 고딕"/>
-                <a:ea typeface="맑은 고딕"/>
-                <a:cs typeface="맑은 고딕"/>
-              </a:rPr>
-              <a:t>시행착오 — “스케줄은 순간이동, 재생은 도보”</a:t>
-            </a:r>
-          </a:p>
-          <a:p>
-            <a:pPr algn="l">
-              <a:lnSpc>
-                <a:spcPct val="128000"/>
-              </a:lnSpc>
-              <a:spcBef>
-                <a:spcPts val="0"/>
-              </a:spcBef>
-              <a:spcAft>
-                <a:spcPts val="0"/>
-              </a:spcAft>
-            </a:pPr>
-            <a:r>
-              <a:rPr sz="1150" b="0" i="0">
-                <a:solidFill>
-                  <a:srgbClr val="1F2937"/>
-                </a:solidFill>
-                <a:latin typeface="맑은 고딕"/>
-                <a:ea typeface="맑은 고딕"/>
-                <a:cs typeface="맑은 고딕"/>
-              </a:rPr>
-              <a:t>LLM이 짠 스케줄은 이동시간 0을 가정 → 막상 재생하니 만남 14개 중 7개가 ‘도착 전에 끝남’. 실제 걸어서 도착하는 시간을 시뮬해 만남을 다시 뽑자 발화 6/6 보장.</a:t>
-            </a:r>
-          </a:p>
-        </p:txBody>
-      </p:sp>
-      <p:pic>
-        <p:nvPicPr>
-          <p:cNvPr id="9" name="Picture 8" descr="map.png"/>
-          <p:cNvPicPr>
-            <a:picLocks noChangeAspect="1"/>
-          </p:cNvPicPr>
-          <p:nvPr/>
-        </p:nvPicPr>
-        <p:blipFill>
-          <a:blip r:embed="rId2"/>
-          <a:stretch>
-            <a:fillRect/>
-          </a:stretch>
-        </p:blipFill>
-        <p:spPr>
-          <a:xfrm>
-            <a:off x="6568440" y="1600200"/>
-            <a:ext cx="4876800" cy="3657600"/>
-          </a:xfrm>
-          <a:prstGeom prst="rect">
-            <a:avLst/>
-          </a:prstGeom>
-        </p:spPr>
-      </p:pic>
-      <p:sp>
-        <p:nvSpPr>
-          <p:cNvPr id="10" name="Rounded Rectangle 9"/>
-          <p:cNvSpPr/>
-          <p:nvPr/>
-        </p:nvSpPr>
-        <p:spPr>
-          <a:xfrm>
-            <a:off x="6355080" y="5349240"/>
-            <a:ext cx="5303520" cy="731520"/>
+            <a:off x="548640" y="4297680"/>
+            <a:ext cx="5212080" cy="1783080"/>
           </a:xfrm>
           <a:prstGeom prst="roundRect">
             <a:avLst>
@@ -10734,14 +10707,14 @@
       </p:sp>
       <p:sp>
         <p:nvSpPr>
-          <p:cNvPr id="11" name="TextBox 10"/>
+          <p:cNvPr id="8" name="TextBox 7"/>
           <p:cNvSpPr txBox="1"/>
           <p:nvPr/>
         </p:nvSpPr>
         <p:spPr>
           <a:xfrm>
-            <a:off x="6537960" y="5440680"/>
-            <a:ext cx="4937760" cy="566928"/>
+            <a:off x="777240" y="4462272"/>
+            <a:ext cx="4754880" cy="1463040"/>
           </a:xfrm>
           <a:prstGeom prst="rect">
             <a:avLst/>
@@ -10749,24 +10722,24 @@
           <a:noFill/>
         </p:spPr>
         <p:txBody>
-          <a:bodyPr wrap="square" lIns="0" rIns="0" tIns="0" bIns="0" anchor="ctr">
+          <a:bodyPr wrap="square" lIns="0" rIns="0" tIns="0" bIns="0">
             <a:spAutoFit/>
           </a:bodyPr>
           <a:lstStyle/>
           <a:p>
             <a:pPr algn="l">
               <a:lnSpc>
-                <a:spcPct val="120000"/>
-              </a:lnSpc>
-              <a:spcBef>
-                <a:spcPts val="0"/>
-              </a:spcBef>
-              <a:spcAft>
-                <a:spcPts val="0"/>
-              </a:spcAft>
-            </a:pPr>
-            <a:r>
-              <a:rPr sz="1200" b="1" i="0">
+                <a:spcPct val="112000"/>
+              </a:lnSpc>
+              <a:spcBef>
+                <a:spcPts val="0"/>
+              </a:spcBef>
+              <a:spcAft>
+                <a:spcPts val="500"/>
+              </a:spcAft>
+            </a:pPr>
+            <a:r>
+              <a:rPr sz="1350" b="1" i="0">
                 <a:solidFill>
                   <a:srgbClr val="2E9E6B"/>
                 </a:solidFill>
@@ -10774,10 +10747,23 @@
                 <a:ea typeface="맑은 고딕"/>
                 <a:cs typeface="맑은 고딕"/>
               </a:rPr>
-              <a:t>창발 —  </a:t>
-            </a:r>
-            <a:r>
-              <a:rPr sz="1130" b="0" i="0">
+              <a:t>협업 방식 — 자리만 비워두고 끼워 넣기</a:t>
+            </a:r>
+          </a:p>
+          <a:p>
+            <a:pPr algn="l">
+              <a:lnSpc>
+                <a:spcPct val="130000"/>
+              </a:lnSpc>
+              <a:spcBef>
+                <a:spcPts val="0"/>
+              </a:spcBef>
+              <a:spcAft>
+                <a:spcPts val="0"/>
+              </a:spcAft>
+            </a:pPr>
+            <a:r>
+              <a:rPr sz="1180" b="0" i="0">
                 <a:solidFill>
                   <a:srgbClr val="1F2937"/>
                 </a:solidFill>
@@ -10785,7 +10771,100 @@
                 <a:ea typeface="맑은 고딕"/>
                 <a:cs typeface="맑은 고딕"/>
               </a:rPr>
-              <a:t>시키지 않았는데 — 민수·수아가 광장 산책을 약속하고, 같은 카페 사장이 세 손님과 ‘각자의 하루’로 다른 대화를 한다</a:t>
+              <a:t>본체에는 끼울 자리와 반환 계약만 미리 설계해 두고, 팀원이 독립 패키지로 RAG 엔진을 구현해 마지막에 끼워 넣었다. 모듈 경계를 지킨 덕에 본체는 한 줄도 깨지지 않았다.</a:t>
+            </a:r>
+          </a:p>
+        </p:txBody>
+      </p:sp>
+      <p:sp>
+        <p:nvSpPr>
+          <p:cNvPr id="9" name="Rounded Rectangle 8"/>
+          <p:cNvSpPr/>
+          <p:nvPr/>
+        </p:nvSpPr>
+        <p:spPr>
+          <a:xfrm>
+            <a:off x="6035040" y="1645920"/>
+            <a:ext cx="5605272" cy="4434840"/>
+          </a:xfrm>
+          <a:prstGeom prst="roundRect">
+            <a:avLst>
+              <a:gd name="adj" fmla="val 4000"/>
+            </a:avLst>
+          </a:prstGeom>
+          <a:solidFill>
+            <a:srgbClr val="F1F3F7"/>
+          </a:solidFill>
+          <a:ln w="15240">
+            <a:solidFill>
+              <a:srgbClr val="9AA5B1"/>
+            </a:solidFill>
+          </a:ln>
+          <a:effectLst/>
+        </p:spPr>
+        <p:style>
+          <a:lnRef idx="1">
+            <a:schemeClr val="accent1"/>
+          </a:lnRef>
+          <a:fillRef idx="3">
+            <a:schemeClr val="accent1"/>
+          </a:fillRef>
+          <a:effectRef idx="2">
+            <a:schemeClr val="accent1"/>
+          </a:effectRef>
+          <a:fontRef idx="minor">
+            <a:schemeClr val="lt1"/>
+          </a:fontRef>
+        </p:style>
+        <p:txBody>
+          <a:bodyPr rtlCol="0" anchor="ctr" wrap="square" lIns="109728" rIns="109728" tIns="54864" bIns="54864"/>
+          <a:lstStyle/>
+          <a:p>
+            <a:pPr algn="ctr">
+              <a:lnSpc>
+                <a:spcPct val="112000"/>
+              </a:lnSpc>
+              <a:spcBef>
+                <a:spcPts val="0"/>
+              </a:spcBef>
+              <a:spcAft>
+                <a:spcPts val="200"/>
+              </a:spcAft>
+            </a:pPr>
+            <a:r>
+              <a:rPr sz="1400" b="1" i="0">
+                <a:solidFill>
+                  <a:srgbClr val="6B7280"/>
+                </a:solidFill>
+                <a:latin typeface="맑은 고딕"/>
+                <a:ea typeface="맑은 고딕"/>
+                <a:cs typeface="맑은 고딕"/>
+              </a:rPr>
+              <a:t>📸 ‘게시판’ 탭 캡처</a:t>
+            </a:r>
+          </a:p>
+          <a:p>
+            <a:pPr algn="ctr">
+              <a:lnSpc>
+                <a:spcPct val="112000"/>
+              </a:lnSpc>
+              <a:spcBef>
+                <a:spcPts val="0"/>
+              </a:spcBef>
+              <a:spcAft>
+                <a:spcPts val="0"/>
+              </a:spcAft>
+            </a:pPr>
+            <a:r>
+              <a:rPr sz="1000" b="0" i="0">
+                <a:solidFill>
+                  <a:srgbClr val="9AA5B1"/>
+                </a:solidFill>
+                <a:latin typeface="맑은 고딕"/>
+                <a:ea typeface="맑은 고딕"/>
+                <a:cs typeface="맑은 고딕"/>
+              </a:rPr>
+              <a:t>질문 → 답변 + 📎근거 + 품질지표 표가 보이는 화면 추천</a:t>
             </a:r>
           </a:p>
         </p:txBody>
@@ -10917,7 +10996,7 @@
                 <a:ea typeface="맑은 고딕"/>
                 <a:cs typeface="맑은 고딕"/>
               </a:rPr>
-              <a:t>미리마을 × 정책 — 소식은 누구에게, 어떤 경로로 닿는가</a:t>
+              <a:t>미리마을 — 시민이 살아가는 마을 (Generative Agents)</a:t>
             </a:r>
           </a:p>
         </p:txBody>
@@ -11029,168 +11108,14 @@
       </p:sp>
       <p:sp>
         <p:nvSpPr>
-          <p:cNvPr id="6" name="Rounded Rectangle 5"/>
-          <p:cNvSpPr/>
+          <p:cNvPr id="6" name="TextBox 5"/>
+          <p:cNvSpPr txBox="1"/>
           <p:nvPr/>
         </p:nvSpPr>
         <p:spPr>
           <a:xfrm>
             <a:off x="548640" y="1600200"/>
-            <a:ext cx="11091672" cy="731520"/>
-          </a:xfrm>
-          <a:prstGeom prst="roundRect">
-            <a:avLst>
-              <a:gd name="adj" fmla="val 8000"/>
-            </a:avLst>
-          </a:prstGeom>
-          <a:solidFill>
-            <a:srgbClr val="EAF0F8"/>
-          </a:solidFill>
-          <a:ln w="12700">
-            <a:solidFill>
-              <a:srgbClr val="1F3A5F"/>
-            </a:solidFill>
-          </a:ln>
-          <a:effectLst/>
-        </p:spPr>
-        <p:style>
-          <a:lnRef idx="1">
-            <a:schemeClr val="accent1"/>
-          </a:lnRef>
-          <a:fillRef idx="3">
-            <a:schemeClr val="accent1"/>
-          </a:fillRef>
-          <a:effectRef idx="2">
-            <a:schemeClr val="accent1"/>
-          </a:effectRef>
-          <a:fontRef idx="minor">
-            <a:schemeClr val="lt1"/>
-          </a:fontRef>
-        </p:style>
-        <p:txBody>
-          <a:bodyPr rtlCol="0" anchor="ctr" wrap="square" lIns="109728" rIns="109728" tIns="54864" bIns="54864"/>
-          <a:lstStyle/>
-          <a:p>
-            <a:pPr algn="ctr"/>
-          </a:p>
-        </p:txBody>
-      </p:sp>
-      <p:sp>
-        <p:nvSpPr>
-          <p:cNvPr id="7" name="TextBox 6"/>
-          <p:cNvSpPr txBox="1"/>
-          <p:nvPr/>
-        </p:nvSpPr>
-        <p:spPr>
-          <a:xfrm>
-            <a:off x="868680" y="1719072"/>
-            <a:ext cx="10515600" cy="530352"/>
-          </a:xfrm>
-          <a:prstGeom prst="rect">
-            <a:avLst/>
-          </a:prstGeom>
-          <a:noFill/>
-        </p:spPr>
-        <p:txBody>
-          <a:bodyPr wrap="square" lIns="0" rIns="0" tIns="0" bIns="0" anchor="ctr">
-            <a:spAutoFit/>
-          </a:bodyPr>
-          <a:lstStyle/>
-          <a:p>
-            <a:pPr algn="ctr">
-              <a:lnSpc>
-                <a:spcPct val="112000"/>
-              </a:lnSpc>
-              <a:spcBef>
-                <a:spcPts val="0"/>
-              </a:spcBef>
-              <a:spcAft>
-                <a:spcPts val="0"/>
-              </a:spcAft>
-            </a:pPr>
-            <a:r>
-              <a:rPr sz="1450" b="0" i="0">
-                <a:solidFill>
-                  <a:srgbClr val="1F2937"/>
-                </a:solidFill>
-                <a:latin typeface="맑은 고딕"/>
-                <a:ea typeface="맑은 고딕"/>
-                <a:cs typeface="맑은 고딕"/>
-              </a:rPr>
-              <a:t>질문의 전환:  “정책이 각자에게 어떤 효과인가”  →  </a:t>
-            </a:r>
-            <a:r>
-              <a:rPr sz="1450" b="1" i="0">
-                <a:solidFill>
-                  <a:srgbClr val="1F3A5F"/>
-                </a:solidFill>
-                <a:latin typeface="맑은 고딕"/>
-                <a:ea typeface="맑은 고딕"/>
-                <a:cs typeface="맑은 고딕"/>
-              </a:rPr>
-              <a:t>“정책 ‘소식’이 누구에게 · 어떤 경로로 닿는가”</a:t>
-            </a:r>
-          </a:p>
-        </p:txBody>
-      </p:sp>
-      <p:sp>
-        <p:nvSpPr>
-          <p:cNvPr id="8" name="Rounded Rectangle 7"/>
-          <p:cNvSpPr/>
-          <p:nvPr/>
-        </p:nvSpPr>
-        <p:spPr>
-          <a:xfrm>
-            <a:off x="548640" y="2560320"/>
-            <a:ext cx="2468880" cy="1371600"/>
-          </a:xfrm>
-          <a:prstGeom prst="roundRect">
-            <a:avLst>
-              <a:gd name="adj" fmla="val 8000"/>
-            </a:avLst>
-          </a:prstGeom>
-          <a:solidFill>
-            <a:srgbClr val="FCECEB"/>
-          </a:solidFill>
-          <a:ln w="12700">
-            <a:solidFill>
-              <a:srgbClr val="D9534F"/>
-            </a:solidFill>
-          </a:ln>
-          <a:effectLst/>
-        </p:spPr>
-        <p:style>
-          <a:lnRef idx="1">
-            <a:schemeClr val="accent1"/>
-          </a:lnRef>
-          <a:fillRef idx="3">
-            <a:schemeClr val="accent1"/>
-          </a:fillRef>
-          <a:effectRef idx="2">
-            <a:schemeClr val="accent1"/>
-          </a:effectRef>
-          <a:fontRef idx="minor">
-            <a:schemeClr val="lt1"/>
-          </a:fontRef>
-        </p:style>
-        <p:txBody>
-          <a:bodyPr rtlCol="0" anchor="ctr" wrap="square" lIns="109728" rIns="109728" tIns="54864" bIns="54864"/>
-          <a:lstStyle/>
-          <a:p>
-            <a:pPr algn="ctr"/>
-          </a:p>
-        </p:txBody>
-      </p:sp>
-      <p:sp>
-        <p:nvSpPr>
-          <p:cNvPr id="9" name="TextBox 8"/>
-          <p:cNvSpPr txBox="1"/>
-          <p:nvPr/>
-        </p:nvSpPr>
-        <p:spPr>
-          <a:xfrm>
-            <a:off x="658368" y="2633472"/>
-            <a:ext cx="2249424" cy="1225296"/>
+            <a:ext cx="5577840" cy="2834640"/>
           </a:xfrm>
           <a:prstGeom prst="rect">
             <a:avLst/>
@@ -11205,41 +11130,28 @@
           <a:p>
             <a:pPr algn="l">
               <a:lnSpc>
-                <a:spcPct val="112000"/>
-              </a:lnSpc>
-              <a:spcBef>
-                <a:spcPts val="0"/>
-              </a:spcBef>
-              <a:spcAft>
-                <a:spcPts val="200"/>
-              </a:spcAft>
-            </a:pPr>
-            <a:r>
-              <a:rPr sz="1250" b="1" i="0">
-                <a:solidFill>
-                  <a:srgbClr val="D9534F"/>
-                </a:solidFill>
-                <a:latin typeface="맑은 고딕"/>
-                <a:ea typeface="맑은 고딕"/>
-                <a:cs typeface="맑은 고딕"/>
-              </a:rPr>
-              <a:t>① 시드 주입</a:t>
-            </a:r>
-          </a:p>
-          <a:p>
-            <a:pPr algn="l">
-              <a:lnSpc>
-                <a:spcPct val="112000"/>
-              </a:lnSpc>
-              <a:spcBef>
-                <a:spcPts val="0"/>
-              </a:spcBef>
-              <a:spcAft>
-                <a:spcPts val="100"/>
-              </a:spcAft>
-            </a:pPr>
-            <a:r>
-              <a:rPr sz="1100" b="0" i="0">
+                <a:spcPct val="125000"/>
+              </a:lnSpc>
+              <a:spcBef>
+                <a:spcPts val="0"/>
+              </a:spcBef>
+              <a:spcAft>
+                <a:spcPts val="800"/>
+              </a:spcAft>
+            </a:pPr>
+            <a:r>
+              <a:rPr sz="1350" b="1" i="0">
+                <a:solidFill>
+                  <a:srgbClr val="2D6CDF"/>
+                </a:solidFill>
+                <a:latin typeface="맑은 고딕"/>
+                <a:ea typeface="맑은 고딕"/>
+                <a:cs typeface="맑은 고딕"/>
+              </a:rPr>
+              <a:t>Park et al. (2023) </a:t>
+            </a:r>
+            <a:r>
+              <a:rPr sz="1350" b="0" i="0">
                 <a:solidFill>
                   <a:srgbClr val="1F2937"/>
                 </a:solidFill>
@@ -11247,46 +11159,126 @@
                 <a:ea typeface="맑은 고딕"/>
                 <a:cs typeface="맑은 고딕"/>
               </a:rPr>
-              <a:t>복지관 어르신 2명만 정책을 알고 시작</a:t>
-            </a:r>
-          </a:p>
-        </p:txBody>
-      </p:sp>
-      <p:sp>
-        <p:nvSpPr>
-          <p:cNvPr id="10" name="TextBox 9"/>
-          <p:cNvSpPr txBox="1"/>
-          <p:nvPr/>
-        </p:nvSpPr>
-        <p:spPr>
-          <a:xfrm>
-            <a:off x="3035808" y="3063240"/>
-            <a:ext cx="457200" cy="365760"/>
-          </a:xfrm>
-          <a:prstGeom prst="rect">
-            <a:avLst/>
-          </a:prstGeom>
-          <a:noFill/>
-        </p:spPr>
-        <p:txBody>
-          <a:bodyPr wrap="square" lIns="0" rIns="0" tIns="0" bIns="0">
-            <a:spAutoFit/>
-          </a:bodyPr>
-          <a:lstStyle/>
-          <a:p>
-            <a:pPr algn="ctr">
-              <a:lnSpc>
-                <a:spcPct val="112000"/>
-              </a:lnSpc>
-              <a:spcBef>
-                <a:spcPts val="0"/>
-              </a:spcBef>
-              <a:spcAft>
-                <a:spcPts val="0"/>
-              </a:spcAft>
-            </a:pPr>
-            <a:r>
-              <a:rPr sz="1600" b="1" i="0">
+              <a:t>의 원형 — 에이전트가 공간에서 자기 스케줄대로 살아가는 마을</a:t>
+            </a:r>
+          </a:p>
+          <a:p>
+            <a:pPr algn="l">
+              <a:lnSpc>
+                <a:spcPct val="118000"/>
+              </a:lnSpc>
+              <a:spcBef>
+                <a:spcPts val="0"/>
+              </a:spcBef>
+              <a:spcAft>
+                <a:spcPts val="550"/>
+              </a:spcAft>
+            </a:pPr>
+            <a:r>
+              <a:rPr sz="1200" b="1" i="0">
+                <a:solidFill>
+                  <a:srgbClr val="2D6CDF"/>
+                </a:solidFill>
+                <a:latin typeface="맑은 고딕"/>
+                <a:ea typeface="맑은 고딕"/>
+                <a:cs typeface="맑은 고딕"/>
+              </a:rPr>
+              <a:t>•  </a:t>
+            </a:r>
+            <a:r>
+              <a:rPr sz="1200" b="1" i="0">
+                <a:solidFill>
+                  <a:srgbClr val="1F2937"/>
+                </a:solidFill>
+                <a:latin typeface="맑은 고딕"/>
+                <a:ea typeface="맑은 고딕"/>
+                <a:cs typeface="맑은 고딕"/>
+              </a:rPr>
+              <a:t>10명 손제작 고정 캐스트</a:t>
+            </a:r>
+            <a:r>
+              <a:rPr sz="1200" b="0" i="0">
+                <a:solidFill>
+                  <a:srgbClr val="1F2937"/>
+                </a:solidFill>
+                <a:latin typeface="맑은 고딕"/>
+                <a:ea typeface="맑은 고딕"/>
+                <a:cs typeface="맑은 고딕"/>
+              </a:rPr>
+              <a:t> — 무작위 통계 샘플엔 ‘관계’가 없다. 전파 무대엔 서로 아는 마을이 필요 (축 A·B와 목적이 다른 의도된 선택)</a:t>
+            </a:r>
+          </a:p>
+          <a:p>
+            <a:pPr algn="l">
+              <a:lnSpc>
+                <a:spcPct val="118000"/>
+              </a:lnSpc>
+              <a:spcBef>
+                <a:spcPts val="0"/>
+              </a:spcBef>
+              <a:spcAft>
+                <a:spcPts val="550"/>
+              </a:spcAft>
+            </a:pPr>
+            <a:r>
+              <a:rPr sz="1200" b="1" i="0">
+                <a:solidFill>
+                  <a:srgbClr val="2D6CDF"/>
+                </a:solidFill>
+                <a:latin typeface="맑은 고딕"/>
+                <a:ea typeface="맑은 고딕"/>
+                <a:cs typeface="맑은 고딕"/>
+              </a:rPr>
+              <a:t>•  </a:t>
+            </a:r>
+            <a:r>
+              <a:rPr sz="1200" b="0" i="0">
+                <a:solidFill>
+                  <a:srgbClr val="1F2937"/>
+                </a:solidFill>
+                <a:latin typeface="맑은 고딕"/>
+                <a:ea typeface="맑은 고딕"/>
+                <a:cs typeface="맑은 고딕"/>
+              </a:rPr>
+              <a:t>LLM이 각자의 하루 일과(시간 → 장소 → 행동)를 생성</a:t>
+            </a:r>
+          </a:p>
+          <a:p>
+            <a:pPr algn="l">
+              <a:lnSpc>
+                <a:spcPct val="118000"/>
+              </a:lnSpc>
+              <a:spcBef>
+                <a:spcPts val="0"/>
+              </a:spcBef>
+              <a:spcAft>
+                <a:spcPts val="550"/>
+              </a:spcAft>
+            </a:pPr>
+            <a:r>
+              <a:rPr sz="1200" b="1" i="0">
+                <a:solidFill>
+                  <a:srgbClr val="2D6CDF"/>
+                </a:solidFill>
+                <a:latin typeface="맑은 고딕"/>
+                <a:ea typeface="맑은 고딕"/>
+                <a:cs typeface="맑은 고딕"/>
+              </a:rPr>
+              <a:t>•  </a:t>
+            </a:r>
+            <a:r>
+              <a:rPr sz="1200" b="1" i="0">
+                <a:solidFill>
+                  <a:srgbClr val="1F2937"/>
+                </a:solidFill>
+                <a:latin typeface="맑은 고딕"/>
+                <a:ea typeface="맑은 고딕"/>
+                <a:cs typeface="맑은 고딕"/>
+              </a:rPr>
+              <a:t>녹화 후 재생 — 하루를 미리 생성, 브라우저는 LLM 0콜로 재생</a:t>
+            </a:r>
+            <a:r>
+              <a:rPr sz="1200" b="0" i="0">
                 <a:solidFill>
                   <a:srgbClr val="6B7280"/>
                 </a:solidFill>
@@ -11294,21 +11286,91 @@
                 <a:ea typeface="맑은 고딕"/>
                 <a:cs typeface="맑은 고딕"/>
               </a:rPr>
-              <a:t>→</a:t>
-            </a:r>
-          </a:p>
-        </p:txBody>
-      </p:sp>
-      <p:sp>
-        <p:nvSpPr>
-          <p:cNvPr id="11" name="Rounded Rectangle 10"/>
+              <a:t>  (즉시·반복·오프라인 = 발표 안전망)</a:t>
+            </a:r>
+          </a:p>
+          <a:p>
+            <a:pPr algn="l">
+              <a:lnSpc>
+                <a:spcPct val="118000"/>
+              </a:lnSpc>
+              <a:spcBef>
+                <a:spcPts val="0"/>
+              </a:spcBef>
+              <a:spcAft>
+                <a:spcPts val="550"/>
+              </a:spcAft>
+            </a:pPr>
+            <a:r>
+              <a:rPr sz="1200" b="1" i="0">
+                <a:solidFill>
+                  <a:srgbClr val="2D6CDF"/>
+                </a:solidFill>
+                <a:latin typeface="맑은 고딕"/>
+                <a:ea typeface="맑은 고딕"/>
+                <a:cs typeface="맑은 고딕"/>
+              </a:rPr>
+              <a:t>•  </a:t>
+            </a:r>
+            <a:r>
+              <a:rPr sz="1200" b="0" i="0">
+                <a:solidFill>
+                  <a:srgbClr val="1F2937"/>
+                </a:solidFill>
+                <a:latin typeface="맑은 고딕"/>
+                <a:ea typeface="맑은 고딕"/>
+                <a:cs typeface="맑은 고딕"/>
+              </a:rPr>
+              <a:t>도로 waypoint 652개 → 그래프 + BFS 길찾기로 실제 ‘도보’ 이동</a:t>
+            </a:r>
+          </a:p>
+          <a:p>
+            <a:pPr algn="l">
+              <a:lnSpc>
+                <a:spcPct val="118000"/>
+              </a:lnSpc>
+              <a:spcBef>
+                <a:spcPts val="0"/>
+              </a:spcBef>
+              <a:spcAft>
+                <a:spcPts val="550"/>
+              </a:spcAft>
+            </a:pPr>
+            <a:r>
+              <a:rPr sz="1200" b="1" i="0">
+                <a:solidFill>
+                  <a:srgbClr val="2D6CDF"/>
+                </a:solidFill>
+                <a:latin typeface="맑은 고딕"/>
+                <a:ea typeface="맑은 고딕"/>
+                <a:cs typeface="맑은 고딕"/>
+              </a:rPr>
+              <a:t>•  </a:t>
+            </a:r>
+            <a:r>
+              <a:rPr sz="1200" b="0" i="0">
+                <a:solidFill>
+                  <a:srgbClr val="1F2937"/>
+                </a:solidFill>
+                <a:latin typeface="맑은 고딕"/>
+                <a:ea typeface="맑은 고딕"/>
+                <a:cs typeface="맑은 고딕"/>
+              </a:rPr>
+              <a:t>마주치면 — 그날 동선·관계가 묻어나는 맥락 대화</a:t>
+            </a:r>
+          </a:p>
+        </p:txBody>
+      </p:sp>
+      <p:sp>
+        <p:nvSpPr>
+          <p:cNvPr id="7" name="Rounded Rectangle 6"/>
           <p:cNvSpPr/>
           <p:nvPr/>
         </p:nvSpPr>
         <p:spPr>
           <a:xfrm>
-            <a:off x="3511296" y="2560320"/>
-            <a:ext cx="2468880" cy="1371600"/>
+            <a:off x="548640" y="4526280"/>
+            <a:ext cx="5577840" cy="1554480"/>
           </a:xfrm>
           <a:prstGeom prst="roundRect">
             <a:avLst>
@@ -11349,14 +11411,14 @@
       </p:sp>
       <p:sp>
         <p:nvSpPr>
-          <p:cNvPr id="12" name="TextBox 11"/>
+          <p:cNvPr id="8" name="TextBox 7"/>
           <p:cNvSpPr txBox="1"/>
           <p:nvPr/>
         </p:nvSpPr>
         <p:spPr>
           <a:xfrm>
-            <a:off x="3621024" y="2633472"/>
-            <a:ext cx="2249424" cy="1225296"/>
+            <a:off x="777240" y="4663440"/>
+            <a:ext cx="5120640" cy="1325880"/>
           </a:xfrm>
           <a:prstGeom prst="rect">
             <a:avLst/>
@@ -11377,11 +11439,11 @@
                 <a:spcPts val="0"/>
               </a:spcBef>
               <a:spcAft>
-                <a:spcPts val="200"/>
-              </a:spcAft>
-            </a:pPr>
-            <a:r>
-              <a:rPr sz="1250" b="1" i="0">
+                <a:spcPts val="400"/>
+              </a:spcAft>
+            </a:pPr>
+            <a:r>
+              <a:rPr sz="1300" b="1" i="0">
                 <a:solidFill>
                   <a:srgbClr val="E8902A"/>
                 </a:solidFill>
@@ -11389,23 +11451,23 @@
                 <a:ea typeface="맑은 고딕"/>
                 <a:cs typeface="맑은 고딕"/>
               </a:rPr>
-              <a:t>② 만남 전파</a:t>
-            </a:r>
-          </a:p>
-          <a:p>
-            <a:pPr algn="l">
-              <a:lnSpc>
-                <a:spcPct val="112000"/>
-              </a:lnSpc>
-              <a:spcBef>
-                <a:spcPts val="0"/>
-              </a:spcBef>
-              <a:spcAft>
-                <a:spcPts val="100"/>
-              </a:spcAft>
-            </a:pPr>
-            <a:r>
-              <a:rPr sz="1100" b="0" i="0">
+              <a:t>시행착오 — 스케줄은 순간이동, 재생은 도보</a:t>
+            </a:r>
+          </a:p>
+          <a:p>
+            <a:pPr algn="l">
+              <a:lnSpc>
+                <a:spcPct val="128000"/>
+              </a:lnSpc>
+              <a:spcBef>
+                <a:spcPts val="0"/>
+              </a:spcBef>
+              <a:spcAft>
+                <a:spcPts val="0"/>
+              </a:spcAft>
+            </a:pPr>
+            <a:r>
+              <a:rPr sz="1150" b="0" i="0">
                 <a:solidFill>
                   <a:srgbClr val="1F2937"/>
                 </a:solidFill>
@@ -11413,234 +11475,45 @@
                 <a:ea typeface="맑은 고딕"/>
                 <a:cs typeface="맑은 고딕"/>
               </a:rPr>
-              <a:t>스케줄대로 살다 마주친 대화에서 소식이 옮음</a:t>
-            </a:r>
-          </a:p>
-        </p:txBody>
-      </p:sp>
-      <p:sp>
-        <p:nvSpPr>
-          <p:cNvPr id="13" name="TextBox 12"/>
-          <p:cNvSpPr txBox="1"/>
-          <p:nvPr/>
-        </p:nvSpPr>
-        <p:spPr>
-          <a:xfrm>
-            <a:off x="5998464" y="3063240"/>
-            <a:ext cx="457200" cy="365760"/>
+              <a:t>LLM이 짠 스케줄은 이동시간 0을 가정 → 막상 재생하니 만남 14개 중 7개가 ‘도착 전에 끝남’. 실제 걸어서 도착하는 시간을 시뮬해 만남을 다시 뽑자 발화 6/6 보장.</a:t>
+            </a:r>
+          </a:p>
+        </p:txBody>
+      </p:sp>
+      <p:pic>
+        <p:nvPicPr>
+          <p:cNvPr id="9" name="Picture 8" descr="map.png"/>
+          <p:cNvPicPr>
+            <a:picLocks noChangeAspect="1"/>
+          </p:cNvPicPr>
+          <p:nvPr/>
+        </p:nvPicPr>
+        <p:blipFill>
+          <a:blip r:embed="rId2"/>
+          <a:stretch>
+            <a:fillRect/>
+          </a:stretch>
+        </p:blipFill>
+        <p:spPr>
+          <a:xfrm>
+            <a:off x="6568440" y="1600200"/>
+            <a:ext cx="4876800" cy="3657600"/>
           </a:xfrm>
           <a:prstGeom prst="rect">
             <a:avLst/>
           </a:prstGeom>
-          <a:noFill/>
-        </p:spPr>
-        <p:txBody>
-          <a:bodyPr wrap="square" lIns="0" rIns="0" tIns="0" bIns="0">
-            <a:spAutoFit/>
-          </a:bodyPr>
-          <a:lstStyle/>
-          <a:p>
-            <a:pPr algn="ctr">
-              <a:lnSpc>
-                <a:spcPct val="112000"/>
-              </a:lnSpc>
-              <a:spcBef>
-                <a:spcPts val="0"/>
-              </a:spcBef>
-              <a:spcAft>
-                <a:spcPts val="0"/>
-              </a:spcAft>
-            </a:pPr>
-            <a:r>
-              <a:rPr sz="1600" b="1" i="0">
-                <a:solidFill>
-                  <a:srgbClr val="6B7280"/>
-                </a:solidFill>
-                <a:latin typeface="맑은 고딕"/>
-                <a:ea typeface="맑은 고딕"/>
-                <a:cs typeface="맑은 고딕"/>
-              </a:rPr>
-              <a:t>→</a:t>
-            </a:r>
-          </a:p>
-        </p:txBody>
-      </p:sp>
-      <p:sp>
-        <p:nvSpPr>
-          <p:cNvPr id="14" name="Rounded Rectangle 13"/>
+        </p:spPr>
+      </p:pic>
+      <p:sp>
+        <p:nvSpPr>
+          <p:cNvPr id="10" name="Rounded Rectangle 9"/>
           <p:cNvSpPr/>
           <p:nvPr/>
         </p:nvSpPr>
         <p:spPr>
           <a:xfrm>
-            <a:off x="6473952" y="2560320"/>
-            <a:ext cx="2468880" cy="1371600"/>
-          </a:xfrm>
-          <a:prstGeom prst="roundRect">
-            <a:avLst>
-              <a:gd name="adj" fmla="val 8000"/>
-            </a:avLst>
-          </a:prstGeom>
-          <a:solidFill>
-            <a:srgbClr val="EAF0F8"/>
-          </a:solidFill>
-          <a:ln w="12700">
-            <a:solidFill>
-              <a:srgbClr val="2D6CDF"/>
-            </a:solidFill>
-          </a:ln>
-          <a:effectLst/>
-        </p:spPr>
-        <p:style>
-          <a:lnRef idx="1">
-            <a:schemeClr val="accent1"/>
-          </a:lnRef>
-          <a:fillRef idx="3">
-            <a:schemeClr val="accent1"/>
-          </a:fillRef>
-          <a:effectRef idx="2">
-            <a:schemeClr val="accent1"/>
-          </a:effectRef>
-          <a:fontRef idx="minor">
-            <a:schemeClr val="lt1"/>
-          </a:fontRef>
-        </p:style>
-        <p:txBody>
-          <a:bodyPr rtlCol="0" anchor="ctr" wrap="square" lIns="109728" rIns="109728" tIns="54864" bIns="54864"/>
-          <a:lstStyle/>
-          <a:p>
-            <a:pPr algn="ctr"/>
-          </a:p>
-        </p:txBody>
-      </p:sp>
-      <p:sp>
-        <p:nvSpPr>
-          <p:cNvPr id="15" name="TextBox 14"/>
-          <p:cNvSpPr txBox="1"/>
-          <p:nvPr/>
-        </p:nvSpPr>
-        <p:spPr>
-          <a:xfrm>
-            <a:off x="6583680" y="2633472"/>
-            <a:ext cx="2249424" cy="1225296"/>
-          </a:xfrm>
-          <a:prstGeom prst="rect">
-            <a:avLst/>
-          </a:prstGeom>
-          <a:noFill/>
-        </p:spPr>
-        <p:txBody>
-          <a:bodyPr wrap="square" lIns="0" rIns="0" tIns="0" bIns="0">
-            <a:spAutoFit/>
-          </a:bodyPr>
-          <a:lstStyle/>
-          <a:p>
-            <a:pPr algn="l">
-              <a:lnSpc>
-                <a:spcPct val="112000"/>
-              </a:lnSpc>
-              <a:spcBef>
-                <a:spcPts val="0"/>
-              </a:spcBef>
-              <a:spcAft>
-                <a:spcPts val="200"/>
-              </a:spcAft>
-            </a:pPr>
-            <a:r>
-              <a:rPr sz="1250" b="1" i="0">
-                <a:solidFill>
-                  <a:srgbClr val="2D6CDF"/>
-                </a:solidFill>
-                <a:latin typeface="맑은 고딕"/>
-                <a:ea typeface="맑은 고딕"/>
-                <a:cs typeface="맑은 고딕"/>
-              </a:rPr>
-              <a:t>③ 밤 일기 (reflection)</a:t>
-            </a:r>
-          </a:p>
-          <a:p>
-            <a:pPr algn="l">
-              <a:lnSpc>
-                <a:spcPct val="112000"/>
-              </a:lnSpc>
-              <a:spcBef>
-                <a:spcPts val="0"/>
-              </a:spcBef>
-              <a:spcAft>
-                <a:spcPts val="100"/>
-              </a:spcAft>
-            </a:pPr>
-            <a:r>
-              <a:rPr sz="1100" b="0" i="0">
-                <a:solidFill>
-                  <a:srgbClr val="1F2937"/>
-                </a:solidFill>
-                <a:latin typeface="맑은 고딕"/>
-                <a:ea typeface="맑은 고딕"/>
-                <a:cs typeface="맑은 고딕"/>
-              </a:rPr>
-              <a:t>하루를 일기로 압축 → 다음날의 기억으로</a:t>
-            </a:r>
-          </a:p>
-        </p:txBody>
-      </p:sp>
-      <p:sp>
-        <p:nvSpPr>
-          <p:cNvPr id="16" name="TextBox 15"/>
-          <p:cNvSpPr txBox="1"/>
-          <p:nvPr/>
-        </p:nvSpPr>
-        <p:spPr>
-          <a:xfrm>
-            <a:off x="8961119" y="3063240"/>
-            <a:ext cx="457200" cy="365760"/>
-          </a:xfrm>
-          <a:prstGeom prst="rect">
-            <a:avLst/>
-          </a:prstGeom>
-          <a:noFill/>
-        </p:spPr>
-        <p:txBody>
-          <a:bodyPr wrap="square" lIns="0" rIns="0" tIns="0" bIns="0">
-            <a:spAutoFit/>
-          </a:bodyPr>
-          <a:lstStyle/>
-          <a:p>
-            <a:pPr algn="ctr">
-              <a:lnSpc>
-                <a:spcPct val="112000"/>
-              </a:lnSpc>
-              <a:spcBef>
-                <a:spcPts val="0"/>
-              </a:spcBef>
-              <a:spcAft>
-                <a:spcPts val="0"/>
-              </a:spcAft>
-            </a:pPr>
-            <a:r>
-              <a:rPr sz="1600" b="1" i="0">
-                <a:solidFill>
-                  <a:srgbClr val="6B7280"/>
-                </a:solidFill>
-                <a:latin typeface="맑은 고딕"/>
-                <a:ea typeface="맑은 고딕"/>
-                <a:cs typeface="맑은 고딕"/>
-              </a:rPr>
-              <a:t>→</a:t>
-            </a:r>
-          </a:p>
-        </p:txBody>
-      </p:sp>
-      <p:sp>
-        <p:nvSpPr>
-          <p:cNvPr id="17" name="Rounded Rectangle 16"/>
-          <p:cNvSpPr/>
-          <p:nvPr/>
-        </p:nvSpPr>
-        <p:spPr>
-          <a:xfrm>
-            <a:off x="9436608" y="2560320"/>
-            <a:ext cx="2203704" cy="1371600"/>
+            <a:off x="6355080" y="5349240"/>
+            <a:ext cx="5303520" cy="731520"/>
           </a:xfrm>
           <a:prstGeom prst="roundRect">
             <a:avLst>
@@ -11681,14 +11554,14 @@
       </p:sp>
       <p:sp>
         <p:nvSpPr>
-          <p:cNvPr id="18" name="TextBox 17"/>
+          <p:cNvPr id="11" name="TextBox 10"/>
           <p:cNvSpPr txBox="1"/>
           <p:nvPr/>
         </p:nvSpPr>
         <p:spPr>
           <a:xfrm>
-            <a:off x="9546336" y="2633472"/>
-            <a:ext cx="1984248" cy="1225296"/>
+            <a:off x="6537960" y="5440680"/>
+            <a:ext cx="4937760" cy="566928"/>
           </a:xfrm>
           <a:prstGeom prst="rect">
             <a:avLst/>
@@ -11696,24 +11569,24 @@
           <a:noFill/>
         </p:spPr>
         <p:txBody>
-          <a:bodyPr wrap="square" lIns="0" rIns="0" tIns="0" bIns="0">
+          <a:bodyPr wrap="square" lIns="0" rIns="0" tIns="0" bIns="0" anchor="ctr">
             <a:spAutoFit/>
           </a:bodyPr>
           <a:lstStyle/>
           <a:p>
             <a:pPr algn="l">
               <a:lnSpc>
-                <a:spcPct val="112000"/>
-              </a:lnSpc>
-              <a:spcBef>
-                <a:spcPts val="0"/>
-              </a:spcBef>
-              <a:spcAft>
-                <a:spcPts val="200"/>
-              </a:spcAft>
-            </a:pPr>
-            <a:r>
-              <a:rPr sz="1250" b="1" i="0">
+                <a:spcPct val="120000"/>
+              </a:lnSpc>
+              <a:spcBef>
+                <a:spcPts val="0"/>
+              </a:spcBef>
+              <a:spcAft>
+                <a:spcPts val="0"/>
+              </a:spcAft>
+            </a:pPr>
+            <a:r>
+              <a:rPr sz="1200" b="1" i="0">
                 <a:solidFill>
                   <a:srgbClr val="2E9E6B"/>
                 </a:solidFill>
@@ -11721,23 +11594,10 @@
                 <a:ea typeface="맑은 고딕"/>
                 <a:cs typeface="맑은 고딕"/>
               </a:rPr>
-              <a:t>④ [▶다음날]</a:t>
-            </a:r>
-          </a:p>
-          <a:p>
-            <a:pPr algn="l">
-              <a:lnSpc>
-                <a:spcPct val="112000"/>
-              </a:lnSpc>
-              <a:spcBef>
-                <a:spcPts val="0"/>
-              </a:spcBef>
-              <a:spcAft>
-                <a:spcPts val="100"/>
-              </a:spcAft>
-            </a:pPr>
-            <a:r>
-              <a:rPr sz="1100" b="0" i="0">
+              <a:t>창발 —  </a:t>
+            </a:r>
+            <a:r>
+              <a:rPr sz="1130" b="0" i="0">
                 <a:solidFill>
                   <a:srgbClr val="1F2937"/>
                 </a:solidFill>
@@ -11745,406 +11605,7 @@
                 <a:ea typeface="맑은 고딕"/>
                 <a:cs typeface="맑은 고딕"/>
               </a:rPr>
-              <a:t>며칠이고 이어서 — 전파의 시간 구조</a:t>
-            </a:r>
-          </a:p>
-        </p:txBody>
-      </p:sp>
-      <p:sp>
-        <p:nvSpPr>
-          <p:cNvPr id="19" name="Rounded Rectangle 18"/>
-          <p:cNvSpPr/>
-          <p:nvPr/>
-        </p:nvSpPr>
-        <p:spPr>
-          <a:xfrm>
-            <a:off x="548640" y="4160520"/>
-            <a:ext cx="5394960" cy="1920240"/>
-          </a:xfrm>
-          <a:prstGeom prst="roundRect">
-            <a:avLst>
-              <a:gd name="adj" fmla="val 8000"/>
-            </a:avLst>
-          </a:prstGeom>
-          <a:solidFill>
-            <a:srgbClr val="F4F6FA"/>
-          </a:solidFill>
-          <a:ln w="9525">
-            <a:solidFill>
-              <a:srgbClr val="DDE3EC"/>
-            </a:solidFill>
-          </a:ln>
-          <a:effectLst/>
-        </p:spPr>
-        <p:style>
-          <a:lnRef idx="1">
-            <a:schemeClr val="accent1"/>
-          </a:lnRef>
-          <a:fillRef idx="3">
-            <a:schemeClr val="accent1"/>
-          </a:fillRef>
-          <a:effectRef idx="2">
-            <a:schemeClr val="accent1"/>
-          </a:effectRef>
-          <a:fontRef idx="minor">
-            <a:schemeClr val="lt1"/>
-          </a:fontRef>
-        </p:style>
-        <p:txBody>
-          <a:bodyPr rtlCol="0" anchor="ctr" wrap="square" lIns="109728" rIns="109728" tIns="54864" bIns="54864"/>
-          <a:lstStyle/>
-          <a:p>
-            <a:pPr algn="ctr"/>
-          </a:p>
-        </p:txBody>
-      </p:sp>
-      <p:sp>
-        <p:nvSpPr>
-          <p:cNvPr id="20" name="TextBox 19"/>
-          <p:cNvSpPr txBox="1"/>
-          <p:nvPr/>
-        </p:nvSpPr>
-        <p:spPr>
-          <a:xfrm>
-            <a:off x="777240" y="4315968"/>
-            <a:ext cx="4937760" cy="1645920"/>
-          </a:xfrm>
-          <a:prstGeom prst="rect">
-            <a:avLst/>
-          </a:prstGeom>
-          <a:noFill/>
-        </p:spPr>
-        <p:txBody>
-          <a:bodyPr wrap="square" lIns="0" rIns="0" tIns="0" bIns="0">
-            <a:spAutoFit/>
-          </a:bodyPr>
-          <a:lstStyle/>
-          <a:p>
-            <a:pPr algn="l">
-              <a:lnSpc>
-                <a:spcPct val="112000"/>
-              </a:lnSpc>
-              <a:spcBef>
-                <a:spcPts val="0"/>
-              </a:spcBef>
-              <a:spcAft>
-                <a:spcPts val="600"/>
-              </a:spcAft>
-            </a:pPr>
-            <a:r>
-              <a:rPr sz="1350" b="1" i="0">
-                <a:solidFill>
-                  <a:srgbClr val="1F3A5F"/>
-                </a:solidFill>
-                <a:latin typeface="맑은 고딕"/>
-                <a:ea typeface="맑은 고딕"/>
-                <a:cs typeface="맑은 고딕"/>
-              </a:rPr>
-              <a:t>1일차 실측 (실제 LLM)</a:t>
-            </a:r>
-          </a:p>
-          <a:p>
-            <a:pPr algn="l">
-              <a:lnSpc>
-                <a:spcPct val="118000"/>
-              </a:lnSpc>
-              <a:spcBef>
-                <a:spcPts val="0"/>
-              </a:spcBef>
-              <a:spcAft>
-                <a:spcPts val="500"/>
-              </a:spcAft>
-            </a:pPr>
-            <a:r>
-              <a:rPr sz="1200" b="1" i="0">
-                <a:solidFill>
-                  <a:srgbClr val="2D6CDF"/>
-                </a:solidFill>
-                <a:latin typeface="맑은 고딕"/>
-                <a:ea typeface="맑은 고딕"/>
-                <a:cs typeface="맑은 고딕"/>
-              </a:rPr>
-              <a:t>•  </a:t>
-            </a:r>
-            <a:r>
-              <a:rPr sz="1200" b="1" i="0">
-                <a:solidFill>
-                  <a:srgbClr val="1F2937"/>
-                </a:solidFill>
-                <a:latin typeface="맑은 고딕"/>
-                <a:ea typeface="맑은 고딕"/>
-                <a:cs typeface="맑은 고딕"/>
-              </a:rPr>
-              <a:t>10명 중 8명에게 전파</a:t>
-            </a:r>
-            <a:r>
-              <a:rPr sz="1200" b="0" i="0">
-                <a:solidFill>
-                  <a:srgbClr val="6B7280"/>
-                </a:solidFill>
-                <a:latin typeface="맑은 고딕"/>
-                <a:ea typeface="맑은 고딕"/>
-                <a:cs typeface="맑은 고딕"/>
-              </a:rPr>
-              <a:t> — 카페가 허브 역할</a:t>
-            </a:r>
-          </a:p>
-          <a:p>
-            <a:pPr algn="l">
-              <a:lnSpc>
-                <a:spcPct val="118000"/>
-              </a:lnSpc>
-              <a:spcBef>
-                <a:spcPts val="0"/>
-              </a:spcBef>
-              <a:spcAft>
-                <a:spcPts val="500"/>
-              </a:spcAft>
-            </a:pPr>
-            <a:r>
-              <a:rPr sz="1200" b="1" i="0">
-                <a:solidFill>
-                  <a:srgbClr val="2D6CDF"/>
-                </a:solidFill>
-                <a:latin typeface="맑은 고딕"/>
-                <a:ea typeface="맑은 고딕"/>
-                <a:cs typeface="맑은 고딕"/>
-              </a:rPr>
-              <a:t>•  </a:t>
-            </a:r>
-            <a:r>
-              <a:rPr sz="1200" b="1" i="0">
-                <a:solidFill>
-                  <a:srgbClr val="D9534F"/>
-                </a:solidFill>
-                <a:latin typeface="맑은 고딕"/>
-                <a:ea typeface="맑은 고딕"/>
-                <a:cs typeface="맑은 고딕"/>
-              </a:rPr>
-              <a:t>사각지대 2명</a:t>
-            </a:r>
-            <a:r>
-              <a:rPr sz="1200" b="0" i="0">
-                <a:solidFill>
-                  <a:srgbClr val="6B7280"/>
-                </a:solidFill>
-                <a:latin typeface="맑은 고딕"/>
-                <a:ea typeface="맑은 고딕"/>
-                <a:cs typeface="맑은 고딕"/>
-              </a:rPr>
-              <a:t> — 동선이 겹치지 않은 모자(母子)</a:t>
-            </a:r>
-          </a:p>
-          <a:p>
-            <a:pPr algn="l">
-              <a:lnSpc>
-                <a:spcPct val="118000"/>
-              </a:lnSpc>
-              <a:spcBef>
-                <a:spcPts val="0"/>
-              </a:spcBef>
-              <a:spcAft>
-                <a:spcPts val="500"/>
-              </a:spcAft>
-            </a:pPr>
-            <a:r>
-              <a:rPr sz="1200" b="1" i="0">
-                <a:solidFill>
-                  <a:srgbClr val="2D6CDF"/>
-                </a:solidFill>
-                <a:latin typeface="맑은 고딕"/>
-                <a:ea typeface="맑은 고딕"/>
-                <a:cs typeface="맑은 고딕"/>
-              </a:rPr>
-              <a:t>•  </a:t>
-            </a:r>
-            <a:r>
-              <a:rPr sz="1200" b="1" i="0">
-                <a:solidFill>
-                  <a:srgbClr val="2E9E6B"/>
-                </a:solidFill>
-                <a:latin typeface="맑은 고딕"/>
-                <a:ea typeface="맑은 고딕"/>
-                <a:cs typeface="맑은 고딕"/>
-              </a:rPr>
-              <a:t>근거 없는 인지 누수 0</a:t>
-            </a:r>
-            <a:r>
-              <a:rPr sz="1200" b="0" i="0">
-                <a:solidFill>
-                  <a:srgbClr val="6B7280"/>
-                </a:solidFill>
-                <a:latin typeface="맑은 고딕"/>
-                <a:ea typeface="맑은 고딕"/>
-                <a:cs typeface="맑은 고딕"/>
-              </a:rPr>
-              <a:t> — 전파 게이트가 코드로 보증</a:t>
-            </a:r>
-          </a:p>
-        </p:txBody>
-      </p:sp>
-      <p:sp>
-        <p:nvSpPr>
-          <p:cNvPr id="21" name="Rounded Rectangle 20"/>
-          <p:cNvSpPr/>
-          <p:nvPr/>
-        </p:nvSpPr>
-        <p:spPr>
-          <a:xfrm>
-            <a:off x="6245352" y="4160520"/>
-            <a:ext cx="5394960" cy="1920240"/>
-          </a:xfrm>
-          <a:prstGeom prst="roundRect">
-            <a:avLst>
-              <a:gd name="adj" fmla="val 8000"/>
-            </a:avLst>
-          </a:prstGeom>
-          <a:solidFill>
-            <a:srgbClr val="EAF6F0"/>
-          </a:solidFill>
-          <a:ln w="12700">
-            <a:solidFill>
-              <a:srgbClr val="2E9E6B"/>
-            </a:solidFill>
-          </a:ln>
-          <a:effectLst/>
-        </p:spPr>
-        <p:style>
-          <a:lnRef idx="1">
-            <a:schemeClr val="accent1"/>
-          </a:lnRef>
-          <a:fillRef idx="3">
-            <a:schemeClr val="accent1"/>
-          </a:fillRef>
-          <a:effectRef idx="2">
-            <a:schemeClr val="accent1"/>
-          </a:effectRef>
-          <a:fontRef idx="minor">
-            <a:schemeClr val="lt1"/>
-          </a:fontRef>
-        </p:style>
-        <p:txBody>
-          <a:bodyPr rtlCol="0" anchor="ctr" wrap="square" lIns="109728" rIns="109728" tIns="54864" bIns="54864"/>
-          <a:lstStyle/>
-          <a:p>
-            <a:pPr algn="ctr"/>
-          </a:p>
-        </p:txBody>
-      </p:sp>
-      <p:sp>
-        <p:nvSpPr>
-          <p:cNvPr id="22" name="TextBox 21"/>
-          <p:cNvSpPr txBox="1"/>
-          <p:nvPr/>
-        </p:nvSpPr>
-        <p:spPr>
-          <a:xfrm>
-            <a:off x="6473952" y="4315968"/>
-            <a:ext cx="4937760" cy="1645920"/>
-          </a:xfrm>
-          <a:prstGeom prst="rect">
-            <a:avLst/>
-          </a:prstGeom>
-          <a:noFill/>
-        </p:spPr>
-        <p:txBody>
-          <a:bodyPr wrap="square" lIns="0" rIns="0" tIns="0" bIns="0">
-            <a:spAutoFit/>
-          </a:bodyPr>
-          <a:lstStyle/>
-          <a:p>
-            <a:pPr algn="l">
-              <a:lnSpc>
-                <a:spcPct val="112000"/>
-              </a:lnSpc>
-              <a:spcBef>
-                <a:spcPts val="0"/>
-              </a:spcBef>
-              <a:spcAft>
-                <a:spcPts val="600"/>
-              </a:spcAft>
-            </a:pPr>
-            <a:r>
-              <a:rPr sz="1350" b="1" i="0">
-                <a:solidFill>
-                  <a:srgbClr val="2E9E6B"/>
-                </a:solidFill>
-                <a:latin typeface="맑은 고딕"/>
-                <a:ea typeface="맑은 고딕"/>
-                <a:cs typeface="맑은 고딕"/>
-              </a:rPr>
-              <a:t>폐기했던 ‘전파’가 정당하게 부활</a:t>
-            </a:r>
-          </a:p>
-          <a:p>
-            <a:pPr algn="l">
-              <a:lnSpc>
-                <a:spcPct val="130000"/>
-              </a:lnSpc>
-              <a:spcBef>
-                <a:spcPts val="0"/>
-              </a:spcBef>
-              <a:spcAft>
-                <a:spcPts val="0"/>
-              </a:spcAft>
-            </a:pPr>
-            <a:r>
-              <a:rPr sz="1200" b="0" i="0">
-                <a:solidFill>
-                  <a:srgbClr val="1F2937"/>
-                </a:solidFill>
-                <a:latin typeface="맑은 고딕"/>
-                <a:ea typeface="맑은 고딕"/>
-                <a:cs typeface="맑은 고딕"/>
-              </a:rPr>
-              <a:t>축 A의 전파 그래프는 ‘서로 모르는 통계 샘플’이라 버렸다(03장). 미리마을은 서로 아는 고정 캐스트 — 여기서의 전파는 연출이 아니라 관계와 동선의 결과다.</a:t>
-            </a:r>
-          </a:p>
-        </p:txBody>
-      </p:sp>
-      <p:sp>
-        <p:nvSpPr>
-          <p:cNvPr id="23" name="TextBox 22"/>
-          <p:cNvSpPr txBox="1"/>
-          <p:nvPr/>
-        </p:nvSpPr>
-        <p:spPr>
-          <a:xfrm>
-            <a:off x="548640" y="6144768"/>
-            <a:ext cx="11091672" cy="329184"/>
-          </a:xfrm>
-          <a:prstGeom prst="rect">
-            <a:avLst/>
-          </a:prstGeom>
-          <a:noFill/>
-        </p:spPr>
-        <p:txBody>
-          <a:bodyPr wrap="square" lIns="0" rIns="0" tIns="0" bIns="0">
-            <a:spAutoFit/>
-          </a:bodyPr>
-          <a:lstStyle/>
-          <a:p>
-            <a:pPr algn="ctr">
-              <a:lnSpc>
-                <a:spcPct val="112000"/>
-              </a:lnSpc>
-              <a:spcBef>
-                <a:spcPts val="0"/>
-              </a:spcBef>
-              <a:spcAft>
-                <a:spcPts val="0"/>
-              </a:spcAft>
-            </a:pPr>
-            <a:r>
-              <a:rPr sz="1250" b="1" i="0">
-                <a:solidFill>
-                  <a:srgbClr val="D9534F"/>
-                </a:solidFill>
-                <a:latin typeface="맑은 고딕"/>
-                <a:ea typeface="맑은 고딕"/>
-                <a:cs typeface="맑은 고딕"/>
-              </a:rPr>
-              <a:t>🎬 여기서 라이브 데모 — 미리마을 재생 60~90초 (재생은 LLM 0콜 = 네트워크가 죽어도 안전)</a:t>
+              <a:t>시키지 않았는데 — 민수·수아가 광장 산책을 약속하고, 같은 카페 사장이 세 손님과 ‘각자의 하루’로 다른 대화를 한다</a:t>
             </a:r>
           </a:p>
         </p:txBody>
@@ -12184,7 +11645,7 @@
             </a:avLst>
           </a:prstGeom>
           <a:solidFill>
-            <a:srgbClr val="6B7280"/>
+            <a:srgbClr val="D9534F"/>
           </a:solidFill>
           <a:ln>
             <a:noFill/>
@@ -12229,7 +11690,7 @@
                 <a:ea typeface="맑은 고딕"/>
                 <a:cs typeface="맑은 고딕"/>
               </a:rPr>
-              <a:t>06 마무리</a:t>
+              <a:t>05 확장</a:t>
             </a:r>
           </a:p>
         </p:txBody>
@@ -12276,7 +11737,7 @@
                 <a:ea typeface="맑은 고딕"/>
                 <a:cs typeface="맑은 고딕"/>
               </a:rPr>
-              <a:t>4일 · 4명 — 서로를 깨지 않기 위한 규율</a:t>
+              <a:t>미리마을 × 정책 — 소식은 누구에게, 어떤 경로로 닿는가</a:t>
             </a:r>
           </a:p>
         </p:txBody>
@@ -12394,8 +11855,731 @@
         </p:nvSpPr>
         <p:spPr>
           <a:xfrm>
-            <a:off x="548640" y="1691640"/>
-            <a:ext cx="5394960" cy="1234440"/>
+            <a:off x="548640" y="1600200"/>
+            <a:ext cx="11091672" cy="731520"/>
+          </a:xfrm>
+          <a:prstGeom prst="roundRect">
+            <a:avLst>
+              <a:gd name="adj" fmla="val 8000"/>
+            </a:avLst>
+          </a:prstGeom>
+          <a:solidFill>
+            <a:srgbClr val="EAF0F8"/>
+          </a:solidFill>
+          <a:ln w="12700">
+            <a:solidFill>
+              <a:srgbClr val="1F3A5F"/>
+            </a:solidFill>
+          </a:ln>
+          <a:effectLst/>
+        </p:spPr>
+        <p:style>
+          <a:lnRef idx="1">
+            <a:schemeClr val="accent1"/>
+          </a:lnRef>
+          <a:fillRef idx="3">
+            <a:schemeClr val="accent1"/>
+          </a:fillRef>
+          <a:effectRef idx="2">
+            <a:schemeClr val="accent1"/>
+          </a:effectRef>
+          <a:fontRef idx="minor">
+            <a:schemeClr val="lt1"/>
+          </a:fontRef>
+        </p:style>
+        <p:txBody>
+          <a:bodyPr rtlCol="0" anchor="ctr" wrap="square" lIns="109728" rIns="109728" tIns="54864" bIns="54864"/>
+          <a:lstStyle/>
+          <a:p>
+            <a:pPr algn="ctr"/>
+          </a:p>
+        </p:txBody>
+      </p:sp>
+      <p:sp>
+        <p:nvSpPr>
+          <p:cNvPr id="7" name="TextBox 6"/>
+          <p:cNvSpPr txBox="1"/>
+          <p:nvPr/>
+        </p:nvSpPr>
+        <p:spPr>
+          <a:xfrm>
+            <a:off x="868680" y="1719072"/>
+            <a:ext cx="10515600" cy="530352"/>
+          </a:xfrm>
+          <a:prstGeom prst="rect">
+            <a:avLst/>
+          </a:prstGeom>
+          <a:noFill/>
+        </p:spPr>
+        <p:txBody>
+          <a:bodyPr wrap="square" lIns="0" rIns="0" tIns="0" bIns="0" anchor="ctr">
+            <a:spAutoFit/>
+          </a:bodyPr>
+          <a:lstStyle/>
+          <a:p>
+            <a:pPr algn="ctr">
+              <a:lnSpc>
+                <a:spcPct val="112000"/>
+              </a:lnSpc>
+              <a:spcBef>
+                <a:spcPts val="0"/>
+              </a:spcBef>
+              <a:spcAft>
+                <a:spcPts val="0"/>
+              </a:spcAft>
+            </a:pPr>
+            <a:r>
+              <a:rPr sz="1450" b="0" i="0">
+                <a:solidFill>
+                  <a:srgbClr val="1F2937"/>
+                </a:solidFill>
+                <a:latin typeface="맑은 고딕"/>
+                <a:ea typeface="맑은 고딕"/>
+                <a:cs typeface="맑은 고딕"/>
+              </a:rPr>
+              <a:t>질문의 전환:  “정책이 각자에게 어떤 효과인가”  →  </a:t>
+            </a:r>
+            <a:r>
+              <a:rPr sz="1450" b="1" i="0">
+                <a:solidFill>
+                  <a:srgbClr val="1F3A5F"/>
+                </a:solidFill>
+                <a:latin typeface="맑은 고딕"/>
+                <a:ea typeface="맑은 고딕"/>
+                <a:cs typeface="맑은 고딕"/>
+              </a:rPr>
+              <a:t>“정책 ‘소식’이 누구에게 · 어떤 경로로 닿는가”</a:t>
+            </a:r>
+          </a:p>
+        </p:txBody>
+      </p:sp>
+      <p:sp>
+        <p:nvSpPr>
+          <p:cNvPr id="8" name="Rounded Rectangle 7"/>
+          <p:cNvSpPr/>
+          <p:nvPr/>
+        </p:nvSpPr>
+        <p:spPr>
+          <a:xfrm>
+            <a:off x="548640" y="2560320"/>
+            <a:ext cx="2468880" cy="1371600"/>
+          </a:xfrm>
+          <a:prstGeom prst="roundRect">
+            <a:avLst>
+              <a:gd name="adj" fmla="val 8000"/>
+            </a:avLst>
+          </a:prstGeom>
+          <a:solidFill>
+            <a:srgbClr val="FCECEB"/>
+          </a:solidFill>
+          <a:ln w="12700">
+            <a:solidFill>
+              <a:srgbClr val="D9534F"/>
+            </a:solidFill>
+          </a:ln>
+          <a:effectLst/>
+        </p:spPr>
+        <p:style>
+          <a:lnRef idx="1">
+            <a:schemeClr val="accent1"/>
+          </a:lnRef>
+          <a:fillRef idx="3">
+            <a:schemeClr val="accent1"/>
+          </a:fillRef>
+          <a:effectRef idx="2">
+            <a:schemeClr val="accent1"/>
+          </a:effectRef>
+          <a:fontRef idx="minor">
+            <a:schemeClr val="lt1"/>
+          </a:fontRef>
+        </p:style>
+        <p:txBody>
+          <a:bodyPr rtlCol="0" anchor="ctr" wrap="square" lIns="109728" rIns="109728" tIns="54864" bIns="54864"/>
+          <a:lstStyle/>
+          <a:p>
+            <a:pPr algn="ctr"/>
+          </a:p>
+        </p:txBody>
+      </p:sp>
+      <p:sp>
+        <p:nvSpPr>
+          <p:cNvPr id="9" name="TextBox 8"/>
+          <p:cNvSpPr txBox="1"/>
+          <p:nvPr/>
+        </p:nvSpPr>
+        <p:spPr>
+          <a:xfrm>
+            <a:off x="658368" y="2633472"/>
+            <a:ext cx="2249424" cy="1225296"/>
+          </a:xfrm>
+          <a:prstGeom prst="rect">
+            <a:avLst/>
+          </a:prstGeom>
+          <a:noFill/>
+        </p:spPr>
+        <p:txBody>
+          <a:bodyPr wrap="square" lIns="0" rIns="0" tIns="0" bIns="0">
+            <a:spAutoFit/>
+          </a:bodyPr>
+          <a:lstStyle/>
+          <a:p>
+            <a:pPr algn="l">
+              <a:lnSpc>
+                <a:spcPct val="112000"/>
+              </a:lnSpc>
+              <a:spcBef>
+                <a:spcPts val="0"/>
+              </a:spcBef>
+              <a:spcAft>
+                <a:spcPts val="200"/>
+              </a:spcAft>
+            </a:pPr>
+            <a:r>
+              <a:rPr sz="1250" b="1" i="0">
+                <a:solidFill>
+                  <a:srgbClr val="D9534F"/>
+                </a:solidFill>
+                <a:latin typeface="맑은 고딕"/>
+                <a:ea typeface="맑은 고딕"/>
+                <a:cs typeface="맑은 고딕"/>
+              </a:rPr>
+              <a:t>① 시드 주입</a:t>
+            </a:r>
+          </a:p>
+          <a:p>
+            <a:pPr algn="l">
+              <a:lnSpc>
+                <a:spcPct val="112000"/>
+              </a:lnSpc>
+              <a:spcBef>
+                <a:spcPts val="0"/>
+              </a:spcBef>
+              <a:spcAft>
+                <a:spcPts val="100"/>
+              </a:spcAft>
+            </a:pPr>
+            <a:r>
+              <a:rPr sz="1100" b="0" i="0">
+                <a:solidFill>
+                  <a:srgbClr val="1F2937"/>
+                </a:solidFill>
+                <a:latin typeface="맑은 고딕"/>
+                <a:ea typeface="맑은 고딕"/>
+                <a:cs typeface="맑은 고딕"/>
+              </a:rPr>
+              <a:t>복지관 어르신 2명만 정책을 알고 시작</a:t>
+            </a:r>
+          </a:p>
+        </p:txBody>
+      </p:sp>
+      <p:sp>
+        <p:nvSpPr>
+          <p:cNvPr id="10" name="TextBox 9"/>
+          <p:cNvSpPr txBox="1"/>
+          <p:nvPr/>
+        </p:nvSpPr>
+        <p:spPr>
+          <a:xfrm>
+            <a:off x="3035808" y="3063240"/>
+            <a:ext cx="457200" cy="365760"/>
+          </a:xfrm>
+          <a:prstGeom prst="rect">
+            <a:avLst/>
+          </a:prstGeom>
+          <a:noFill/>
+        </p:spPr>
+        <p:txBody>
+          <a:bodyPr wrap="square" lIns="0" rIns="0" tIns="0" bIns="0">
+            <a:spAutoFit/>
+          </a:bodyPr>
+          <a:lstStyle/>
+          <a:p>
+            <a:pPr algn="ctr">
+              <a:lnSpc>
+                <a:spcPct val="112000"/>
+              </a:lnSpc>
+              <a:spcBef>
+                <a:spcPts val="0"/>
+              </a:spcBef>
+              <a:spcAft>
+                <a:spcPts val="0"/>
+              </a:spcAft>
+            </a:pPr>
+            <a:r>
+              <a:rPr sz="1600" b="1" i="0">
+                <a:solidFill>
+                  <a:srgbClr val="6B7280"/>
+                </a:solidFill>
+                <a:latin typeface="맑은 고딕"/>
+                <a:ea typeface="맑은 고딕"/>
+                <a:cs typeface="맑은 고딕"/>
+              </a:rPr>
+              <a:t>→</a:t>
+            </a:r>
+          </a:p>
+        </p:txBody>
+      </p:sp>
+      <p:sp>
+        <p:nvSpPr>
+          <p:cNvPr id="11" name="Rounded Rectangle 10"/>
+          <p:cNvSpPr/>
+          <p:nvPr/>
+        </p:nvSpPr>
+        <p:spPr>
+          <a:xfrm>
+            <a:off x="3511296" y="2560320"/>
+            <a:ext cx="2468880" cy="1371600"/>
+          </a:xfrm>
+          <a:prstGeom prst="roundRect">
+            <a:avLst>
+              <a:gd name="adj" fmla="val 8000"/>
+            </a:avLst>
+          </a:prstGeom>
+          <a:solidFill>
+            <a:srgbClr val="FDF3E4"/>
+          </a:solidFill>
+          <a:ln w="12700">
+            <a:solidFill>
+              <a:srgbClr val="E8902A"/>
+            </a:solidFill>
+          </a:ln>
+          <a:effectLst/>
+        </p:spPr>
+        <p:style>
+          <a:lnRef idx="1">
+            <a:schemeClr val="accent1"/>
+          </a:lnRef>
+          <a:fillRef idx="3">
+            <a:schemeClr val="accent1"/>
+          </a:fillRef>
+          <a:effectRef idx="2">
+            <a:schemeClr val="accent1"/>
+          </a:effectRef>
+          <a:fontRef idx="minor">
+            <a:schemeClr val="lt1"/>
+          </a:fontRef>
+        </p:style>
+        <p:txBody>
+          <a:bodyPr rtlCol="0" anchor="ctr" wrap="square" lIns="109728" rIns="109728" tIns="54864" bIns="54864"/>
+          <a:lstStyle/>
+          <a:p>
+            <a:pPr algn="ctr"/>
+          </a:p>
+        </p:txBody>
+      </p:sp>
+      <p:sp>
+        <p:nvSpPr>
+          <p:cNvPr id="12" name="TextBox 11"/>
+          <p:cNvSpPr txBox="1"/>
+          <p:nvPr/>
+        </p:nvSpPr>
+        <p:spPr>
+          <a:xfrm>
+            <a:off x="3621024" y="2633472"/>
+            <a:ext cx="2249424" cy="1225296"/>
+          </a:xfrm>
+          <a:prstGeom prst="rect">
+            <a:avLst/>
+          </a:prstGeom>
+          <a:noFill/>
+        </p:spPr>
+        <p:txBody>
+          <a:bodyPr wrap="square" lIns="0" rIns="0" tIns="0" bIns="0">
+            <a:spAutoFit/>
+          </a:bodyPr>
+          <a:lstStyle/>
+          <a:p>
+            <a:pPr algn="l">
+              <a:lnSpc>
+                <a:spcPct val="112000"/>
+              </a:lnSpc>
+              <a:spcBef>
+                <a:spcPts val="0"/>
+              </a:spcBef>
+              <a:spcAft>
+                <a:spcPts val="200"/>
+              </a:spcAft>
+            </a:pPr>
+            <a:r>
+              <a:rPr sz="1250" b="1" i="0">
+                <a:solidFill>
+                  <a:srgbClr val="E8902A"/>
+                </a:solidFill>
+                <a:latin typeface="맑은 고딕"/>
+                <a:ea typeface="맑은 고딕"/>
+                <a:cs typeface="맑은 고딕"/>
+              </a:rPr>
+              <a:t>② 만남 전파</a:t>
+            </a:r>
+          </a:p>
+          <a:p>
+            <a:pPr algn="l">
+              <a:lnSpc>
+                <a:spcPct val="112000"/>
+              </a:lnSpc>
+              <a:spcBef>
+                <a:spcPts val="0"/>
+              </a:spcBef>
+              <a:spcAft>
+                <a:spcPts val="100"/>
+              </a:spcAft>
+            </a:pPr>
+            <a:r>
+              <a:rPr sz="1100" b="0" i="0">
+                <a:solidFill>
+                  <a:srgbClr val="1F2937"/>
+                </a:solidFill>
+                <a:latin typeface="맑은 고딕"/>
+                <a:ea typeface="맑은 고딕"/>
+                <a:cs typeface="맑은 고딕"/>
+              </a:rPr>
+              <a:t>스케줄대로 살다 마주친 대화에서 소식이 옮음</a:t>
+            </a:r>
+          </a:p>
+        </p:txBody>
+      </p:sp>
+      <p:sp>
+        <p:nvSpPr>
+          <p:cNvPr id="13" name="TextBox 12"/>
+          <p:cNvSpPr txBox="1"/>
+          <p:nvPr/>
+        </p:nvSpPr>
+        <p:spPr>
+          <a:xfrm>
+            <a:off x="5998464" y="3063240"/>
+            <a:ext cx="457200" cy="365760"/>
+          </a:xfrm>
+          <a:prstGeom prst="rect">
+            <a:avLst/>
+          </a:prstGeom>
+          <a:noFill/>
+        </p:spPr>
+        <p:txBody>
+          <a:bodyPr wrap="square" lIns="0" rIns="0" tIns="0" bIns="0">
+            <a:spAutoFit/>
+          </a:bodyPr>
+          <a:lstStyle/>
+          <a:p>
+            <a:pPr algn="ctr">
+              <a:lnSpc>
+                <a:spcPct val="112000"/>
+              </a:lnSpc>
+              <a:spcBef>
+                <a:spcPts val="0"/>
+              </a:spcBef>
+              <a:spcAft>
+                <a:spcPts val="0"/>
+              </a:spcAft>
+            </a:pPr>
+            <a:r>
+              <a:rPr sz="1600" b="1" i="0">
+                <a:solidFill>
+                  <a:srgbClr val="6B7280"/>
+                </a:solidFill>
+                <a:latin typeface="맑은 고딕"/>
+                <a:ea typeface="맑은 고딕"/>
+                <a:cs typeface="맑은 고딕"/>
+              </a:rPr>
+              <a:t>→</a:t>
+            </a:r>
+          </a:p>
+        </p:txBody>
+      </p:sp>
+      <p:sp>
+        <p:nvSpPr>
+          <p:cNvPr id="14" name="Rounded Rectangle 13"/>
+          <p:cNvSpPr/>
+          <p:nvPr/>
+        </p:nvSpPr>
+        <p:spPr>
+          <a:xfrm>
+            <a:off x="6473952" y="2560320"/>
+            <a:ext cx="2468880" cy="1371600"/>
+          </a:xfrm>
+          <a:prstGeom prst="roundRect">
+            <a:avLst>
+              <a:gd name="adj" fmla="val 8000"/>
+            </a:avLst>
+          </a:prstGeom>
+          <a:solidFill>
+            <a:srgbClr val="EAF0F8"/>
+          </a:solidFill>
+          <a:ln w="12700">
+            <a:solidFill>
+              <a:srgbClr val="2D6CDF"/>
+            </a:solidFill>
+          </a:ln>
+          <a:effectLst/>
+        </p:spPr>
+        <p:style>
+          <a:lnRef idx="1">
+            <a:schemeClr val="accent1"/>
+          </a:lnRef>
+          <a:fillRef idx="3">
+            <a:schemeClr val="accent1"/>
+          </a:fillRef>
+          <a:effectRef idx="2">
+            <a:schemeClr val="accent1"/>
+          </a:effectRef>
+          <a:fontRef idx="minor">
+            <a:schemeClr val="lt1"/>
+          </a:fontRef>
+        </p:style>
+        <p:txBody>
+          <a:bodyPr rtlCol="0" anchor="ctr" wrap="square" lIns="109728" rIns="109728" tIns="54864" bIns="54864"/>
+          <a:lstStyle/>
+          <a:p>
+            <a:pPr algn="ctr"/>
+          </a:p>
+        </p:txBody>
+      </p:sp>
+      <p:sp>
+        <p:nvSpPr>
+          <p:cNvPr id="15" name="TextBox 14"/>
+          <p:cNvSpPr txBox="1"/>
+          <p:nvPr/>
+        </p:nvSpPr>
+        <p:spPr>
+          <a:xfrm>
+            <a:off x="6583680" y="2633472"/>
+            <a:ext cx="2249424" cy="1225296"/>
+          </a:xfrm>
+          <a:prstGeom prst="rect">
+            <a:avLst/>
+          </a:prstGeom>
+          <a:noFill/>
+        </p:spPr>
+        <p:txBody>
+          <a:bodyPr wrap="square" lIns="0" rIns="0" tIns="0" bIns="0">
+            <a:spAutoFit/>
+          </a:bodyPr>
+          <a:lstStyle/>
+          <a:p>
+            <a:pPr algn="l">
+              <a:lnSpc>
+                <a:spcPct val="112000"/>
+              </a:lnSpc>
+              <a:spcBef>
+                <a:spcPts val="0"/>
+              </a:spcBef>
+              <a:spcAft>
+                <a:spcPts val="200"/>
+              </a:spcAft>
+            </a:pPr>
+            <a:r>
+              <a:rPr sz="1250" b="1" i="0">
+                <a:solidFill>
+                  <a:srgbClr val="2D6CDF"/>
+                </a:solidFill>
+                <a:latin typeface="맑은 고딕"/>
+                <a:ea typeface="맑은 고딕"/>
+                <a:cs typeface="맑은 고딕"/>
+              </a:rPr>
+              <a:t>③ 밤 일기 (reflection)</a:t>
+            </a:r>
+          </a:p>
+          <a:p>
+            <a:pPr algn="l">
+              <a:lnSpc>
+                <a:spcPct val="112000"/>
+              </a:lnSpc>
+              <a:spcBef>
+                <a:spcPts val="0"/>
+              </a:spcBef>
+              <a:spcAft>
+                <a:spcPts val="100"/>
+              </a:spcAft>
+            </a:pPr>
+            <a:r>
+              <a:rPr sz="1100" b="0" i="0">
+                <a:solidFill>
+                  <a:srgbClr val="1F2937"/>
+                </a:solidFill>
+                <a:latin typeface="맑은 고딕"/>
+                <a:ea typeface="맑은 고딕"/>
+                <a:cs typeface="맑은 고딕"/>
+              </a:rPr>
+              <a:t>하루를 일기로 압축 → 다음날의 기억으로</a:t>
+            </a:r>
+          </a:p>
+        </p:txBody>
+      </p:sp>
+      <p:sp>
+        <p:nvSpPr>
+          <p:cNvPr id="16" name="TextBox 15"/>
+          <p:cNvSpPr txBox="1"/>
+          <p:nvPr/>
+        </p:nvSpPr>
+        <p:spPr>
+          <a:xfrm>
+            <a:off x="8961119" y="3063240"/>
+            <a:ext cx="457200" cy="365760"/>
+          </a:xfrm>
+          <a:prstGeom prst="rect">
+            <a:avLst/>
+          </a:prstGeom>
+          <a:noFill/>
+        </p:spPr>
+        <p:txBody>
+          <a:bodyPr wrap="square" lIns="0" rIns="0" tIns="0" bIns="0">
+            <a:spAutoFit/>
+          </a:bodyPr>
+          <a:lstStyle/>
+          <a:p>
+            <a:pPr algn="ctr">
+              <a:lnSpc>
+                <a:spcPct val="112000"/>
+              </a:lnSpc>
+              <a:spcBef>
+                <a:spcPts val="0"/>
+              </a:spcBef>
+              <a:spcAft>
+                <a:spcPts val="0"/>
+              </a:spcAft>
+            </a:pPr>
+            <a:r>
+              <a:rPr sz="1600" b="1" i="0">
+                <a:solidFill>
+                  <a:srgbClr val="6B7280"/>
+                </a:solidFill>
+                <a:latin typeface="맑은 고딕"/>
+                <a:ea typeface="맑은 고딕"/>
+                <a:cs typeface="맑은 고딕"/>
+              </a:rPr>
+              <a:t>→</a:t>
+            </a:r>
+          </a:p>
+        </p:txBody>
+      </p:sp>
+      <p:sp>
+        <p:nvSpPr>
+          <p:cNvPr id="17" name="Rounded Rectangle 16"/>
+          <p:cNvSpPr/>
+          <p:nvPr/>
+        </p:nvSpPr>
+        <p:spPr>
+          <a:xfrm>
+            <a:off x="9436608" y="2560320"/>
+            <a:ext cx="2203704" cy="1371600"/>
+          </a:xfrm>
+          <a:prstGeom prst="roundRect">
+            <a:avLst>
+              <a:gd name="adj" fmla="val 8000"/>
+            </a:avLst>
+          </a:prstGeom>
+          <a:solidFill>
+            <a:srgbClr val="EAF6F0"/>
+          </a:solidFill>
+          <a:ln w="12700">
+            <a:solidFill>
+              <a:srgbClr val="2E9E6B"/>
+            </a:solidFill>
+          </a:ln>
+          <a:effectLst/>
+        </p:spPr>
+        <p:style>
+          <a:lnRef idx="1">
+            <a:schemeClr val="accent1"/>
+          </a:lnRef>
+          <a:fillRef idx="3">
+            <a:schemeClr val="accent1"/>
+          </a:fillRef>
+          <a:effectRef idx="2">
+            <a:schemeClr val="accent1"/>
+          </a:effectRef>
+          <a:fontRef idx="minor">
+            <a:schemeClr val="lt1"/>
+          </a:fontRef>
+        </p:style>
+        <p:txBody>
+          <a:bodyPr rtlCol="0" anchor="ctr" wrap="square" lIns="109728" rIns="109728" tIns="54864" bIns="54864"/>
+          <a:lstStyle/>
+          <a:p>
+            <a:pPr algn="ctr"/>
+          </a:p>
+        </p:txBody>
+      </p:sp>
+      <p:sp>
+        <p:nvSpPr>
+          <p:cNvPr id="18" name="TextBox 17"/>
+          <p:cNvSpPr txBox="1"/>
+          <p:nvPr/>
+        </p:nvSpPr>
+        <p:spPr>
+          <a:xfrm>
+            <a:off x="9546336" y="2633472"/>
+            <a:ext cx="1984248" cy="1225296"/>
+          </a:xfrm>
+          <a:prstGeom prst="rect">
+            <a:avLst/>
+          </a:prstGeom>
+          <a:noFill/>
+        </p:spPr>
+        <p:txBody>
+          <a:bodyPr wrap="square" lIns="0" rIns="0" tIns="0" bIns="0">
+            <a:spAutoFit/>
+          </a:bodyPr>
+          <a:lstStyle/>
+          <a:p>
+            <a:pPr algn="l">
+              <a:lnSpc>
+                <a:spcPct val="112000"/>
+              </a:lnSpc>
+              <a:spcBef>
+                <a:spcPts val="0"/>
+              </a:spcBef>
+              <a:spcAft>
+                <a:spcPts val="200"/>
+              </a:spcAft>
+            </a:pPr>
+            <a:r>
+              <a:rPr sz="1250" b="1" i="0">
+                <a:solidFill>
+                  <a:srgbClr val="2E9E6B"/>
+                </a:solidFill>
+                <a:latin typeface="맑은 고딕"/>
+                <a:ea typeface="맑은 고딕"/>
+                <a:cs typeface="맑은 고딕"/>
+              </a:rPr>
+              <a:t>④ [▶다음날]</a:t>
+            </a:r>
+          </a:p>
+          <a:p>
+            <a:pPr algn="l">
+              <a:lnSpc>
+                <a:spcPct val="112000"/>
+              </a:lnSpc>
+              <a:spcBef>
+                <a:spcPts val="0"/>
+              </a:spcBef>
+              <a:spcAft>
+                <a:spcPts val="100"/>
+              </a:spcAft>
+            </a:pPr>
+            <a:r>
+              <a:rPr sz="1100" b="0" i="0">
+                <a:solidFill>
+                  <a:srgbClr val="1F2937"/>
+                </a:solidFill>
+                <a:latin typeface="맑은 고딕"/>
+                <a:ea typeface="맑은 고딕"/>
+                <a:cs typeface="맑은 고딕"/>
+              </a:rPr>
+              <a:t>며칠이고 이어서 — 전파의 시간 구조</a:t>
+            </a:r>
+          </a:p>
+        </p:txBody>
+      </p:sp>
+      <p:sp>
+        <p:nvSpPr>
+          <p:cNvPr id="19" name="Rounded Rectangle 18"/>
+          <p:cNvSpPr/>
+          <p:nvPr/>
+        </p:nvSpPr>
+        <p:spPr>
+          <a:xfrm>
+            <a:off x="548640" y="4160520"/>
+            <a:ext cx="5394960" cy="1920240"/>
           </a:xfrm>
           <a:prstGeom prst="roundRect">
             <a:avLst>
@@ -12436,14 +12620,14 @@
       </p:sp>
       <p:sp>
         <p:nvSpPr>
-          <p:cNvPr id="7" name="TextBox 6"/>
+          <p:cNvPr id="20" name="TextBox 19"/>
           <p:cNvSpPr txBox="1"/>
           <p:nvPr/>
         </p:nvSpPr>
         <p:spPr>
           <a:xfrm>
-            <a:off x="749808" y="1810512"/>
-            <a:ext cx="5029200" cy="1005840"/>
+            <a:off x="777240" y="4315968"/>
+            <a:ext cx="4937760" cy="1645920"/>
           </a:xfrm>
           <a:prstGeom prst="rect">
             <a:avLst/>
@@ -12464,7 +12648,7 @@
                 <a:spcPts val="0"/>
               </a:spcBef>
               <a:spcAft>
-                <a:spcPts val="300"/>
+                <a:spcPts val="600"/>
               </a:spcAft>
             </a:pPr>
             <a:r>
@@ -12476,23 +12660,34 @@
                 <a:ea typeface="맑은 고딕"/>
                 <a:cs typeface="맑은 고딕"/>
               </a:rPr>
-              <a:t>state.py = 팀 계약</a:t>
-            </a:r>
-          </a:p>
-          <a:p>
-            <a:pPr algn="l">
-              <a:lnSpc>
-                <a:spcPct val="120000"/>
-              </a:lnSpc>
-              <a:spcBef>
-                <a:spcPts val="0"/>
-              </a:spcBef>
-              <a:spcAft>
-                <a:spcPts val="0"/>
-              </a:spcAft>
-            </a:pPr>
-            <a:r>
-              <a:rPr sz="1100" b="0" i="0">
+              <a:t>1일차 실측 (실제 LLM)</a:t>
+            </a:r>
+          </a:p>
+          <a:p>
+            <a:pPr algn="l">
+              <a:lnSpc>
+                <a:spcPct val="118000"/>
+              </a:lnSpc>
+              <a:spcBef>
+                <a:spcPts val="0"/>
+              </a:spcBef>
+              <a:spcAft>
+                <a:spcPts val="500"/>
+              </a:spcAft>
+            </a:pPr>
+            <a:r>
+              <a:rPr sz="1200" b="1" i="0">
+                <a:solidFill>
+                  <a:srgbClr val="2D6CDF"/>
+                </a:solidFill>
+                <a:latin typeface="맑은 고딕"/>
+                <a:ea typeface="맑은 고딕"/>
+                <a:cs typeface="맑은 고딕"/>
+              </a:rPr>
+              <a:t>•  </a:t>
+            </a:r>
+            <a:r>
+              <a:rPr sz="1200" b="1" i="0">
                 <a:solidFill>
                   <a:srgbClr val="1F2937"/>
                 </a:solidFill>
@@ -12500,21 +12695,124 @@
                 <a:ea typeface="맑은 고딕"/>
                 <a:cs typeface="맑은 고딕"/>
               </a:rPr>
-              <a:t>공유 스키마는 기존 필드 변경 금지, 추가만(additive). 4명이 같은 계약을 읽고 쓴다.</a:t>
-            </a:r>
-          </a:p>
-        </p:txBody>
-      </p:sp>
-      <p:sp>
-        <p:nvSpPr>
-          <p:cNvPr id="8" name="Rounded Rectangle 7"/>
+              <a:t>10명 중 8명에게 전파</a:t>
+            </a:r>
+            <a:r>
+              <a:rPr sz="1200" b="0" i="0">
+                <a:solidFill>
+                  <a:srgbClr val="6B7280"/>
+                </a:solidFill>
+                <a:latin typeface="맑은 고딕"/>
+                <a:ea typeface="맑은 고딕"/>
+                <a:cs typeface="맑은 고딕"/>
+              </a:rPr>
+              <a:t> — 카페가 허브 역할</a:t>
+            </a:r>
+          </a:p>
+          <a:p>
+            <a:pPr algn="l">
+              <a:lnSpc>
+                <a:spcPct val="118000"/>
+              </a:lnSpc>
+              <a:spcBef>
+                <a:spcPts val="0"/>
+              </a:spcBef>
+              <a:spcAft>
+                <a:spcPts val="500"/>
+              </a:spcAft>
+            </a:pPr>
+            <a:r>
+              <a:rPr sz="1200" b="1" i="0">
+                <a:solidFill>
+                  <a:srgbClr val="2D6CDF"/>
+                </a:solidFill>
+                <a:latin typeface="맑은 고딕"/>
+                <a:ea typeface="맑은 고딕"/>
+                <a:cs typeface="맑은 고딕"/>
+              </a:rPr>
+              <a:t>•  </a:t>
+            </a:r>
+            <a:r>
+              <a:rPr sz="1200" b="1" i="0">
+                <a:solidFill>
+                  <a:srgbClr val="D9534F"/>
+                </a:solidFill>
+                <a:latin typeface="맑은 고딕"/>
+                <a:ea typeface="맑은 고딕"/>
+                <a:cs typeface="맑은 고딕"/>
+              </a:rPr>
+              <a:t>사각지대 2명</a:t>
+            </a:r>
+            <a:r>
+              <a:rPr sz="1200" b="0" i="0">
+                <a:solidFill>
+                  <a:srgbClr val="6B7280"/>
+                </a:solidFill>
+                <a:latin typeface="맑은 고딕"/>
+                <a:ea typeface="맑은 고딕"/>
+                <a:cs typeface="맑은 고딕"/>
+              </a:rPr>
+              <a:t> — 동선이 겹치지 않은 모자(母子)</a:t>
+            </a:r>
+          </a:p>
+          <a:p>
+            <a:pPr algn="l">
+              <a:lnSpc>
+                <a:spcPct val="118000"/>
+              </a:lnSpc>
+              <a:spcBef>
+                <a:spcPts val="0"/>
+              </a:spcBef>
+              <a:spcAft>
+                <a:spcPts val="500"/>
+              </a:spcAft>
+            </a:pPr>
+            <a:r>
+              <a:rPr sz="1200" b="1" i="0">
+                <a:solidFill>
+                  <a:srgbClr val="2D6CDF"/>
+                </a:solidFill>
+                <a:latin typeface="맑은 고딕"/>
+                <a:ea typeface="맑은 고딕"/>
+                <a:cs typeface="맑은 고딕"/>
+              </a:rPr>
+              <a:t>•  </a:t>
+            </a:r>
+            <a:r>
+              <a:rPr sz="1200" b="1" i="0">
+                <a:solidFill>
+                  <a:srgbClr val="2E9E6B"/>
+                </a:solidFill>
+                <a:latin typeface="맑은 고딕"/>
+                <a:ea typeface="맑은 고딕"/>
+                <a:cs typeface="맑은 고딕"/>
+              </a:rPr>
+              <a:t>근거 없는 인지 누수 0</a:t>
+            </a:r>
+            <a:r>
+              <a:rPr sz="1200" b="0" i="0">
+                <a:solidFill>
+                  <a:srgbClr val="6B7280"/>
+                </a:solidFill>
+                <a:latin typeface="맑은 고딕"/>
+                <a:ea typeface="맑은 고딕"/>
+                <a:cs typeface="맑은 고딕"/>
+              </a:rPr>
+              <a:t> — 전파 게이트가 코드로 보증</a:t>
+            </a:r>
+          </a:p>
+        </p:txBody>
+      </p:sp>
+      <p:sp>
+        <p:nvSpPr>
+          <p:cNvPr id="21" name="Rounded Rectangle 20"/>
           <p:cNvSpPr/>
           <p:nvPr/>
         </p:nvSpPr>
         <p:spPr>
           <a:xfrm>
-            <a:off x="6245352" y="1691640"/>
-            <a:ext cx="5394960" cy="1234440"/>
+            <a:off x="6245352" y="4160520"/>
+            <a:ext cx="5394960" cy="1920240"/>
           </a:xfrm>
           <a:prstGeom prst="roundRect">
             <a:avLst>
@@ -12522,11 +12820,11 @@
             </a:avLst>
           </a:prstGeom>
           <a:solidFill>
-            <a:srgbClr val="F4F6FA"/>
+            <a:srgbClr val="EAF6F0"/>
           </a:solidFill>
-          <a:ln w="9525">
+          <a:ln w="12700">
             <a:solidFill>
-              <a:srgbClr val="DDE3EC"/>
+              <a:srgbClr val="2E9E6B"/>
             </a:solidFill>
           </a:ln>
           <a:effectLst/>
@@ -12555,14 +12853,14 @@
       </p:sp>
       <p:sp>
         <p:nvSpPr>
-          <p:cNvPr id="9" name="TextBox 8"/>
+          <p:cNvPr id="22" name="TextBox 21"/>
           <p:cNvSpPr txBox="1"/>
           <p:nvPr/>
         </p:nvSpPr>
         <p:spPr>
           <a:xfrm>
-            <a:off x="6446520" y="1810512"/>
-            <a:ext cx="5029200" cy="1005840"/>
+            <a:off x="6473952" y="4315968"/>
+            <a:ext cx="4937760" cy="1645920"/>
           </a:xfrm>
           <a:prstGeom prst="rect">
             <a:avLst/>
@@ -12583,35 +12881,35 @@
                 <a:spcPts val="0"/>
               </a:spcBef>
               <a:spcAft>
-                <a:spcPts val="300"/>
+                <a:spcPts val="600"/>
               </a:spcAft>
             </a:pPr>
             <a:r>
               <a:rPr sz="1350" b="1" i="0">
                 <a:solidFill>
-                  <a:srgbClr val="1F3A5F"/>
-                </a:solidFill>
-                <a:latin typeface="맑은 고딕"/>
-                <a:ea typeface="맑은 고딕"/>
-                <a:cs typeface="맑은 고딕"/>
-              </a:rPr>
-              <a:t>mock 모드 = 발표 안전망</a:t>
-            </a:r>
-          </a:p>
-          <a:p>
-            <a:pPr algn="l">
-              <a:lnSpc>
-                <a:spcPct val="120000"/>
-              </a:lnSpc>
-              <a:spcBef>
-                <a:spcPts val="0"/>
-              </a:spcBef>
-              <a:spcAft>
-                <a:spcPts val="0"/>
-              </a:spcAft>
-            </a:pPr>
-            <a:r>
-              <a:rPr sz="1100" b="0" i="0">
+                  <a:srgbClr val="2E9E6B"/>
+                </a:solidFill>
+                <a:latin typeface="맑은 고딕"/>
+                <a:ea typeface="맑은 고딕"/>
+                <a:cs typeface="맑은 고딕"/>
+              </a:rPr>
+              <a:t>폐기했던 전파 기능의 부활</a:t>
+            </a:r>
+          </a:p>
+          <a:p>
+            <a:pPr algn="l">
+              <a:lnSpc>
+                <a:spcPct val="130000"/>
+              </a:lnSpc>
+              <a:spcBef>
+                <a:spcPts val="0"/>
+              </a:spcBef>
+              <a:spcAft>
+                <a:spcPts val="0"/>
+              </a:spcAft>
+            </a:pPr>
+            <a:r>
+              <a:rPr sz="1200" b="0" i="0">
                 <a:solidFill>
                   <a:srgbClr val="1F2937"/>
                 </a:solidFill>
@@ -12619,69 +12917,21 @@
                 <a:ea typeface="맑은 고딕"/>
                 <a:cs typeface="맑은 고딕"/>
               </a:rPr>
-              <a:t>API 키·네트워크 없이 전체 UI 시연. 발표 중 장애에도 데모는 죽지 않는다.</a:t>
-            </a:r>
-          </a:p>
-        </p:txBody>
-      </p:sp>
-      <p:sp>
-        <p:nvSpPr>
-          <p:cNvPr id="10" name="Rounded Rectangle 9"/>
-          <p:cNvSpPr/>
-          <p:nvPr/>
-        </p:nvSpPr>
-        <p:spPr>
-          <a:xfrm>
-            <a:off x="548640" y="3063240"/>
-            <a:ext cx="5394960" cy="1234440"/>
-          </a:xfrm>
-          <a:prstGeom prst="roundRect">
-            <a:avLst>
-              <a:gd name="adj" fmla="val 8000"/>
-            </a:avLst>
-          </a:prstGeom>
-          <a:solidFill>
-            <a:srgbClr val="F4F6FA"/>
-          </a:solidFill>
-          <a:ln w="9525">
-            <a:solidFill>
-              <a:srgbClr val="DDE3EC"/>
-            </a:solidFill>
-          </a:ln>
-          <a:effectLst/>
-        </p:spPr>
-        <p:style>
-          <a:lnRef idx="1">
-            <a:schemeClr val="accent1"/>
-          </a:lnRef>
-          <a:fillRef idx="3">
-            <a:schemeClr val="accent1"/>
-          </a:fillRef>
-          <a:effectRef idx="2">
-            <a:schemeClr val="accent1"/>
-          </a:effectRef>
-          <a:fontRef idx="minor">
-            <a:schemeClr val="lt1"/>
-          </a:fontRef>
-        </p:style>
-        <p:txBody>
-          <a:bodyPr rtlCol="0" anchor="ctr" wrap="square" lIns="109728" rIns="109728" tIns="54864" bIns="54864"/>
-          <a:lstStyle/>
-          <a:p>
-            <a:pPr algn="ctr"/>
-          </a:p>
-        </p:txBody>
-      </p:sp>
-      <p:sp>
-        <p:nvSpPr>
-          <p:cNvPr id="11" name="TextBox 10"/>
+              <a:t>축 A의 전파 그래프는 ‘서로 모르는 통계 샘플’이라 버렸다(03장). 미리마을은 서로 아는 고정 캐스트 — 여기서의 전파는 연출이 아니라 관계와 동선의 결과다.</a:t>
+            </a:r>
+          </a:p>
+        </p:txBody>
+      </p:sp>
+      <p:sp>
+        <p:nvSpPr>
+          <p:cNvPr id="23" name="TextBox 22"/>
           <p:cNvSpPr txBox="1"/>
           <p:nvPr/>
         </p:nvSpPr>
         <p:spPr>
           <a:xfrm>
-            <a:off x="749808" y="3182112"/>
-            <a:ext cx="5029200" cy="1005840"/>
+            <a:off x="548640" y="6144768"/>
+            <a:ext cx="11091672" cy="329184"/>
           </a:xfrm>
           <a:prstGeom prst="rect">
             <a:avLst/>
@@ -12694,7 +12944,7 @@
           </a:bodyPr>
           <a:lstStyle/>
           <a:p>
-            <a:pPr algn="l">
+            <a:pPr algn="ctr">
               <a:lnSpc>
                 <a:spcPct val="112000"/>
               </a:lnSpc>
@@ -12702,447 +12952,19 @@
                 <a:spcPts val="0"/>
               </a:spcBef>
               <a:spcAft>
-                <a:spcPts val="300"/>
-              </a:spcAft>
-            </a:pPr>
-            <a:r>
-              <a:rPr sz="1350" b="1" i="0">
-                <a:solidFill>
-                  <a:srgbClr val="1F3A5F"/>
-                </a:solidFill>
-                <a:latin typeface="맑은 고딕"/>
-                <a:ea typeface="맑은 고딕"/>
-                <a:cs typeface="맑은 고딕"/>
-              </a:rPr>
-              <a:t>import 부작용 0</a:t>
-            </a:r>
-          </a:p>
-          <a:p>
-            <a:pPr algn="l">
-              <a:lnSpc>
-                <a:spcPct val="120000"/>
-              </a:lnSpc>
-              <a:spcBef>
-                <a:spcPts val="0"/>
-              </a:spcBef>
-              <a:spcAft>
-                <a:spcPts val="0"/>
-              </a:spcAft>
-            </a:pPr>
-            <a:r>
-              <a:rPr sz="1100" b="0" i="0">
-                <a:solidFill>
-                  <a:srgbClr val="1F2937"/>
-                </a:solidFill>
-                <a:latin typeface="맑은 고딕"/>
-                <a:ea typeface="맑은 고딕"/>
-                <a:cs typeface="맑은 고딕"/>
-              </a:rPr>
-              <a:t>어떤 모듈도 import 시 네트워크/LLM 호출 없음. 실행은 버튼을 눌렀을 때만.</a:t>
-            </a:r>
-          </a:p>
-        </p:txBody>
-      </p:sp>
-      <p:sp>
-        <p:nvSpPr>
-          <p:cNvPr id="12" name="Rounded Rectangle 11"/>
-          <p:cNvSpPr/>
-          <p:nvPr/>
-        </p:nvSpPr>
-        <p:spPr>
-          <a:xfrm>
-            <a:off x="6245352" y="3063240"/>
-            <a:ext cx="5394960" cy="1234440"/>
-          </a:xfrm>
-          <a:prstGeom prst="roundRect">
-            <a:avLst>
-              <a:gd name="adj" fmla="val 8000"/>
-            </a:avLst>
-          </a:prstGeom>
-          <a:solidFill>
-            <a:srgbClr val="F4F6FA"/>
-          </a:solidFill>
-          <a:ln w="9525">
-            <a:solidFill>
-              <a:srgbClr val="DDE3EC"/>
-            </a:solidFill>
-          </a:ln>
-          <a:effectLst/>
-        </p:spPr>
-        <p:style>
-          <a:lnRef idx="1">
-            <a:schemeClr val="accent1"/>
-          </a:lnRef>
-          <a:fillRef idx="3">
-            <a:schemeClr val="accent1"/>
-          </a:fillRef>
-          <a:effectRef idx="2">
-            <a:schemeClr val="accent1"/>
-          </a:effectRef>
-          <a:fontRef idx="minor">
-            <a:schemeClr val="lt1"/>
-          </a:fontRef>
-        </p:style>
-        <p:txBody>
-          <a:bodyPr rtlCol="0" anchor="ctr" wrap="square" lIns="109728" rIns="109728" tIns="54864" bIns="54864"/>
-          <a:lstStyle/>
-          <a:p>
-            <a:pPr algn="ctr"/>
-          </a:p>
-        </p:txBody>
-      </p:sp>
-      <p:sp>
-        <p:nvSpPr>
-          <p:cNvPr id="13" name="TextBox 12"/>
-          <p:cNvSpPr txBox="1"/>
-          <p:nvPr/>
-        </p:nvSpPr>
-        <p:spPr>
-          <a:xfrm>
-            <a:off x="6446520" y="3182112"/>
-            <a:ext cx="5029200" cy="1005840"/>
-          </a:xfrm>
-          <a:prstGeom prst="rect">
-            <a:avLst/>
-          </a:prstGeom>
-          <a:noFill/>
-        </p:spPr>
-        <p:txBody>
-          <a:bodyPr wrap="square" lIns="0" rIns="0" tIns="0" bIns="0">
-            <a:spAutoFit/>
-          </a:bodyPr>
-          <a:lstStyle/>
-          <a:p>
-            <a:pPr algn="l">
-              <a:lnSpc>
-                <a:spcPct val="112000"/>
-              </a:lnSpc>
-              <a:spcBef>
-                <a:spcPts val="0"/>
-              </a:spcBef>
-              <a:spcAft>
-                <a:spcPts val="300"/>
-              </a:spcAft>
-            </a:pPr>
-            <a:r>
-              <a:rPr sz="1350" b="1" i="0">
-                <a:solidFill>
-                  <a:srgbClr val="1F3A5F"/>
-                </a:solidFill>
-                <a:latin typeface="맑은 고딕"/>
-                <a:ea typeface="맑은 고딕"/>
-                <a:cs typeface="맑은 고딕"/>
-              </a:rPr>
-              <a:t>헤드리스 회귀 스크립트</a:t>
-            </a:r>
-          </a:p>
-          <a:p>
-            <a:pPr algn="l">
-              <a:lnSpc>
-                <a:spcPct val="120000"/>
-              </a:lnSpc>
-              <a:spcBef>
-                <a:spcPts val="0"/>
-              </a:spcBef>
-              <a:spcAft>
-                <a:spcPts val="0"/>
-              </a:spcAft>
-            </a:pPr>
-            <a:r>
-              <a:rPr sz="1100" b="0" i="0">
-                <a:solidFill>
-                  <a:srgbClr val="1F2937"/>
-                </a:solidFill>
-                <a:latin typeface="맑은 고딕"/>
-                <a:ea typeface="맑은 고딕"/>
-                <a:cs typeface="맑은 고딕"/>
-              </a:rPr>
-              <a:t>선별·게이지·히트맵·전체 앱 스모크 — 변경할 때마다 키 없이 자동 검증.</a:t>
-            </a:r>
-          </a:p>
-        </p:txBody>
-      </p:sp>
-      <p:sp>
-        <p:nvSpPr>
-          <p:cNvPr id="14" name="Rounded Rectangle 13"/>
-          <p:cNvSpPr/>
-          <p:nvPr/>
-        </p:nvSpPr>
-        <p:spPr>
-          <a:xfrm>
-            <a:off x="548640" y="4434840"/>
-            <a:ext cx="5394960" cy="1234440"/>
-          </a:xfrm>
-          <a:prstGeom prst="roundRect">
-            <a:avLst>
-              <a:gd name="adj" fmla="val 8000"/>
-            </a:avLst>
-          </a:prstGeom>
-          <a:solidFill>
-            <a:srgbClr val="F4F6FA"/>
-          </a:solidFill>
-          <a:ln w="9525">
-            <a:solidFill>
-              <a:srgbClr val="DDE3EC"/>
-            </a:solidFill>
-          </a:ln>
-          <a:effectLst/>
-        </p:spPr>
-        <p:style>
-          <a:lnRef idx="1">
-            <a:schemeClr val="accent1"/>
-          </a:lnRef>
-          <a:fillRef idx="3">
-            <a:schemeClr val="accent1"/>
-          </a:fillRef>
-          <a:effectRef idx="2">
-            <a:schemeClr val="accent1"/>
-          </a:effectRef>
-          <a:fontRef idx="minor">
-            <a:schemeClr val="lt1"/>
-          </a:fontRef>
-        </p:style>
-        <p:txBody>
-          <a:bodyPr rtlCol="0" anchor="ctr" wrap="square" lIns="109728" rIns="109728" tIns="54864" bIns="54864"/>
-          <a:lstStyle/>
-          <a:p>
-            <a:pPr algn="ctr"/>
-          </a:p>
-        </p:txBody>
-      </p:sp>
-      <p:sp>
-        <p:nvSpPr>
-          <p:cNvPr id="15" name="TextBox 14"/>
-          <p:cNvSpPr txBox="1"/>
-          <p:nvPr/>
-        </p:nvSpPr>
-        <p:spPr>
-          <a:xfrm>
-            <a:off x="749808" y="4553712"/>
-            <a:ext cx="5029200" cy="1005840"/>
-          </a:xfrm>
-          <a:prstGeom prst="rect">
-            <a:avLst/>
-          </a:prstGeom>
-          <a:noFill/>
-        </p:spPr>
-        <p:txBody>
-          <a:bodyPr wrap="square" lIns="0" rIns="0" tIns="0" bIns="0">
-            <a:spAutoFit/>
-          </a:bodyPr>
-          <a:lstStyle/>
-          <a:p>
-            <a:pPr algn="l">
-              <a:lnSpc>
-                <a:spcPct val="112000"/>
-              </a:lnSpc>
-              <a:spcBef>
-                <a:spcPts val="0"/>
-              </a:spcBef>
-              <a:spcAft>
-                <a:spcPts val="300"/>
-              </a:spcAft>
-            </a:pPr>
-            <a:r>
-              <a:rPr sz="1350" b="1" i="0">
-                <a:solidFill>
-                  <a:srgbClr val="1F3A5F"/>
-                </a:solidFill>
-                <a:latin typeface="맑은 고딕"/>
-                <a:ea typeface="맑은 고딕"/>
-                <a:cs typeface="맑은 고딕"/>
-              </a:rPr>
-              <a:t>탭 격리</a:t>
-            </a:r>
-          </a:p>
-          <a:p>
-            <a:pPr algn="l">
-              <a:lnSpc>
-                <a:spcPct val="120000"/>
-              </a:lnSpc>
-              <a:spcBef>
-                <a:spcPts val="0"/>
-              </a:spcBef>
-              <a:spcAft>
-                <a:spcPts val="0"/>
-              </a:spcAft>
-            </a:pPr>
-            <a:r>
-              <a:rPr sz="1100" b="0" i="0">
-                <a:solidFill>
-                  <a:srgbClr val="1F2937"/>
-                </a:solidFill>
-                <a:latin typeface="맑은 고딕"/>
-                <a:ea typeface="맑은 고딕"/>
-                <a:cs typeface="맑은 고딕"/>
-              </a:rPr>
-              <a:t>한 탭이 죽어도 다른 탭은 산다 — 각 탭을 try/except로 격리.</a:t>
-            </a:r>
-          </a:p>
-        </p:txBody>
-      </p:sp>
-      <p:sp>
-        <p:nvSpPr>
-          <p:cNvPr id="16" name="Rounded Rectangle 15"/>
-          <p:cNvSpPr/>
-          <p:nvPr/>
-        </p:nvSpPr>
-        <p:spPr>
-          <a:xfrm>
-            <a:off x="6245352" y="4434840"/>
-            <a:ext cx="5394960" cy="1234440"/>
-          </a:xfrm>
-          <a:prstGeom prst="roundRect">
-            <a:avLst>
-              <a:gd name="adj" fmla="val 8000"/>
-            </a:avLst>
-          </a:prstGeom>
-          <a:solidFill>
-            <a:srgbClr val="F4F6FA"/>
-          </a:solidFill>
-          <a:ln w="9525">
-            <a:solidFill>
-              <a:srgbClr val="DDE3EC"/>
-            </a:solidFill>
-          </a:ln>
-          <a:effectLst/>
-        </p:spPr>
-        <p:style>
-          <a:lnRef idx="1">
-            <a:schemeClr val="accent1"/>
-          </a:lnRef>
-          <a:fillRef idx="3">
-            <a:schemeClr val="accent1"/>
-          </a:fillRef>
-          <a:effectRef idx="2">
-            <a:schemeClr val="accent1"/>
-          </a:effectRef>
-          <a:fontRef idx="minor">
-            <a:schemeClr val="lt1"/>
-          </a:fontRef>
-        </p:style>
-        <p:txBody>
-          <a:bodyPr rtlCol="0" anchor="ctr" wrap="square" lIns="109728" rIns="109728" tIns="54864" bIns="54864"/>
-          <a:lstStyle/>
-          <a:p>
-            <a:pPr algn="ctr"/>
-          </a:p>
-        </p:txBody>
-      </p:sp>
-      <p:sp>
-        <p:nvSpPr>
-          <p:cNvPr id="17" name="TextBox 16"/>
-          <p:cNvSpPr txBox="1"/>
-          <p:nvPr/>
-        </p:nvSpPr>
-        <p:spPr>
-          <a:xfrm>
-            <a:off x="6446520" y="4553712"/>
-            <a:ext cx="5029200" cy="1005840"/>
-          </a:xfrm>
-          <a:prstGeom prst="rect">
-            <a:avLst/>
-          </a:prstGeom>
-          <a:noFill/>
-        </p:spPr>
-        <p:txBody>
-          <a:bodyPr wrap="square" lIns="0" rIns="0" tIns="0" bIns="0">
-            <a:spAutoFit/>
-          </a:bodyPr>
-          <a:lstStyle/>
-          <a:p>
-            <a:pPr algn="l">
-              <a:lnSpc>
-                <a:spcPct val="112000"/>
-              </a:lnSpc>
-              <a:spcBef>
-                <a:spcPts val="0"/>
-              </a:spcBef>
-              <a:spcAft>
-                <a:spcPts val="300"/>
-              </a:spcAft>
-            </a:pPr>
-            <a:r>
-              <a:rPr sz="1350" b="1" i="0">
-                <a:solidFill>
-                  <a:srgbClr val="1F3A5F"/>
-                </a:solidFill>
-                <a:latin typeface="맑은 고딕"/>
-                <a:ea typeface="맑은 고딕"/>
-                <a:cs typeface="맑은 고딕"/>
-              </a:rPr>
-              <a:t>XSS 방어</a:t>
-            </a:r>
-          </a:p>
-          <a:p>
-            <a:pPr algn="l">
-              <a:lnSpc>
-                <a:spcPct val="120000"/>
-              </a:lnSpc>
-              <a:spcBef>
-                <a:spcPts val="0"/>
-              </a:spcBef>
-              <a:spcAft>
-                <a:spcPts val="0"/>
-              </a:spcAft>
-            </a:pPr>
-            <a:r>
-              <a:rPr sz="1100" b="0" i="0">
-                <a:solidFill>
-                  <a:srgbClr val="1F2937"/>
-                </a:solidFill>
-                <a:latin typeface="맑은 고딕"/>
-                <a:ea typeface="맑은 고딕"/>
-                <a:cs typeface="맑은 고딕"/>
-              </a:rPr>
-              <a:t>LLM 자유 텍스트·시민 이름은 화면에 닿기 전 전부 escape.</a:t>
-            </a:r>
-          </a:p>
-        </p:txBody>
-      </p:sp>
-      <p:sp>
-        <p:nvSpPr>
-          <p:cNvPr id="18" name="TextBox 17"/>
-          <p:cNvSpPr txBox="1"/>
-          <p:nvPr/>
-        </p:nvSpPr>
-        <p:spPr>
-          <a:xfrm>
-            <a:off x="548640" y="5852160"/>
-            <a:ext cx="11091672" cy="457200"/>
-          </a:xfrm>
-          <a:prstGeom prst="rect">
-            <a:avLst/>
-          </a:prstGeom>
-          <a:noFill/>
-        </p:spPr>
-        <p:txBody>
-          <a:bodyPr wrap="square" lIns="0" rIns="0" tIns="0" bIns="0">
-            <a:spAutoFit/>
-          </a:bodyPr>
-          <a:lstStyle/>
-          <a:p>
-            <a:pPr algn="ctr">
-              <a:lnSpc>
-                <a:spcPct val="112000"/>
-              </a:lnSpc>
-              <a:spcBef>
-                <a:spcPts val="0"/>
-              </a:spcBef>
-              <a:spcAft>
-                <a:spcPts val="0"/>
-              </a:spcAft>
-            </a:pPr>
-            <a:r>
-              <a:rPr sz="1150" b="0" i="0">
-                <a:solidFill>
-                  <a:srgbClr val="6B7280"/>
-                </a:solidFill>
-                <a:latin typeface="맑은 고딕"/>
-                <a:ea typeface="맑은 고딕"/>
-                <a:cs typeface="맑은 고딕"/>
-              </a:rPr>
-              <a:t>역할 분담 — (발표 전 채워주세요: 데이터/페르소나 · Agent/프롬프트 · 대시보드/지표 · UI/시각화)</a:t>
+                <a:spcPts val="0"/>
+              </a:spcAft>
+            </a:pPr>
+            <a:r>
+              <a:rPr sz="1250" b="1" i="0">
+                <a:solidFill>
+                  <a:srgbClr val="D9534F"/>
+                </a:solidFill>
+                <a:latin typeface="맑은 고딕"/>
+                <a:ea typeface="맑은 고딕"/>
+                <a:cs typeface="맑은 고딕"/>
+              </a:rPr>
+              <a:t>🎬 여기서 라이브 데모 — 미리마을 재생 60~90초 (재생은 LLM 0콜 = 네트워크가 죽어도 안전)</a:t>
             </a:r>
           </a:p>
         </p:txBody>
@@ -13274,7 +13096,7 @@
                 <a:ea typeface="맑은 고딕"/>
                 <a:cs typeface="맑은 고딕"/>
               </a:rPr>
-              <a:t>한계 — 검증 공격을 받기 전에, 우리가 먼저 말한다</a:t>
+              <a:t>4일 · 4명 — 협업 규율 6가지</a:t>
             </a:r>
           </a:p>
         </p:txBody>
@@ -13392,8 +13214,8 @@
         </p:nvSpPr>
         <p:spPr>
           <a:xfrm>
-            <a:off x="548640" y="1645920"/>
-            <a:ext cx="11091672" cy="795528"/>
+            <a:off x="548640" y="1691640"/>
+            <a:ext cx="5394960" cy="1234440"/>
           </a:xfrm>
           <a:prstGeom prst="roundRect">
             <a:avLst>
@@ -13440,8 +13262,8 @@
         </p:nvSpPr>
         <p:spPr>
           <a:xfrm>
-            <a:off x="804672" y="1719072"/>
-            <a:ext cx="10607040" cy="658368"/>
+            <a:off x="749808" y="1810512"/>
+            <a:ext cx="5029200" cy="1005840"/>
           </a:xfrm>
           <a:prstGeom prst="rect">
             <a:avLst/>
@@ -13456,17 +13278,17 @@
           <a:p>
             <a:pPr algn="l">
               <a:lnSpc>
-                <a:spcPct val="118000"/>
-              </a:lnSpc>
-              <a:spcBef>
-                <a:spcPts val="0"/>
-              </a:spcBef>
-              <a:spcAft>
-                <a:spcPts val="0"/>
-              </a:spcAft>
-            </a:pPr>
-            <a:r>
-              <a:rPr sz="1300" b="1" i="0">
+                <a:spcPct val="112000"/>
+              </a:lnSpc>
+              <a:spcBef>
+                <a:spcPts val="0"/>
+              </a:spcBef>
+              <a:spcAft>
+                <a:spcPts val="300"/>
+              </a:spcAft>
+            </a:pPr>
+            <a:r>
+              <a:rPr sz="1350" b="1" i="0">
                 <a:solidFill>
                   <a:srgbClr val="1F3A5F"/>
                 </a:solidFill>
@@ -13474,10 +13296,23 @@
                 <a:ea typeface="맑은 고딕"/>
                 <a:cs typeface="맑은 고딕"/>
               </a:rPr>
-              <a:t>미래를 맞히는 도구가 아니다   </a:t>
-            </a:r>
-            <a:r>
-              <a:rPr sz="1180" b="0" i="0">
+              <a:t>state.py = 팀 계약</a:t>
+            </a:r>
+          </a:p>
+          <a:p>
+            <a:pPr algn="l">
+              <a:lnSpc>
+                <a:spcPct val="120000"/>
+              </a:lnSpc>
+              <a:spcBef>
+                <a:spcPts val="0"/>
+              </a:spcBef>
+              <a:spcAft>
+                <a:spcPts val="0"/>
+              </a:spcAft>
+            </a:pPr>
+            <a:r>
+              <a:rPr sz="1100" b="0" i="0">
                 <a:solidFill>
                   <a:srgbClr val="1F2937"/>
                 </a:solidFill>
@@ -13485,7 +13320,7 @@
                 <a:ea typeface="맑은 고딕"/>
                 <a:cs typeface="맑은 고딕"/>
               </a:rPr>
-              <a:t>일관되게 ‘영향 시나리오’로 포지셔닝. 신뢰성은 예측 정확도가 아니라 ablation·집단화·견고성으로 방어한다.</a:t>
+              <a:t>공유 스키마는 기존 필드 변경 금지, 추가만(additive). 4명이 같은 계약을 읽고 쓴다.</a:t>
             </a:r>
           </a:p>
         </p:txBody>
@@ -13498,8 +13333,8 @@
         </p:nvSpPr>
         <p:spPr>
           <a:xfrm>
-            <a:off x="548640" y="2532888"/>
-            <a:ext cx="11091672" cy="795528"/>
+            <a:off x="6245352" y="1691640"/>
+            <a:ext cx="5394960" cy="1234440"/>
           </a:xfrm>
           <a:prstGeom prst="roundRect">
             <a:avLst>
@@ -13546,8 +13381,8 @@
         </p:nvSpPr>
         <p:spPr>
           <a:xfrm>
-            <a:off x="804672" y="2606040"/>
-            <a:ext cx="10607040" cy="658368"/>
+            <a:off x="6446520" y="1810512"/>
+            <a:ext cx="5029200" cy="1005840"/>
           </a:xfrm>
           <a:prstGeom prst="rect">
             <a:avLst/>
@@ -13562,17 +13397,17 @@
           <a:p>
             <a:pPr algn="l">
               <a:lnSpc>
-                <a:spcPct val="118000"/>
-              </a:lnSpc>
-              <a:spcBef>
-                <a:spcPts val="0"/>
-              </a:spcBef>
-              <a:spcAft>
-                <a:spcPts val="0"/>
-              </a:spcAft>
-            </a:pPr>
-            <a:r>
-              <a:rPr sz="1300" b="1" i="0">
+                <a:spcPct val="112000"/>
+              </a:lnSpc>
+              <a:spcBef>
+                <a:spcPts val="0"/>
+              </a:spcBef>
+              <a:spcAft>
+                <a:spcPts val="300"/>
+              </a:spcAft>
+            </a:pPr>
+            <a:r>
+              <a:rPr sz="1350" b="1" i="0">
                 <a:solidFill>
                   <a:srgbClr val="1F3A5F"/>
                 </a:solidFill>
@@ -13580,10 +13415,23 @@
                 <a:ea typeface="맑은 고딕"/>
                 <a:cs typeface="맑은 고딕"/>
               </a:rPr>
-              <a:t>소득 판정은 근사다   </a:t>
-            </a:r>
-            <a:r>
-              <a:rPr sz="1180" b="0" i="0">
+              <a:t>mock 모드 = 발표 안전망</a:t>
+            </a:r>
+          </a:p>
+          <a:p>
+            <a:pPr algn="l">
+              <a:lnSpc>
+                <a:spcPct val="120000"/>
+              </a:lnSpc>
+              <a:spcBef>
+                <a:spcPts val="0"/>
+              </a:spcBef>
+              <a:spcAft>
+                <a:spcPts val="0"/>
+              </a:spcAft>
+            </a:pPr>
+            <a:r>
+              <a:rPr sz="1100" b="0" i="0">
                 <a:solidFill>
                   <a:srgbClr val="1F2937"/>
                 </a:solidFill>
@@ -13591,7 +13439,7 @@
                 <a:ea typeface="맑은 고딕"/>
                 <a:cs typeface="맑은 고딕"/>
               </a:rPr>
-              <a:t>직업→소득 버킷은 휴리스틱. 나이는 하드 체크지만 소득은 그만큼 확실하지 않다.</a:t>
+              <a:t>API 키·네트워크 없이 전체 UI 시연. 발표 중 장애에도 데모는 죽지 않는다.</a:t>
             </a:r>
           </a:p>
         </p:txBody>
@@ -13604,8 +13452,8 @@
         </p:nvSpPr>
         <p:spPr>
           <a:xfrm>
-            <a:off x="548640" y="3419856"/>
-            <a:ext cx="11091672" cy="795528"/>
+            <a:off x="548640" y="3063240"/>
+            <a:ext cx="5394960" cy="1234440"/>
           </a:xfrm>
           <a:prstGeom prst="roundRect">
             <a:avLst>
@@ -13652,8 +13500,8 @@
         </p:nvSpPr>
         <p:spPr>
           <a:xfrm>
-            <a:off x="804672" y="3493008"/>
-            <a:ext cx="10607040" cy="658368"/>
+            <a:off x="749808" y="3182112"/>
+            <a:ext cx="5029200" cy="1005840"/>
           </a:xfrm>
           <a:prstGeom prst="rect">
             <a:avLst/>
@@ -13668,17 +13516,17 @@
           <a:p>
             <a:pPr algn="l">
               <a:lnSpc>
-                <a:spcPct val="118000"/>
-              </a:lnSpc>
-              <a:spcBef>
-                <a:spcPts val="0"/>
-              </a:spcBef>
-              <a:spcAft>
-                <a:spcPts val="0"/>
-              </a:spcAft>
-            </a:pPr>
-            <a:r>
-              <a:rPr sz="1300" b="1" i="0">
+                <a:spcPct val="112000"/>
+              </a:lnSpc>
+              <a:spcBef>
+                <a:spcPts val="0"/>
+              </a:spcBef>
+              <a:spcAft>
+                <a:spcPts val="300"/>
+              </a:spcAft>
+            </a:pPr>
+            <a:r>
+              <a:rPr sz="1350" b="1" i="0">
                 <a:solidFill>
                   <a:srgbClr val="1F3A5F"/>
                 </a:solidFill>
@@ -13686,10 +13534,23 @@
                 <a:ea typeface="맑은 고딕"/>
                 <a:cs typeface="맑은 고딕"/>
               </a:rPr>
-              <a:t>현실성 프롬프트의 과교정   </a:t>
-            </a:r>
-            <a:r>
-              <a:rPr sz="1180" b="0" i="0">
+              <a:t>import 부작용 0</a:t>
+            </a:r>
+          </a:p>
+          <a:p>
+            <a:pPr algn="l">
+              <a:lnSpc>
+                <a:spcPct val="120000"/>
+              </a:lnSpc>
+              <a:spcBef>
+                <a:spcPts val="0"/>
+              </a:spcBef>
+              <a:spcAft>
+                <a:spcPts val="0"/>
+              </a:spcAft>
+            </a:pPr>
+            <a:r>
+              <a:rPr sz="1100" b="0" i="0">
                 <a:solidFill>
                   <a:srgbClr val="1F2937"/>
                 </a:solidFill>
@@ -13697,7 +13558,7 @@
                 <a:ea typeface="맑은 고딕"/>
                 <a:cs typeface="맑은 고딕"/>
               </a:rPr>
-              <a:t>정상 정책의 혼란도도 다소 올라간다 — 미세 튜닝은 남은 과제.</a:t>
+              <a:t>어떤 모듈도 import 시 네트워크/LLM 호출 없음. 실행은 버튼을 눌렀을 때만.</a:t>
             </a:r>
           </a:p>
         </p:txBody>
@@ -13710,8 +13571,8 @@
         </p:nvSpPr>
         <p:spPr>
           <a:xfrm>
-            <a:off x="548640" y="4306824"/>
-            <a:ext cx="11091672" cy="795528"/>
+            <a:off x="6245352" y="3063240"/>
+            <a:ext cx="5394960" cy="1234440"/>
           </a:xfrm>
           <a:prstGeom prst="roundRect">
             <a:avLst>
@@ -13758,8 +13619,8 @@
         </p:nvSpPr>
         <p:spPr>
           <a:xfrm>
-            <a:off x="804672" y="4379976"/>
-            <a:ext cx="10607040" cy="658368"/>
+            <a:off x="6446520" y="3182112"/>
+            <a:ext cx="5029200" cy="1005840"/>
           </a:xfrm>
           <a:prstGeom prst="rect">
             <a:avLst/>
@@ -13774,17 +13635,17 @@
           <a:p>
             <a:pPr algn="l">
               <a:lnSpc>
-                <a:spcPct val="118000"/>
-              </a:lnSpc>
-              <a:spcBef>
-                <a:spcPts val="0"/>
-              </a:spcBef>
-              <a:spcAft>
-                <a:spcPts val="0"/>
-              </a:spcAft>
-            </a:pPr>
-            <a:r>
-              <a:rPr sz="1300" b="1" i="0">
+                <a:spcPct val="112000"/>
+              </a:lnSpc>
+              <a:spcBef>
+                <a:spcPts val="0"/>
+              </a:spcBef>
+              <a:spcAft>
+                <a:spcPts val="300"/>
+              </a:spcAft>
+            </a:pPr>
+            <a:r>
+              <a:rPr sz="1350" b="1" i="0">
                 <a:solidFill>
                   <a:srgbClr val="1F3A5F"/>
                 </a:solidFill>
@@ -13792,10 +13653,23 @@
                 <a:ea typeface="맑은 고딕"/>
                 <a:cs typeface="맑은 고딕"/>
               </a:rPr>
-              <a:t>표본이 작다   </a:t>
-            </a:r>
-            <a:r>
-              <a:rPr sz="1180" b="0" i="0">
+              <a:t>헤드리스 회귀 스크립트</a:t>
+            </a:r>
+          </a:p>
+          <a:p>
+            <a:pPr algn="l">
+              <a:lnSpc>
+                <a:spcPct val="120000"/>
+              </a:lnSpc>
+              <a:spcBef>
+                <a:spcPts val="0"/>
+              </a:spcBef>
+              <a:spcAft>
+                <a:spcPts val="0"/>
+              </a:spcAft>
+            </a:pPr>
+            <a:r>
+              <a:rPr sz="1100" b="0" i="0">
                 <a:solidFill>
                   <a:srgbClr val="1F2937"/>
                 </a:solidFill>
@@ -13803,7 +13677,7 @@
                 <a:ea typeface="맑은 고딕"/>
                 <a:cs typeface="맑은 고딕"/>
               </a:rPr>
-              <a:t>시민 8~24명. 통계적 일반화가 아니라 ‘구조가 나타나는지’의 시연이다. 3명 대조는 의도된 좁힘 — 위에 전체 분포 헤드라인으로 보완.</a:t>
+              <a:t>선별·게이지·히트맵·전체 앱 스모크 — 변경할 때마다 키 없이 자동 검증.</a:t>
             </a:r>
           </a:p>
         </p:txBody>
@@ -13816,8 +13690,8 @@
         </p:nvSpPr>
         <p:spPr>
           <a:xfrm>
-            <a:off x="548640" y="5193792"/>
-            <a:ext cx="11091672" cy="795528"/>
+            <a:off x="548640" y="4434840"/>
+            <a:ext cx="5394960" cy="1234440"/>
           </a:xfrm>
           <a:prstGeom prst="roundRect">
             <a:avLst>
@@ -13864,8 +13738,8 @@
         </p:nvSpPr>
         <p:spPr>
           <a:xfrm>
-            <a:off x="804672" y="5266944"/>
-            <a:ext cx="10607040" cy="658368"/>
+            <a:off x="749808" y="4553712"/>
+            <a:ext cx="5029200" cy="1005840"/>
           </a:xfrm>
           <a:prstGeom prst="rect">
             <a:avLst/>
@@ -13880,17 +13754,17 @@
           <a:p>
             <a:pPr algn="l">
               <a:lnSpc>
-                <a:spcPct val="118000"/>
-              </a:lnSpc>
-              <a:spcBef>
-                <a:spcPts val="0"/>
-              </a:spcBef>
-              <a:spcAft>
-                <a:spcPts val="0"/>
-              </a:spcAft>
-            </a:pPr>
-            <a:r>
-              <a:rPr sz="1300" b="1" i="0">
+                <a:spcPct val="112000"/>
+              </a:lnSpc>
+              <a:spcBef>
+                <a:spcPts val="0"/>
+              </a:spcBef>
+              <a:spcAft>
+                <a:spcPts val="300"/>
+              </a:spcAft>
+            </a:pPr>
+            <a:r>
+              <a:rPr sz="1350" b="1" i="0">
                 <a:solidFill>
                   <a:srgbClr val="1F3A5F"/>
                 </a:solidFill>
@@ -13898,10 +13772,23 @@
                 <a:ea typeface="맑은 고딕"/>
                 <a:cs typeface="맑은 고딕"/>
               </a:rPr>
-              <a:t>LLM-judge의 순환   </a:t>
-            </a:r>
-            <a:r>
-              <a:rPr sz="1180" b="0" i="0">
+              <a:t>탭 격리</a:t>
+            </a:r>
+          </a:p>
+          <a:p>
+            <a:pPr algn="l">
+              <a:lnSpc>
+                <a:spcPct val="120000"/>
+              </a:lnSpc>
+              <a:spcBef>
+                <a:spcPts val="0"/>
+              </a:spcBef>
+              <a:spcAft>
+                <a:spcPts val="0"/>
+              </a:spcAft>
+            </a:pPr>
+            <a:r>
+              <a:rPr sz="1100" b="0" i="0">
                 <a:solidFill>
                   <a:srgbClr val="1F2937"/>
                 </a:solidFill>
@@ -13909,7 +13796,173 @@
                 <a:ea typeface="맑은 고딕"/>
                 <a:cs typeface="맑은 고딕"/>
               </a:rPr>
-              <a:t>LLM이 LLM을 채점하는 한계 — 절대 점수보다 집단 간 비교와 대표 예시로 해석한다.</a:t>
+              <a:t>한 탭이 죽어도 다른 탭은 산다 — 각 탭을 try/except로 격리.</a:t>
+            </a:r>
+          </a:p>
+        </p:txBody>
+      </p:sp>
+      <p:sp>
+        <p:nvSpPr>
+          <p:cNvPr id="16" name="Rounded Rectangle 15"/>
+          <p:cNvSpPr/>
+          <p:nvPr/>
+        </p:nvSpPr>
+        <p:spPr>
+          <a:xfrm>
+            <a:off x="6245352" y="4434840"/>
+            <a:ext cx="5394960" cy="1234440"/>
+          </a:xfrm>
+          <a:prstGeom prst="roundRect">
+            <a:avLst>
+              <a:gd name="adj" fmla="val 8000"/>
+            </a:avLst>
+          </a:prstGeom>
+          <a:solidFill>
+            <a:srgbClr val="F4F6FA"/>
+          </a:solidFill>
+          <a:ln w="9525">
+            <a:solidFill>
+              <a:srgbClr val="DDE3EC"/>
+            </a:solidFill>
+          </a:ln>
+          <a:effectLst/>
+        </p:spPr>
+        <p:style>
+          <a:lnRef idx="1">
+            <a:schemeClr val="accent1"/>
+          </a:lnRef>
+          <a:fillRef idx="3">
+            <a:schemeClr val="accent1"/>
+          </a:fillRef>
+          <a:effectRef idx="2">
+            <a:schemeClr val="accent1"/>
+          </a:effectRef>
+          <a:fontRef idx="minor">
+            <a:schemeClr val="lt1"/>
+          </a:fontRef>
+        </p:style>
+        <p:txBody>
+          <a:bodyPr rtlCol="0" anchor="ctr" wrap="square" lIns="109728" rIns="109728" tIns="54864" bIns="54864"/>
+          <a:lstStyle/>
+          <a:p>
+            <a:pPr algn="ctr"/>
+          </a:p>
+        </p:txBody>
+      </p:sp>
+      <p:sp>
+        <p:nvSpPr>
+          <p:cNvPr id="17" name="TextBox 16"/>
+          <p:cNvSpPr txBox="1"/>
+          <p:nvPr/>
+        </p:nvSpPr>
+        <p:spPr>
+          <a:xfrm>
+            <a:off x="6446520" y="4553712"/>
+            <a:ext cx="5029200" cy="1005840"/>
+          </a:xfrm>
+          <a:prstGeom prst="rect">
+            <a:avLst/>
+          </a:prstGeom>
+          <a:noFill/>
+        </p:spPr>
+        <p:txBody>
+          <a:bodyPr wrap="square" lIns="0" rIns="0" tIns="0" bIns="0">
+            <a:spAutoFit/>
+          </a:bodyPr>
+          <a:lstStyle/>
+          <a:p>
+            <a:pPr algn="l">
+              <a:lnSpc>
+                <a:spcPct val="112000"/>
+              </a:lnSpc>
+              <a:spcBef>
+                <a:spcPts val="0"/>
+              </a:spcBef>
+              <a:spcAft>
+                <a:spcPts val="300"/>
+              </a:spcAft>
+            </a:pPr>
+            <a:r>
+              <a:rPr sz="1350" b="1" i="0">
+                <a:solidFill>
+                  <a:srgbClr val="1F3A5F"/>
+                </a:solidFill>
+                <a:latin typeface="맑은 고딕"/>
+                <a:ea typeface="맑은 고딕"/>
+                <a:cs typeface="맑은 고딕"/>
+              </a:rPr>
+              <a:t>XSS 방어</a:t>
+            </a:r>
+          </a:p>
+          <a:p>
+            <a:pPr algn="l">
+              <a:lnSpc>
+                <a:spcPct val="120000"/>
+              </a:lnSpc>
+              <a:spcBef>
+                <a:spcPts val="0"/>
+              </a:spcBef>
+              <a:spcAft>
+                <a:spcPts val="0"/>
+              </a:spcAft>
+            </a:pPr>
+            <a:r>
+              <a:rPr sz="1100" b="0" i="0">
+                <a:solidFill>
+                  <a:srgbClr val="1F2937"/>
+                </a:solidFill>
+                <a:latin typeface="맑은 고딕"/>
+                <a:ea typeface="맑은 고딕"/>
+                <a:cs typeface="맑은 고딕"/>
+              </a:rPr>
+              <a:t>LLM 자유 텍스트·시민 이름은 화면에 닿기 전 전부 escape.</a:t>
+            </a:r>
+          </a:p>
+        </p:txBody>
+      </p:sp>
+      <p:sp>
+        <p:nvSpPr>
+          <p:cNvPr id="18" name="TextBox 17"/>
+          <p:cNvSpPr txBox="1"/>
+          <p:nvPr/>
+        </p:nvSpPr>
+        <p:spPr>
+          <a:xfrm>
+            <a:off x="548640" y="5852160"/>
+            <a:ext cx="11091672" cy="457200"/>
+          </a:xfrm>
+          <a:prstGeom prst="rect">
+            <a:avLst/>
+          </a:prstGeom>
+          <a:noFill/>
+        </p:spPr>
+        <p:txBody>
+          <a:bodyPr wrap="square" lIns="0" rIns="0" tIns="0" bIns="0">
+            <a:spAutoFit/>
+          </a:bodyPr>
+          <a:lstStyle/>
+          <a:p>
+            <a:pPr algn="ctr">
+              <a:lnSpc>
+                <a:spcPct val="112000"/>
+              </a:lnSpc>
+              <a:spcBef>
+                <a:spcPts val="0"/>
+              </a:spcBef>
+              <a:spcAft>
+                <a:spcPts val="0"/>
+              </a:spcAft>
+            </a:pPr>
+            <a:r>
+              <a:rPr sz="1150" b="0" i="0">
+                <a:solidFill>
+                  <a:srgbClr val="6B7280"/>
+                </a:solidFill>
+                <a:latin typeface="맑은 고딕"/>
+                <a:ea typeface="맑은 고딕"/>
+                <a:cs typeface="맑은 고딕"/>
+              </a:rPr>
+              <a:t>역할 분담 — (발표 전 채워주세요: 데이터/페르소나 · Agent/프롬프트 · 대시보드/지표 · UI/시각화)</a:t>
             </a:r>
           </a:p>
         </p:txBody>
@@ -14041,7 +14094,7 @@
                 <a:ea typeface="맑은 고딕"/>
                 <a:cs typeface="맑은 고딕"/>
               </a:rPr>
-              <a:t>오늘 이야기의 순서 — 약 12~15분</a:t>
+              <a:t>발표 순서 (약 12~15분)</a:t>
             </a:r>
           </a:p>
         </p:txBody>
@@ -14753,7 +14806,7 @@
                 <a:ea typeface="맑은 고딕"/>
                 <a:cs typeface="맑은 고딕"/>
               </a:rPr>
-              <a:t>왜 이 모양이 되었나 — 막다른 길 3가지</a:t>
+              <a:t>스코프 조정과 시행착오 3가지</a:t>
             </a:r>
           </a:p>
         </p:txBody>
@@ -14971,7 +15024,7 @@
                 <a:ea typeface="맑은 고딕"/>
                 <a:cs typeface="맑은 고딕"/>
               </a:rPr>
-              <a:t>ablation + 집단화·견고성·설득력 (정량)</a:t>
+              <a:t>검증 3축(재료·작동·한계) + 사전등록 + 행동 벤치마크</a:t>
             </a:r>
           </a:p>
         </p:txBody>
@@ -15018,7 +15071,7 @@
                 <a:ea typeface="맑은 고딕"/>
                 <a:cs typeface="맑은 고딕"/>
               </a:rPr>
-              <a:t>약 2.5분</a:t>
+              <a:t>약 3분</a:t>
             </a:r>
           </a:p>
         </p:txBody>
@@ -15407,7 +15460,7 @@
                 <a:ea typeface="맑은 고딕"/>
                 <a:cs typeface="맑은 고딕"/>
               </a:rPr>
-              <a:t>팀 규율 → 정직한 한계 → 핵심 메시지 → Q&amp;A</a:t>
+              <a:t>팀 규율 · 한계 · 핵심 메시지 · Q&amp;A</a:t>
             </a:r>
           </a:p>
         </p:txBody>
@@ -15479,6 +15532,773 @@
       <p:grpSpPr/>
       <p:sp>
         <p:nvSpPr>
+          <p:cNvPr id="2" name="Rounded Rectangle 1"/>
+          <p:cNvSpPr/>
+          <p:nvPr/>
+        </p:nvSpPr>
+        <p:spPr>
+          <a:xfrm>
+            <a:off x="548640" y="384048"/>
+            <a:ext cx="1600200" cy="292608"/>
+          </a:xfrm>
+          <a:prstGeom prst="roundRect">
+            <a:avLst>
+              <a:gd name="adj" fmla="val 50000"/>
+            </a:avLst>
+          </a:prstGeom>
+          <a:solidFill>
+            <a:srgbClr val="6B7280"/>
+          </a:solidFill>
+          <a:ln>
+            <a:noFill/>
+          </a:ln>
+          <a:effectLst/>
+        </p:spPr>
+        <p:style>
+          <a:lnRef idx="1">
+            <a:schemeClr val="accent1"/>
+          </a:lnRef>
+          <a:fillRef idx="3">
+            <a:schemeClr val="accent1"/>
+          </a:fillRef>
+          <a:effectRef idx="2">
+            <a:schemeClr val="accent1"/>
+          </a:effectRef>
+          <a:fontRef idx="minor">
+            <a:schemeClr val="lt1"/>
+          </a:fontRef>
+        </p:style>
+        <p:txBody>
+          <a:bodyPr rtlCol="0" anchor="ctr" wrap="square" lIns="109728" rIns="109728" tIns="54864" bIns="54864"/>
+          <a:lstStyle/>
+          <a:p>
+            <a:pPr algn="ctr">
+              <a:lnSpc>
+                <a:spcPct val="112000"/>
+              </a:lnSpc>
+              <a:spcBef>
+                <a:spcPts val="0"/>
+              </a:spcBef>
+              <a:spcAft>
+                <a:spcPts val="0"/>
+              </a:spcAft>
+            </a:pPr>
+            <a:r>
+              <a:rPr sz="1100" b="1" i="0">
+                <a:solidFill>
+                  <a:srgbClr val="FFFFFF"/>
+                </a:solidFill>
+                <a:latin typeface="맑은 고딕"/>
+                <a:ea typeface="맑은 고딕"/>
+                <a:cs typeface="맑은 고딕"/>
+              </a:rPr>
+              <a:t>06 마무리</a:t>
+            </a:r>
+          </a:p>
+        </p:txBody>
+      </p:sp>
+      <p:sp>
+        <p:nvSpPr>
+          <p:cNvPr id="3" name="TextBox 2"/>
+          <p:cNvSpPr txBox="1"/>
+          <p:nvPr/>
+        </p:nvSpPr>
+        <p:spPr>
+          <a:xfrm>
+            <a:off x="548640" y="749808"/>
+            <a:ext cx="11094415" cy="685800"/>
+          </a:xfrm>
+          <a:prstGeom prst="rect">
+            <a:avLst/>
+          </a:prstGeom>
+          <a:noFill/>
+        </p:spPr>
+        <p:txBody>
+          <a:bodyPr wrap="square" lIns="0" rIns="0" tIns="0" bIns="0">
+            <a:spAutoFit/>
+          </a:bodyPr>
+          <a:lstStyle/>
+          <a:p>
+            <a:pPr algn="l">
+              <a:lnSpc>
+                <a:spcPct val="112000"/>
+              </a:lnSpc>
+              <a:spcBef>
+                <a:spcPts val="0"/>
+              </a:spcBef>
+              <a:spcAft>
+                <a:spcPts val="0"/>
+              </a:spcAft>
+            </a:pPr>
+            <a:r>
+              <a:rPr sz="2700" b="1" i="0">
+                <a:solidFill>
+                  <a:srgbClr val="1F3A5F"/>
+                </a:solidFill>
+                <a:latin typeface="맑은 고딕"/>
+                <a:ea typeface="맑은 고딕"/>
+                <a:cs typeface="맑은 고딕"/>
+              </a:rPr>
+              <a:t>한계 — 먼저 말해두는 다섯 가지</a:t>
+            </a:r>
+          </a:p>
+        </p:txBody>
+      </p:sp>
+      <p:sp>
+        <p:nvSpPr>
+          <p:cNvPr id="4" name="TextBox 3"/>
+          <p:cNvSpPr txBox="1"/>
+          <p:nvPr/>
+        </p:nvSpPr>
+        <p:spPr>
+          <a:xfrm>
+            <a:off x="548640" y="6528816"/>
+            <a:ext cx="11094415" cy="274320"/>
+          </a:xfrm>
+          <a:prstGeom prst="rect">
+            <a:avLst/>
+          </a:prstGeom>
+          <a:noFill/>
+        </p:spPr>
+        <p:txBody>
+          <a:bodyPr wrap="square" lIns="0" rIns="0" tIns="0" bIns="0">
+            <a:spAutoFit/>
+          </a:bodyPr>
+          <a:lstStyle/>
+          <a:p>
+            <a:pPr algn="l">
+              <a:lnSpc>
+                <a:spcPct val="112000"/>
+              </a:lnSpc>
+              <a:spcBef>
+                <a:spcPts val="0"/>
+              </a:spcBef>
+              <a:spcAft>
+                <a:spcPts val="0"/>
+              </a:spcAft>
+            </a:pPr>
+            <a:r>
+              <a:rPr sz="900" b="1" i="0">
+                <a:solidFill>
+                  <a:srgbClr val="6B7280"/>
+                </a:solidFill>
+                <a:latin typeface="맑은 고딕"/>
+                <a:ea typeface="맑은 고딕"/>
+                <a:cs typeface="맑은 고딕"/>
+              </a:rPr>
+              <a:t>미리랩</a:t>
+            </a:r>
+            <a:r>
+              <a:rPr sz="900" b="0" i="0">
+                <a:solidFill>
+                  <a:srgbClr val="6B7280"/>
+                </a:solidFill>
+                <a:latin typeface="맑은 고딕"/>
+                <a:ea typeface="맑은 고딕"/>
+                <a:cs typeface="맑은 고딕"/>
+              </a:rPr>
+              <a:t>  ·  AI 시민 사회 정책 실험실</a:t>
+            </a:r>
+          </a:p>
+        </p:txBody>
+      </p:sp>
+      <p:sp>
+        <p:nvSpPr>
+          <p:cNvPr id="5" name="TextBox 4"/>
+          <p:cNvSpPr txBox="1"/>
+          <p:nvPr/>
+        </p:nvSpPr>
+        <p:spPr>
+          <a:xfrm>
+            <a:off x="11094415" y="6528816"/>
+            <a:ext cx="548640" cy="274320"/>
+          </a:xfrm>
+          <a:prstGeom prst="rect">
+            <a:avLst/>
+          </a:prstGeom>
+          <a:noFill/>
+        </p:spPr>
+        <p:txBody>
+          <a:bodyPr wrap="square" lIns="0" rIns="0" tIns="0" bIns="0">
+            <a:spAutoFit/>
+          </a:bodyPr>
+          <a:lstStyle/>
+          <a:p>
+            <a:pPr algn="r">
+              <a:lnSpc>
+                <a:spcPct val="112000"/>
+              </a:lnSpc>
+              <a:spcBef>
+                <a:spcPts val="0"/>
+              </a:spcBef>
+              <a:spcAft>
+                <a:spcPts val="0"/>
+              </a:spcAft>
+            </a:pPr>
+            <a:r>
+              <a:rPr sz="900" b="0" i="0">
+                <a:solidFill>
+                  <a:srgbClr val="6B7280"/>
+                </a:solidFill>
+                <a:latin typeface="맑은 고딕"/>
+                <a:ea typeface="맑은 고딕"/>
+                <a:cs typeface="맑은 고딕"/>
+              </a:rPr>
+              <a:t>20</a:t>
+            </a:r>
+          </a:p>
+        </p:txBody>
+      </p:sp>
+      <p:sp>
+        <p:nvSpPr>
+          <p:cNvPr id="6" name="Rounded Rectangle 5"/>
+          <p:cNvSpPr/>
+          <p:nvPr/>
+        </p:nvSpPr>
+        <p:spPr>
+          <a:xfrm>
+            <a:off x="548640" y="1645920"/>
+            <a:ext cx="11091672" cy="795528"/>
+          </a:xfrm>
+          <a:prstGeom prst="roundRect">
+            <a:avLst>
+              <a:gd name="adj" fmla="val 8000"/>
+            </a:avLst>
+          </a:prstGeom>
+          <a:solidFill>
+            <a:srgbClr val="F4F6FA"/>
+          </a:solidFill>
+          <a:ln w="9525">
+            <a:solidFill>
+              <a:srgbClr val="DDE3EC"/>
+            </a:solidFill>
+          </a:ln>
+          <a:effectLst/>
+        </p:spPr>
+        <p:style>
+          <a:lnRef idx="1">
+            <a:schemeClr val="accent1"/>
+          </a:lnRef>
+          <a:fillRef idx="3">
+            <a:schemeClr val="accent1"/>
+          </a:fillRef>
+          <a:effectRef idx="2">
+            <a:schemeClr val="accent1"/>
+          </a:effectRef>
+          <a:fontRef idx="minor">
+            <a:schemeClr val="lt1"/>
+          </a:fontRef>
+        </p:style>
+        <p:txBody>
+          <a:bodyPr rtlCol="0" anchor="ctr" wrap="square" lIns="109728" rIns="109728" tIns="54864" bIns="54864"/>
+          <a:lstStyle/>
+          <a:p>
+            <a:pPr algn="ctr"/>
+          </a:p>
+        </p:txBody>
+      </p:sp>
+      <p:sp>
+        <p:nvSpPr>
+          <p:cNvPr id="7" name="TextBox 6"/>
+          <p:cNvSpPr txBox="1"/>
+          <p:nvPr/>
+        </p:nvSpPr>
+        <p:spPr>
+          <a:xfrm>
+            <a:off x="804672" y="1719072"/>
+            <a:ext cx="10607040" cy="658368"/>
+          </a:xfrm>
+          <a:prstGeom prst="rect">
+            <a:avLst/>
+          </a:prstGeom>
+          <a:noFill/>
+        </p:spPr>
+        <p:txBody>
+          <a:bodyPr wrap="square" lIns="0" rIns="0" tIns="0" bIns="0">
+            <a:spAutoFit/>
+          </a:bodyPr>
+          <a:lstStyle/>
+          <a:p>
+            <a:pPr algn="l">
+              <a:lnSpc>
+                <a:spcPct val="118000"/>
+              </a:lnSpc>
+              <a:spcBef>
+                <a:spcPts val="0"/>
+              </a:spcBef>
+              <a:spcAft>
+                <a:spcPts val="0"/>
+              </a:spcAft>
+            </a:pPr>
+            <a:r>
+              <a:rPr sz="1300" b="1" i="0">
+                <a:solidFill>
+                  <a:srgbClr val="1F3A5F"/>
+                </a:solidFill>
+                <a:latin typeface="맑은 고딕"/>
+                <a:ea typeface="맑은 고딕"/>
+                <a:cs typeface="맑은 고딕"/>
+              </a:rPr>
+              <a:t>미래를 맞히는 도구가 아니다   </a:t>
+            </a:r>
+            <a:r>
+              <a:rPr sz="1180" b="0" i="0">
+                <a:solidFill>
+                  <a:srgbClr val="1F2937"/>
+                </a:solidFill>
+                <a:latin typeface="맑은 고딕"/>
+                <a:ea typeface="맑은 고딕"/>
+                <a:cs typeface="맑은 고딕"/>
+              </a:rPr>
+              <a:t>일관되게 ‘영향 시나리오’로 포지셔닝. 신뢰성은 예측 정확도가 아니라 검증 3축(재료·작동·한계)과 사전등록으로 방어한다.</a:t>
+            </a:r>
+          </a:p>
+        </p:txBody>
+      </p:sp>
+      <p:sp>
+        <p:nvSpPr>
+          <p:cNvPr id="8" name="Rounded Rectangle 7"/>
+          <p:cNvSpPr/>
+          <p:nvPr/>
+        </p:nvSpPr>
+        <p:spPr>
+          <a:xfrm>
+            <a:off x="548640" y="2532888"/>
+            <a:ext cx="11091672" cy="795528"/>
+          </a:xfrm>
+          <a:prstGeom prst="roundRect">
+            <a:avLst>
+              <a:gd name="adj" fmla="val 8000"/>
+            </a:avLst>
+          </a:prstGeom>
+          <a:solidFill>
+            <a:srgbClr val="F4F6FA"/>
+          </a:solidFill>
+          <a:ln w="9525">
+            <a:solidFill>
+              <a:srgbClr val="DDE3EC"/>
+            </a:solidFill>
+          </a:ln>
+          <a:effectLst/>
+        </p:spPr>
+        <p:style>
+          <a:lnRef idx="1">
+            <a:schemeClr val="accent1"/>
+          </a:lnRef>
+          <a:fillRef idx="3">
+            <a:schemeClr val="accent1"/>
+          </a:fillRef>
+          <a:effectRef idx="2">
+            <a:schemeClr val="accent1"/>
+          </a:effectRef>
+          <a:fontRef idx="minor">
+            <a:schemeClr val="lt1"/>
+          </a:fontRef>
+        </p:style>
+        <p:txBody>
+          <a:bodyPr rtlCol="0" anchor="ctr" wrap="square" lIns="109728" rIns="109728" tIns="54864" bIns="54864"/>
+          <a:lstStyle/>
+          <a:p>
+            <a:pPr algn="ctr"/>
+          </a:p>
+        </p:txBody>
+      </p:sp>
+      <p:sp>
+        <p:nvSpPr>
+          <p:cNvPr id="9" name="TextBox 8"/>
+          <p:cNvSpPr txBox="1"/>
+          <p:nvPr/>
+        </p:nvSpPr>
+        <p:spPr>
+          <a:xfrm>
+            <a:off x="804672" y="2606040"/>
+            <a:ext cx="10607040" cy="658368"/>
+          </a:xfrm>
+          <a:prstGeom prst="rect">
+            <a:avLst/>
+          </a:prstGeom>
+          <a:noFill/>
+        </p:spPr>
+        <p:txBody>
+          <a:bodyPr wrap="square" lIns="0" rIns="0" tIns="0" bIns="0">
+            <a:spAutoFit/>
+          </a:bodyPr>
+          <a:lstStyle/>
+          <a:p>
+            <a:pPr algn="l">
+              <a:lnSpc>
+                <a:spcPct val="118000"/>
+              </a:lnSpc>
+              <a:spcBef>
+                <a:spcPts val="0"/>
+              </a:spcBef>
+              <a:spcAft>
+                <a:spcPts val="0"/>
+              </a:spcAft>
+            </a:pPr>
+            <a:r>
+              <a:rPr sz="1300" b="1" i="0">
+                <a:solidFill>
+                  <a:srgbClr val="1F3A5F"/>
+                </a:solidFill>
+                <a:latin typeface="맑은 고딕"/>
+                <a:ea typeface="맑은 고딕"/>
+                <a:cs typeface="맑은 고딕"/>
+              </a:rPr>
+              <a:t>소득 판정은 근사다   </a:t>
+            </a:r>
+            <a:r>
+              <a:rPr sz="1180" b="0" i="0">
+                <a:solidFill>
+                  <a:srgbClr val="1F2937"/>
+                </a:solidFill>
+                <a:latin typeface="맑은 고딕"/>
+                <a:ea typeface="맑은 고딕"/>
+                <a:cs typeface="맑은 고딕"/>
+              </a:rPr>
+              <a:t>직업→소득 버킷은 휴리스틱. 그래서 검증 ⑤(의무 기부)는 시민의 자가판정을 썼다 — 코드보다 시민이 자기 형편을 더 잘 안다.</a:t>
+            </a:r>
+          </a:p>
+        </p:txBody>
+      </p:sp>
+      <p:sp>
+        <p:nvSpPr>
+          <p:cNvPr id="10" name="Rounded Rectangle 9"/>
+          <p:cNvSpPr/>
+          <p:nvPr/>
+        </p:nvSpPr>
+        <p:spPr>
+          <a:xfrm>
+            <a:off x="548640" y="3419856"/>
+            <a:ext cx="11091672" cy="795528"/>
+          </a:xfrm>
+          <a:prstGeom prst="roundRect">
+            <a:avLst>
+              <a:gd name="adj" fmla="val 8000"/>
+            </a:avLst>
+          </a:prstGeom>
+          <a:solidFill>
+            <a:srgbClr val="F4F6FA"/>
+          </a:solidFill>
+          <a:ln w="9525">
+            <a:solidFill>
+              <a:srgbClr val="DDE3EC"/>
+            </a:solidFill>
+          </a:ln>
+          <a:effectLst/>
+        </p:spPr>
+        <p:style>
+          <a:lnRef idx="1">
+            <a:schemeClr val="accent1"/>
+          </a:lnRef>
+          <a:fillRef idx="3">
+            <a:schemeClr val="accent1"/>
+          </a:fillRef>
+          <a:effectRef idx="2">
+            <a:schemeClr val="accent1"/>
+          </a:effectRef>
+          <a:fontRef idx="minor">
+            <a:schemeClr val="lt1"/>
+          </a:fontRef>
+        </p:style>
+        <p:txBody>
+          <a:bodyPr rtlCol="0" anchor="ctr" wrap="square" lIns="109728" rIns="109728" tIns="54864" bIns="54864"/>
+          <a:lstStyle/>
+          <a:p>
+            <a:pPr algn="ctr"/>
+          </a:p>
+        </p:txBody>
+      </p:sp>
+      <p:sp>
+        <p:nvSpPr>
+          <p:cNvPr id="11" name="TextBox 10"/>
+          <p:cNvSpPr txBox="1"/>
+          <p:nvPr/>
+        </p:nvSpPr>
+        <p:spPr>
+          <a:xfrm>
+            <a:off x="804672" y="3493008"/>
+            <a:ext cx="10607040" cy="658368"/>
+          </a:xfrm>
+          <a:prstGeom prst="rect">
+            <a:avLst/>
+          </a:prstGeom>
+          <a:noFill/>
+        </p:spPr>
+        <p:txBody>
+          <a:bodyPr wrap="square" lIns="0" rIns="0" tIns="0" bIns="0">
+            <a:spAutoFit/>
+          </a:bodyPr>
+          <a:lstStyle/>
+          <a:p>
+            <a:pPr algn="l">
+              <a:lnSpc>
+                <a:spcPct val="118000"/>
+              </a:lnSpc>
+              <a:spcBef>
+                <a:spcPts val="0"/>
+              </a:spcBef>
+              <a:spcAft>
+                <a:spcPts val="0"/>
+              </a:spcAft>
+            </a:pPr>
+            <a:r>
+              <a:rPr sz="1300" b="1" i="0">
+                <a:solidFill>
+                  <a:srgbClr val="1F3A5F"/>
+                </a:solidFill>
+                <a:latin typeface="맑은 고딕"/>
+                <a:ea typeface="맑은 고딕"/>
+                <a:cs typeface="맑은 고딕"/>
+              </a:rPr>
+              <a:t>‘실현 기대’ 측정축이 없다   </a:t>
+            </a:r>
+            <a:r>
+              <a:rPr sz="1180" b="0" i="0">
+                <a:solidFill>
+                  <a:srgbClr val="1F2937"/>
+                </a:solidFill>
+                <a:latin typeface="맑은 고딕"/>
+                <a:ea typeface="맑은 고딕"/>
+                <a:cs typeface="맑은 고딕"/>
+              </a:rPr>
+              <a:t>“안 믿지만 받으면 좋지”가 수혜·의향 점수에 섞인다 — 설문에 실현 기대 문항 추가가 다음 후보.</a:t>
+            </a:r>
+          </a:p>
+        </p:txBody>
+      </p:sp>
+      <p:sp>
+        <p:nvSpPr>
+          <p:cNvPr id="12" name="Rounded Rectangle 11"/>
+          <p:cNvSpPr/>
+          <p:nvPr/>
+        </p:nvSpPr>
+        <p:spPr>
+          <a:xfrm>
+            <a:off x="548640" y="4306824"/>
+            <a:ext cx="11091672" cy="795528"/>
+          </a:xfrm>
+          <a:prstGeom prst="roundRect">
+            <a:avLst>
+              <a:gd name="adj" fmla="val 8000"/>
+            </a:avLst>
+          </a:prstGeom>
+          <a:solidFill>
+            <a:srgbClr val="F4F6FA"/>
+          </a:solidFill>
+          <a:ln w="9525">
+            <a:solidFill>
+              <a:srgbClr val="DDE3EC"/>
+            </a:solidFill>
+          </a:ln>
+          <a:effectLst/>
+        </p:spPr>
+        <p:style>
+          <a:lnRef idx="1">
+            <a:schemeClr val="accent1"/>
+          </a:lnRef>
+          <a:fillRef idx="3">
+            <a:schemeClr val="accent1"/>
+          </a:fillRef>
+          <a:effectRef idx="2">
+            <a:schemeClr val="accent1"/>
+          </a:effectRef>
+          <a:fontRef idx="minor">
+            <a:schemeClr val="lt1"/>
+          </a:fontRef>
+        </p:style>
+        <p:txBody>
+          <a:bodyPr rtlCol="0" anchor="ctr" wrap="square" lIns="109728" rIns="109728" tIns="54864" bIns="54864"/>
+          <a:lstStyle/>
+          <a:p>
+            <a:pPr algn="ctr"/>
+          </a:p>
+        </p:txBody>
+      </p:sp>
+      <p:sp>
+        <p:nvSpPr>
+          <p:cNvPr id="13" name="TextBox 12"/>
+          <p:cNvSpPr txBox="1"/>
+          <p:nvPr/>
+        </p:nvSpPr>
+        <p:spPr>
+          <a:xfrm>
+            <a:off x="804672" y="4379976"/>
+            <a:ext cx="10607040" cy="658368"/>
+          </a:xfrm>
+          <a:prstGeom prst="rect">
+            <a:avLst/>
+          </a:prstGeom>
+          <a:noFill/>
+        </p:spPr>
+        <p:txBody>
+          <a:bodyPr wrap="square" lIns="0" rIns="0" tIns="0" bIns="0">
+            <a:spAutoFit/>
+          </a:bodyPr>
+          <a:lstStyle/>
+          <a:p>
+            <a:pPr algn="l">
+              <a:lnSpc>
+                <a:spcPct val="118000"/>
+              </a:lnSpc>
+              <a:spcBef>
+                <a:spcPts val="0"/>
+              </a:spcBef>
+              <a:spcAft>
+                <a:spcPts val="0"/>
+              </a:spcAft>
+            </a:pPr>
+            <a:r>
+              <a:rPr sz="1300" b="1" i="0">
+                <a:solidFill>
+                  <a:srgbClr val="1F3A5F"/>
+                </a:solidFill>
+                <a:latin typeface="맑은 고딕"/>
+                <a:ea typeface="맑은 고딕"/>
+                <a:cs typeface="맑은 고딕"/>
+              </a:rPr>
+              <a:t>표본이 작다   </a:t>
+            </a:r>
+            <a:r>
+              <a:rPr sz="1180" b="0" i="0">
+                <a:solidFill>
+                  <a:srgbClr val="1F2937"/>
+                </a:solidFill>
+                <a:latin typeface="맑은 고딕"/>
+                <a:ea typeface="맑은 고딕"/>
+                <a:cs typeface="맑은 고딕"/>
+              </a:rPr>
+              <a:t>시민 24명 — 비율 최소 단위 4.2%p. 통계적 일반화가 아니라 ‘구조가 나타나는지’의 시연. 벤치마크는 1회 실행(폭 우선).</a:t>
+            </a:r>
+          </a:p>
+        </p:txBody>
+      </p:sp>
+      <p:sp>
+        <p:nvSpPr>
+          <p:cNvPr id="14" name="Rounded Rectangle 13"/>
+          <p:cNvSpPr/>
+          <p:nvPr/>
+        </p:nvSpPr>
+        <p:spPr>
+          <a:xfrm>
+            <a:off x="548640" y="5193792"/>
+            <a:ext cx="11091672" cy="795528"/>
+          </a:xfrm>
+          <a:prstGeom prst="roundRect">
+            <a:avLst>
+              <a:gd name="adj" fmla="val 8000"/>
+            </a:avLst>
+          </a:prstGeom>
+          <a:solidFill>
+            <a:srgbClr val="F4F6FA"/>
+          </a:solidFill>
+          <a:ln w="9525">
+            <a:solidFill>
+              <a:srgbClr val="DDE3EC"/>
+            </a:solidFill>
+          </a:ln>
+          <a:effectLst/>
+        </p:spPr>
+        <p:style>
+          <a:lnRef idx="1">
+            <a:schemeClr val="accent1"/>
+          </a:lnRef>
+          <a:fillRef idx="3">
+            <a:schemeClr val="accent1"/>
+          </a:fillRef>
+          <a:effectRef idx="2">
+            <a:schemeClr val="accent1"/>
+          </a:effectRef>
+          <a:fontRef idx="minor">
+            <a:schemeClr val="lt1"/>
+          </a:fontRef>
+        </p:style>
+        <p:txBody>
+          <a:bodyPr rtlCol="0" anchor="ctr" wrap="square" lIns="109728" rIns="109728" tIns="54864" bIns="54864"/>
+          <a:lstStyle/>
+          <a:p>
+            <a:pPr algn="ctr"/>
+          </a:p>
+        </p:txBody>
+      </p:sp>
+      <p:sp>
+        <p:nvSpPr>
+          <p:cNvPr id="15" name="TextBox 14"/>
+          <p:cNvSpPr txBox="1"/>
+          <p:nvPr/>
+        </p:nvSpPr>
+        <p:spPr>
+          <a:xfrm>
+            <a:off x="804672" y="5266944"/>
+            <a:ext cx="10607040" cy="658368"/>
+          </a:xfrm>
+          <a:prstGeom prst="rect">
+            <a:avLst/>
+          </a:prstGeom>
+          <a:noFill/>
+        </p:spPr>
+        <p:txBody>
+          <a:bodyPr wrap="square" lIns="0" rIns="0" tIns="0" bIns="0">
+            <a:spAutoFit/>
+          </a:bodyPr>
+          <a:lstStyle/>
+          <a:p>
+            <a:pPr algn="l">
+              <a:lnSpc>
+                <a:spcPct val="118000"/>
+              </a:lnSpc>
+              <a:spcBef>
+                <a:spcPts val="0"/>
+              </a:spcBef>
+              <a:spcAft>
+                <a:spcPts val="0"/>
+              </a:spcAft>
+            </a:pPr>
+            <a:r>
+              <a:rPr sz="1300" b="1" i="0">
+                <a:solidFill>
+                  <a:srgbClr val="1F3A5F"/>
+                </a:solidFill>
+                <a:latin typeface="맑은 고딕"/>
+                <a:ea typeface="맑은 고딕"/>
+                <a:cs typeface="맑은 고딕"/>
+              </a:rPr>
+              <a:t>이념·가치 축이 없다   </a:t>
+            </a:r>
+            <a:r>
+              <a:rPr sz="1180" b="0" i="0">
+                <a:solidFill>
+                  <a:srgbClr val="1F2937"/>
+                </a:solidFill>
+                <a:latin typeface="맑은 고딕"/>
+                <a:ea typeface="맑은 고딕"/>
+                <a:cs typeface="맑은 고딕"/>
+              </a:rPr>
+              <a:t>과거 정책 갭 측정(시뮬 vs 당시 여론조사)에서 찬성률 MAE 27.4%p — 주범은 반대 진영 소실. 처방은 프롬프트가 아니라 데이터 강화.</a:t>
+            </a:r>
+          </a:p>
+        </p:txBody>
+      </p:sp>
+    </p:spTree>
+  </p:cSld>
+  <p:clrMapOvr>
+    <a:masterClrMapping/>
+  </p:clrMapOvr>
+</p:sld>
+</file>
+
+<file path=ppt/slides/slide21.xml><?xml version="1.0" encoding="utf-8"?>
+<p:sld xmlns:a="http://schemas.openxmlformats.org/drawingml/2006/main" xmlns:p="http://schemas.openxmlformats.org/presentationml/2006/main" xmlns:r="http://schemas.openxmlformats.org/officeDocument/2006/relationships">
+  <p:cSld>
+    <p:spTree>
+      <p:nvGrpSpPr>
+        <p:cNvPr id="1" name=""/>
+        <p:cNvGrpSpPr/>
+        <p:nvPr/>
+      </p:nvGrpSpPr>
+      <p:grpSpPr/>
+      <p:sp>
+        <p:nvSpPr>
           <p:cNvPr id="2" name="Rectangle 1"/>
           <p:cNvSpPr/>
           <p:nvPr/>
@@ -15728,7 +16548,7 @@
                 <a:ea typeface="맑은 고딕"/>
                 <a:cs typeface="맑은 고딕"/>
               </a:rPr>
-              <a:t>다음 — 실데이터 대조</a:t>
+              <a:t>다음 — 이념·가치 축</a:t>
             </a:r>
           </a:p>
           <a:p>
@@ -15752,7 +16572,7 @@
                 <a:ea typeface="맑은 고딕"/>
                 <a:cs typeface="맑은 고딕"/>
               </a:rPr>
-              <a:t>실제 신청률·인지율 통계와 방향 대조 — 1순위</a:t>
+              <a:t>갭 27.4%p의 주범 ‘반대 진영 소실’ — 데이터 강화로 해소</a:t>
             </a:r>
           </a:p>
         </p:txBody>
@@ -15847,7 +16667,7 @@
                 <a:ea typeface="맑은 고딕"/>
                 <a:cs typeface="맑은 고딕"/>
               </a:rPr>
-              <a:t>다음 — 페르소나 RAG</a:t>
+              <a:t>다음 — 실현 기대 문항</a:t>
             </a:r>
           </a:p>
           <a:p>
@@ -15871,7 +16691,7 @@
                 <a:ea typeface="맑은 고딕"/>
                 <a:cs typeface="맑은 고딕"/>
               </a:rPr>
-              <a:t>정책 태그를 검색 키로 · 스키마 확보</a:t>
+              <a:t>“안 믿지만 받으면 좋지”를 분리하는 설문 축 추가</a:t>
             </a:r>
           </a:p>
         </p:txBody>
@@ -15966,7 +16786,7 @@
                 <a:ea typeface="맑은 고딕"/>
                 <a:cs typeface="맑은 고딕"/>
               </a:rPr>
-              <a:t>다음 — 미리마을 확장</a:t>
+              <a:t>다음 — 갭 리베이스라인</a:t>
             </a:r>
           </a:p>
           <a:p>
@@ -15990,7 +16810,7 @@
                 <a:ea typeface="맑은 고딕"/>
                 <a:cs typeface="맑은 고딕"/>
               </a:rPr>
-              <a:t>누적 기억(B단계) · 적응 스케줄</a:t>
+              <a:t>Gemini 기준 재측정 — 개선 폭을 같은 자로 추적</a:t>
             </a:r>
           </a:p>
         </p:txBody>
@@ -16085,7 +16905,7 @@
                 <a:ea typeface="맑은 고딕"/>
                 <a:cs typeface="맑은 고딕"/>
               </a:rPr>
-              <a:t>다음 — 튜닝 고도화</a:t>
+              <a:t>다음 — 미리마을 확장</a:t>
             </a:r>
           </a:p>
           <a:p>
@@ -16109,7 +16929,7 @@
                 <a:ea typeface="맑은 고딕"/>
                 <a:cs typeface="맑은 고딕"/>
               </a:rPr>
-              <a:t>현실성 과교정 보정 · 게이지 정밀화</a:t>
+              <a:t>누적 기억(B단계) · 적응 스케줄 · 페르소나 RAG</a:t>
             </a:r>
           </a:p>
         </p:txBody>
@@ -16300,7 +17120,7 @@
                 <a:ea typeface="맑은 고딕"/>
                 <a:cs typeface="맑은 고딕"/>
               </a:rPr>
-              <a:t>데이터 nvidia/Nemotron-Personas-Korea (CC BY 4.0) · LangGraph · Streamlit · gpt-4o-mini · Generative Agents (Park et al., 2023)</a:t>
+              <a:t>데이터 nvidia/Nemotron-Personas-Korea (CC BY 4.0) · LangGraph · Streamlit · gemini-3-flash / gpt-4o-mini · Generative Agents (Park et al., 2023)</a:t>
             </a:r>
           </a:p>
         </p:txBody>
@@ -17452,7 +18272,7 @@
                 <a:ea typeface="맑은 고딕"/>
                 <a:cs typeface="맑은 고딕"/>
               </a:rPr>
-              <a:t>미리랩 — 정책을 시민 입장에서 ‘미리’ 실험한다</a:t>
+              <a:t>미리랩 — 정책을 시민 입장에서 미리 실험한다</a:t>
             </a:r>
           </a:p>
         </p:txBody>
@@ -18989,7 +19809,7 @@
                 <a:ea typeface="맑은 고딕"/>
                 <a:cs typeface="맑은 고딕"/>
               </a:rPr>
-              <a:t>시민 전원 5축 점수 (이해 · 수혜 · 의향 · 불만 · 공유)</a:t>
+              <a:t>시민 전원: 입장 + 익명 설문 (LLM은 선택지만, 숫자 변환은 코드)</a:t>
             </a:r>
           </a:p>
           <a:p>
@@ -19037,7 +19857,7 @@
                 <a:ea typeface="맑은 고딕"/>
                 <a:cs typeface="맑은 고딕"/>
               </a:rPr>
-              <a:t>집계 → 수정안 → 같은 시민으로 A/B 재검증 (개선 폐루프)</a:t>
+              <a:t>집계 → 고정 양식 6절 종합 리포트 (두 축 종합 진단, .md)</a:t>
             </a:r>
           </a:p>
         </p:txBody>
@@ -19418,7 +20238,7 @@
                 <a:ea typeface="맑은 고딕"/>
                 <a:cs typeface="맑은 고딕"/>
               </a:rPr>
-              <a:t>mock 모드 = API 키 없이 전체 UI 데모 가능 (발표 안전망)</a:t>
+              <a:t>데모 = 실제 Gemini 시뮬 녹화 재생 (키·네트워크 0콜) + 합성 mock 폴백 (2중 안전망)</a:t>
             </a:r>
           </a:p>
         </p:txBody>
@@ -19550,7 +20370,7 @@
                 <a:ea typeface="맑은 고딕"/>
                 <a:cs typeface="맑은 고딕"/>
               </a:rPr>
-              <a:t>페르소나 — “손으로 만들지 않는다”</a:t>
+              <a:t>페르소나 — 손으로 만들지 않고 통계에서 뽑는다</a:t>
             </a:r>
           </a:p>
         </p:txBody>
@@ -19702,7 +20522,7 @@
                 <a:ea typeface="맑은 고딕"/>
                 <a:cs typeface="맑은 고딕"/>
               </a:rPr>
-              <a:t>원칙: 그럴듯한 가짜 대신, 실제 통계</a:t>
+              <a:t>원칙: 그럴듯한 가짜 대신 실제 통계</a:t>
             </a:r>
           </a:p>
           <a:p>
@@ -19936,7 +20756,7 @@
                 <a:ea typeface="맑은 고딕"/>
                 <a:cs typeface="맑은 고딕"/>
               </a:rPr>
-              <a:t>개요 초안은 “페르소나 20~30명 직접 설계”였다. 손으로 만들면 우리가 보고 싶은 반응을 심게 된다. 실제 분포에서 샘플링하면 ‘시드 안에 이미 사각지대 인물이 들어 있다.’</a:t>
+              <a:t>개요 초안은 “페르소나 20~30명 직접 설계”였다. 손으로 만들면 우리가 보고 싶은 반응을 심게 된다. 실제 분포에서 샘플링하면 사각지대 인물이 처음부터 표본 안에 들어 있다.</a:t>
             </a:r>
           </a:p>
         </p:txBody>
@@ -20175,7 +20995,7 @@
                 <a:ea typeface="맑은 고딕"/>
                 <a:cs typeface="맑은 고딕"/>
               </a:rPr>
-              <a:t>uuid 해시 지터 0.5±0.1 — 같은 사람은 항상 같은 값</a:t>
+              <a:t>자리표시자(노이즈) — 프롬프트엔 미주입, 접근도 가중 한 곳만</a:t>
             </a:r>
           </a:p>
           <a:p>
@@ -20229,7 +21049,7 @@
           <a:p>
             <a:pPr algn="l">
               <a:lnSpc>
-                <a:spcPct val="112000"/>
+                <a:spcPct val="120000"/>
               </a:lnSpc>
               <a:spcBef>
                 <a:spcPts val="0"/>
@@ -20241,13 +21061,24 @@
             <a:r>
               <a:rPr sz="1150" b="1" i="0">
                 <a:solidFill>
-                  <a:srgbClr val="6B7280"/>
-                </a:solidFill>
-                <a:latin typeface="맑은 고딕"/>
-                <a:ea typeface="맑은 고딕"/>
-                <a:cs typeface="맑은 고딕"/>
-              </a:rPr>
-              <a:t>같은 입력 → 항상 같은 출력. “판단은 LLM, 사실은 코드” 철학의 시작.</a:t>
+                  <a:srgbClr val="2E9E6B"/>
+                </a:solidFill>
+                <a:latin typeface="맑은 고딕"/>
+                <a:ea typeface="맑은 고딕"/>
+                <a:cs typeface="맑은 고딕"/>
+              </a:rPr>
+              <a:t>검증 ① 통과 — </a:t>
+            </a:r>
+            <a:r>
+              <a:rPr sz="1150" b="0" i="0">
+                <a:solidFill>
+                  <a:srgbClr val="1F2937"/>
+                </a:solidFill>
+                <a:latin typeface="맑은 고딕"/>
+                <a:ea typeface="맑은 고딕"/>
+                <a:cs typeface="맑은 고딕"/>
+              </a:rPr>
+              <a:t>표본 24명, 나이·성별·지역·학력 등 7개 변수 전부 무작위 추출 기대범위 안 (부트스트랩 1만회)</a:t>
             </a:r>
           </a:p>
         </p:txBody>
@@ -20379,7 +21210,7 @@
                 <a:ea typeface="맑은 고딕"/>
                 <a:cs typeface="맑은 고딕"/>
               </a:rPr>
-              <a:t>축 A — 시민 반응: 집단의 온도를 잰다</a:t>
+              <a:t>축 A — 시민 반응: 집단의 온도</a:t>
             </a:r>
           </a:p>
         </p:txBody>
@@ -20603,7 +21434,7 @@
                 <a:ea typeface="맑은 고딕"/>
                 <a:cs typeface="맑은 고딕"/>
               </a:rPr>
-              <a:t>시민 각자: 입장(찬/반/혼합) + 5축 점수 (이해·수혜·의향·불만·공유, 0~100)</a:t>
+              <a:t>시민 각자: 반응문 + 입장(찬/반/혼합) + 익명 설문 — LLM은 선택지 토큰만, 0~100 변환은 코드</a:t>
             </a:r>
           </a:p>
         </p:txBody>
@@ -20935,7 +21766,7 @@
                 <a:ea typeface="맑은 고딕"/>
                 <a:cs typeface="맑은 고딕"/>
               </a:rPr>
-              <a:t>갈등/합의 요약 + 수정안(개선 반영 정책) 생성</a:t>
+              <a:t>갈등/합의 요약 + 개선 제안 (실제 시민 반응에서만 — 종합 리포트 재료)</a:t>
             </a:r>
           </a:p>
         </p:txBody>
@@ -21122,7 +21953,7 @@
                 <a:ea typeface="맑은 고딕"/>
                 <a:cs typeface="맑은 고딕"/>
               </a:rPr>
-              <a:t>정책 개선 탭 — 수정안을 같은 시민 코호트로 A/B 재검증</a:t>
+              <a:t>정책 개선 탭 — 고정 양식 6절 종합 리포트 (.md 다운로드, LLM 1콜)</a:t>
             </a:r>
           </a:p>
         </p:txBody>
@@ -21347,7 +22178,7 @@
                 <a:ea typeface="맑은 고딕"/>
                 <a:cs typeface="맑은 고딕"/>
               </a:rPr>
-              <a:t>축 B — 정책 인생극장: 개인의 궤적을 따라간다</a:t>
+              <a:t>축 B — 정책 인생극장: 개인의 궤적</a:t>
             </a:r>
           </a:p>
         </p:txBody>
@@ -21998,7 +22829,7 @@
                 <a:ea typeface="맑은 고딕"/>
                 <a:cs typeface="맑은 고딕"/>
               </a:rPr>
-              <a:t>청년은 복지로에서 5분 — 고령은 어디에도 못 닿아 ‘집’에 갇힌다.</a:t>
+              <a:t>청년은 복지로에서 5분, 고령은 어느 채널에도 닿지 못한다.</a:t>
             </a:r>
           </a:p>
         </p:txBody>
@@ -22223,7 +23054,7 @@
                 <a:ea typeface="맑은 고딕"/>
                 <a:cs typeface="맑은 고딕"/>
               </a:rPr>
-              <a:t>스코프의 진화 — 무엇을, 왜 덜어냈나</a:t>
+              <a:t>스코프 조정 — 무엇을 왜 덜어냈나</a:t>
             </a:r>
           </a:p>
         </p:txBody>
@@ -22613,7 +23444,7 @@
                 <a:ea typeface="맑은 고딕"/>
                 <a:cs typeface="맑은 고딕"/>
               </a:rPr>
-              <a:t>통계에서 무작위 샘플링한 페르소나는 서로 모르는 독립 개인 — 그 사이에 ‘전파 엣지’를 그리는 건 근거 없는 연출이다.</a:t>
+              <a:t>통계에서 무작위 샘플링한 페르소나는 서로 모르는 독립 개인이라, 그 사이에 전파 엣지를 그릴 근거가 없다.</a:t>
             </a:r>
           </a:p>
         </p:txBody>
@@ -22732,7 +23563,7 @@
                 <a:ea typeface="맑은 고딕"/>
                 <a:cs typeface="맑은 고딕"/>
               </a:rPr>
-              <a:t>24명 × 여러 시점은 해커톤에 무겁고 “24명이 대표성 있냐”는 공격에 약하다. 수혜/경계/사각 3명이면 갈림이 한 화면에.</a:t>
+              <a:t>24명 × 여러 시점은 해커톤에 무겁고 “24명이 대표성 있냐”는 공격에 약하다. 수혜/경계/사각 3명이면 갈림이 한 화면에 들어온다.</a:t>
             </a:r>
           </a:p>
         </p:txBody>
@@ -22851,7 +23682,7 @@
                 <a:ea typeface="맑은 고딕"/>
                 <a:cs typeface="맑은 고딕"/>
               </a:rPr>
-              <a:t>맞히는 도구라고 주장하는 순간 검증 공격을 받는다. ‘영향 시나리오’로 포지셔닝하고, 신뢰성은 ablation으로 방어한다.</a:t>
+              <a:t>맞히는 도구라고 주장하는 순간 검증 공격을 받는다. 영향 시나리오로 포지셔닝하고, 신뢰성은 별도 검증(04장)으로 방어한다.</a:t>
             </a:r>
           </a:p>
         </p:txBody>
@@ -22957,7 +23788,7 @@
                 <a:ea typeface="맑은 고딕"/>
                 <a:cs typeface="맑은 고딕"/>
               </a:rPr>
-              <a:t>전파는 ‘미리마을’로, RAG는 ‘게시판’으로 결국 돌아왔다 (05장)</a:t>
+              <a:t>전파는 미리마을로, RAG는 게시판으로 결국 돌아왔다 (05장)</a:t>
             </a:r>
           </a:p>
         </p:txBody>
